--- a/RAG_AgentCore_Workshop.pptx
+++ b/RAG_AgentCore_Workshop.pptx
@@ -4,6 +4,9 @@
   <p:sldMasterIdLst>
     <p:sldMasterId id="2147483648" r:id="rId1"/>
   </p:sldMasterIdLst>
+  <p:notesMasterIdLst>
+    <p:notesMasterId r:id="rId12"/>
+  </p:notesMasterIdLst>
   <p:sldIdLst>
     <p:sldId id="256" r:id="rId2"/>
     <p:sldId id="257" r:id="rId3"/>
@@ -16,10 +19,7 @@
     <p:sldId id="264" r:id="rId10"/>
     <p:sldId id="265" r:id="rId11"/>
   </p:sldIdLst>
-  <p:notesMasterIdLst>
-    <p:notesMasterId r:id="rId12"/>
-  </p:notesMasterIdLst>
-  <p:sldSz cx="9144000" cy="5143500"/>
+  <p:sldSz cx="9144000" cy="5143500" type="screen16x9"/>
   <p:notesSz cx="5143500" cy="9144000"/>
   <p:defaultTextStyle>
     <a:lvl1pPr marL="0" algn="l" defTabSz="914400" rtl="0" eaLnBrk="1" latinLnBrk="0" hangingPunct="1">
@@ -113,6 +113,11 @@
       </a:defRPr>
     </a:lvl9pPr>
   </p:defaultTextStyle>
+  <p:extLst>
+    <p:ext uri="{EFAFB233-063F-42B5-8137-9DF3F51BA10A}">
+      <p15:sldGuideLst xmlns:p15="http://schemas.microsoft.com/office/powerpoint/2012/main"/>
+    </p:ext>
+  </p:extLst>
 </p:presentation>
 </file>
 
@@ -138,234 +143,10 @@
           <a:chExt cx="0" cy="0"/>
         </a:xfrm>
       </p:grpSpPr>
-      <p:sp>
-        <p:nvSpPr>
-          <p:cNvPr id="2" name="Header Placeholder 1"/>
-          <p:cNvSpPr>
-            <a:spLocks noGrp="1"/>
-          </p:cNvSpPr>
-          <p:nvPr>
-            <p:ph type="hdr" sz="quarter"/>
-          </p:nvPr>
-        </p:nvSpPr>
-        <p:spPr>
-          <a:xfrm>
-            <a:off x="0" y="0"/>
-            <a:ext cx="2971800" cy="458788"/>
-          </a:xfrm>
-          <a:prstGeom prst="rect">
-            <a:avLst/>
-          </a:prstGeom>
-        </p:spPr>
-        <p:txBody>
-          <a:bodyPr vert="horz" lIns="91440" tIns="45720" rIns="91440" bIns="45720" rtlCol="0"/>
-          <a:lstStyle>
-            <a:lvl1pPr algn="l">
-              <a:defRPr sz="1200"/>
-            </a:lvl1pPr>
-          </a:lstStyle>
-          <a:p>
-            <a:endParaRPr lang="en-US"/>
-          </a:p>
-        </p:txBody>
-      </p:sp>
-      <p:sp>
-        <p:nvSpPr>
-          <p:cNvPr id="3" name="Date Placeholder 2"/>
-          <p:cNvSpPr>
-            <a:spLocks noGrp="1"/>
-          </p:cNvSpPr>
-          <p:nvPr>
-            <p:ph type="dt" idx="1"/>
-          </p:nvPr>
-        </p:nvSpPr>
-        <p:spPr>
-          <a:xfrm>
-            <a:off x="3884613" y="0"/>
-            <a:ext cx="2971800" cy="458788"/>
-          </a:xfrm>
-          <a:prstGeom prst="rect">
-            <a:avLst/>
-          </a:prstGeom>
-        </p:spPr>
-        <p:txBody>
-          <a:bodyPr vert="horz" lIns="91440" tIns="45720" rIns="91440" bIns="45720" rtlCol="0"/>
-          <a:lstStyle>
-            <a:lvl1pPr algn="r">
-              <a:defRPr sz="1200"/>
-            </a:lvl1pPr>
-          </a:lstStyle>
-          <a:p>
-            <a:fld id="{5282F153-3F37-0F45-9E97-73ACFA13230C}" type="datetimeFigureOut">
-              <a:rPr lang="en-US"/>
-              <a:t>7/23/19</a:t>
-            </a:fld>
-            <a:endParaRPr lang="en-US"/>
-          </a:p>
-        </p:txBody>
-      </p:sp>
-      <p:sp>
-        <p:nvSpPr>
-          <p:cNvPr id="4" name="Slide Image Placeholder 3"/>
-          <p:cNvSpPr>
-            <a:spLocks noGrp="1" noRot="1" noChangeAspect="1"/>
-          </p:cNvSpPr>
-          <p:nvPr>
-            <p:ph type="sldImg" idx="2"/>
-          </p:nvPr>
-        </p:nvSpPr>
-        <p:spPr>
-          <a:xfrm>
-            <a:off x="685800" y="1143000"/>
-            <a:ext cx="5486400" cy="3086100"/>
-          </a:xfrm>
-          <a:prstGeom prst="rect">
-            <a:avLst/>
-          </a:prstGeom>
-          <a:noFill/>
-          <a:ln w="12700">
-            <a:solidFill>
-              <a:prstClr val="black"/>
-            </a:solidFill>
-          </a:ln>
-        </p:spPr>
-        <p:txBody>
-          <a:bodyPr vert="horz" lIns="91440" tIns="45720" rIns="91440" bIns="45720" rtlCol="0" anchor="ctr"/>
-          <a:lstStyle/>
-          <a:p>
-            <a:endParaRPr lang="en-US"/>
-          </a:p>
-        </p:txBody>
-      </p:sp>
-      <p:sp>
-        <p:nvSpPr>
-          <p:cNvPr id="5" name="Notes Placeholder 4"/>
-          <p:cNvSpPr>
-            <a:spLocks noGrp="1"/>
-          </p:cNvSpPr>
-          <p:nvPr>
-            <p:ph type="body" sz="quarter" idx="3"/>
-          </p:nvPr>
-        </p:nvSpPr>
-        <p:spPr>
-          <a:xfrm>
-            <a:off x="685800" y="4400550"/>
-            <a:ext cx="5486400" cy="3600450"/>
-          </a:xfrm>
-          <a:prstGeom prst="rect">
-            <a:avLst/>
-          </a:prstGeom>
-        </p:spPr>
-        <p:txBody>
-          <a:bodyPr vert="horz" lIns="91440" tIns="45720" rIns="91440" bIns="45720" rtlCol="0"/>
-          <a:lstStyle/>
-          <a:p>
-            <a:pPr lvl="0"/>
-            <a:r>
-              <a:rPr lang="en-US"/>
-              <a:t>Click to edit Master text styles</a:t>
-            </a:r>
-          </a:p>
-          <a:p>
-            <a:pPr lvl="1"/>
-            <a:r>
-              <a:rPr lang="en-US"/>
-              <a:t>Second level</a:t>
-            </a:r>
-          </a:p>
-          <a:p>
-            <a:pPr lvl="2"/>
-            <a:r>
-              <a:rPr lang="en-US"/>
-              <a:t>Third level</a:t>
-            </a:r>
-          </a:p>
-          <a:p>
-            <a:pPr lvl="3"/>
-            <a:r>
-              <a:rPr lang="en-US"/>
-              <a:t>Fourth level</a:t>
-            </a:r>
-          </a:p>
-          <a:p>
-            <a:pPr lvl="4"/>
-            <a:r>
-              <a:rPr lang="en-US"/>
-              <a:t>Fifth level</a:t>
-            </a:r>
-          </a:p>
-        </p:txBody>
-      </p:sp>
-      <p:sp>
-        <p:nvSpPr>
-          <p:cNvPr id="6" name="Footer Placeholder 5"/>
-          <p:cNvSpPr>
-            <a:spLocks noGrp="1"/>
-          </p:cNvSpPr>
-          <p:nvPr>
-            <p:ph type="ftr" sz="quarter" idx="4"/>
-          </p:nvPr>
-        </p:nvSpPr>
-        <p:spPr>
-          <a:xfrm>
-            <a:off x="0" y="8685213"/>
-            <a:ext cx="2971800" cy="458787"/>
-          </a:xfrm>
-          <a:prstGeom prst="rect">
-            <a:avLst/>
-          </a:prstGeom>
-        </p:spPr>
-        <p:txBody>
-          <a:bodyPr vert="horz" lIns="91440" tIns="45720" rIns="91440" bIns="45720" rtlCol="0" anchor="b"/>
-          <a:lstStyle>
-            <a:lvl1pPr algn="l">
-              <a:defRPr sz="1200"/>
-            </a:lvl1pPr>
-          </a:lstStyle>
-          <a:p>
-            <a:endParaRPr lang="en-US"/>
-          </a:p>
-        </p:txBody>
-      </p:sp>
-      <p:sp>
-        <p:nvSpPr>
-          <p:cNvPr id="7" name="Slide Number Placeholder 6"/>
-          <p:cNvSpPr>
-            <a:spLocks noGrp="1"/>
-          </p:cNvSpPr>
-          <p:nvPr>
-            <p:ph type="sldNum" sz="quarter" idx="5"/>
-          </p:nvPr>
-        </p:nvSpPr>
-        <p:spPr>
-          <a:xfrm>
-            <a:off x="3884613" y="8685213"/>
-            <a:ext cx="2971800" cy="458787"/>
-          </a:xfrm>
-          <a:prstGeom prst="rect">
-            <a:avLst/>
-          </a:prstGeom>
-        </p:spPr>
-        <p:txBody>
-          <a:bodyPr vert="horz" lIns="91440" tIns="45720" rIns="91440" bIns="45720" rtlCol="0" anchor="b"/>
-          <a:lstStyle>
-            <a:lvl1pPr algn="r">
-              <a:defRPr sz="1200"/>
-            </a:lvl1pPr>
-          </a:lstStyle>
-          <a:p>
-            <a:fld id="{CE5E9CC1-C706-0F49-92D6-E571CC5EEA8F}" type="slidenum">
-              <a:rPr lang="en-US"/>
-              <a:t>‹#›</a:t>
-            </a:fld>
-            <a:endParaRPr lang="en-US"/>
-          </a:p>
-        </p:txBody>
-      </p:sp>
     </p:spTree>
     <p:extLst>
       <p:ext uri="{BB962C8B-B14F-4D97-AF65-F5344CB8AC3E}">
-        <p14:creationId xmlns:p14="http://schemas.microsoft.com/office/powerpoint/2010/main" val="1024086991"/>
+        <p14:creationId xmlns:p14="http://schemas.microsoft.com/office/powerpoint/2010/main" val="4123733126"/>
       </p:ext>
     </p:extLst>
   </p:cSld>
@@ -509,10 +290,6 @@
           <a:bodyPr/>
           <a:lstStyle/>
           <a:p>
-            <a:r>
-              <a:rPr lang="en-US" dirty="0"/>
-              <a:t/>
-            </a:r>
             <a:endParaRPr lang="en-US" dirty="0"/>
           </a:p>
         </p:txBody>
@@ -597,10 +374,6 @@
           <a:bodyPr/>
           <a:lstStyle/>
           <a:p>
-            <a:r>
-              <a:rPr lang="en-US" dirty="0"/>
-              <a:t/>
-            </a:r>
             <a:endParaRPr lang="en-US" dirty="0"/>
           </a:p>
         </p:txBody>
@@ -685,10 +458,6 @@
           <a:bodyPr/>
           <a:lstStyle/>
           <a:p>
-            <a:r>
-              <a:rPr lang="en-US" dirty="0"/>
-              <a:t/>
-            </a:r>
             <a:endParaRPr lang="en-US" dirty="0"/>
           </a:p>
         </p:txBody>
@@ -773,10 +542,6 @@
           <a:bodyPr/>
           <a:lstStyle/>
           <a:p>
-            <a:r>
-              <a:rPr lang="en-US" dirty="0"/>
-              <a:t/>
-            </a:r>
             <a:endParaRPr lang="en-US" dirty="0"/>
           </a:p>
         </p:txBody>
@@ -861,10 +626,6 @@
           <a:bodyPr/>
           <a:lstStyle/>
           <a:p>
-            <a:r>
-              <a:rPr lang="en-US" dirty="0"/>
-              <a:t/>
-            </a:r>
             <a:endParaRPr lang="en-US" dirty="0"/>
           </a:p>
         </p:txBody>
@@ -949,10 +710,6 @@
           <a:bodyPr/>
           <a:lstStyle/>
           <a:p>
-            <a:r>
-              <a:rPr lang="en-US" dirty="0"/>
-              <a:t/>
-            </a:r>
             <a:endParaRPr lang="en-US" dirty="0"/>
           </a:p>
         </p:txBody>
@@ -1037,10 +794,6 @@
           <a:bodyPr/>
           <a:lstStyle/>
           <a:p>
-            <a:r>
-              <a:rPr lang="en-US" dirty="0"/>
-              <a:t/>
-            </a:r>
             <a:endParaRPr lang="en-US" dirty="0"/>
           </a:p>
         </p:txBody>
@@ -1125,10 +878,6 @@
           <a:bodyPr/>
           <a:lstStyle/>
           <a:p>
-            <a:r>
-              <a:rPr lang="en-US" dirty="0"/>
-              <a:t/>
-            </a:r>
             <a:endParaRPr lang="en-US" dirty="0"/>
           </a:p>
         </p:txBody>
@@ -1213,10 +962,6 @@
           <a:bodyPr/>
           <a:lstStyle/>
           <a:p>
-            <a:r>
-              <a:rPr lang="en-US" dirty="0"/>
-              <a:t/>
-            </a:r>
             <a:endParaRPr lang="en-US" dirty="0"/>
           </a:p>
         </p:txBody>
@@ -1301,10 +1046,6 @@
           <a:bodyPr/>
           <a:lstStyle/>
           <a:p>
-            <a:r>
-              <a:rPr lang="en-US" dirty="0"/>
-              <a:t/>
-            </a:r>
             <a:endParaRPr lang="en-US" dirty="0"/>
           </a:p>
         </p:txBody>
@@ -1378,6 +1119,11 @@
 <file path=ppt/slideMasters/slideMaster1.xml><?xml version="1.0" encoding="utf-8"?>
 <p:sldMaster xmlns:a="http://schemas.openxmlformats.org/drawingml/2006/main" xmlns:r="http://schemas.openxmlformats.org/officeDocument/2006/relationships" xmlns:p="http://schemas.openxmlformats.org/presentationml/2006/main">
   <p:cSld>
+    <p:bg>
+      <p:bgRef idx="1001">
+        <a:schemeClr val="bg1"/>
+      </p:bgRef>
+    </p:bg>
     <p:spTree>
       <p:nvGrpSpPr>
         <p:cNvPr id="1" name=""/>
@@ -1660,6 +1406,7 @@
         <a:solidFill>
           <a:srgbClr val="0A1628"/>
         </a:solidFill>
+        <a:effectLst/>
       </p:bgPr>
     </p:bg>
     <p:spTree>
@@ -1695,6 +1442,13 @@
           </a:solidFill>
           <a:ln/>
         </p:spPr>
+        <p:txBody>
+          <a:bodyPr/>
+          <a:lstStyle/>
+          <a:p>
+            <a:endParaRPr lang="en-US"/>
+          </a:p>
+        </p:txBody>
       </p:sp>
       <p:sp>
         <p:nvSpPr>
@@ -1717,11 +1471,11 @@
           <a:bodyPr wrap="square" lIns="0" tIns="0" rIns="0" bIns="0" rtlCol="0" anchor="ctr"/>
           <a:lstStyle/>
           <a:p>
-            <a:pPr indent="0" marL="0">
-              <a:buNone/>
-            </a:pPr>
-            <a:r>
-              <a:rPr lang="en-US" sz="1100" b="1" spc="600" kern="0" dirty="0">
+            <a:pPr marL="0" indent="0">
+              <a:buNone/>
+            </a:pPr>
+            <a:r>
+              <a:rPr lang="en-US" sz="1100" b="1" kern="0" spc="600" dirty="0">
                 <a:solidFill>
                   <a:srgbClr val="F97316"/>
                 </a:solidFill>
@@ -1753,7 +1507,7 @@
           <a:bodyPr wrap="square" lIns="0" tIns="0" rIns="0" bIns="0" rtlCol="0" anchor="ctr"/>
           <a:lstStyle/>
           <a:p>
-            <a:pPr indent="0" marL="0">
+            <a:pPr marL="0" indent="0">
               <a:buNone/>
             </a:pPr>
             <a:r>
@@ -1789,7 +1543,7 @@
           <a:bodyPr wrap="square" lIns="0" tIns="0" rIns="0" bIns="0" rtlCol="0" anchor="ctr"/>
           <a:lstStyle/>
           <a:p>
-            <a:pPr indent="0" marL="0">
+            <a:pPr marL="0" indent="0">
               <a:buNone/>
             </a:pPr>
             <a:r>
@@ -1825,7 +1579,7 @@
           <a:bodyPr wrap="square" lIns="0" tIns="0" rIns="0" bIns="0" rtlCol="0" anchor="ctr"/>
           <a:lstStyle/>
           <a:p>
-            <a:pPr indent="0" marL="0">
+            <a:pPr marL="0" indent="0">
               <a:buNone/>
             </a:pPr>
             <a:r>
@@ -1864,6 +1618,13 @@
             <a:prstDash val="solid"/>
           </a:ln>
         </p:spPr>
+        <p:txBody>
+          <a:bodyPr/>
+          <a:lstStyle/>
+          <a:p>
+            <a:endParaRPr lang="en-US"/>
+          </a:p>
+        </p:txBody>
       </p:sp>
       <p:sp>
         <p:nvSpPr>
@@ -1886,7 +1647,7 @@
           <a:bodyPr wrap="square" lIns="0" tIns="0" rIns="0" bIns="0" rtlCol="0" anchor="ctr"/>
           <a:lstStyle/>
           <a:p>
-            <a:pPr algn="ctr" indent="0" marL="0">
+            <a:pPr marL="0" indent="0" algn="ctr">
               <a:buNone/>
             </a:pPr>
             <a:r>
@@ -1922,7 +1683,7 @@
           <a:bodyPr wrap="square" lIns="0" tIns="0" rIns="0" bIns="0" rtlCol="0" anchor="ctr"/>
           <a:lstStyle/>
           <a:p>
-            <a:pPr algn="ctr" indent="0" marL="0">
+            <a:pPr marL="0" indent="0" algn="ctr">
               <a:buNone/>
             </a:pPr>
             <a:r>
@@ -1961,6 +1722,13 @@
             <a:prstDash val="solid"/>
           </a:ln>
         </p:spPr>
+        <p:txBody>
+          <a:bodyPr/>
+          <a:lstStyle/>
+          <a:p>
+            <a:endParaRPr lang="en-US"/>
+          </a:p>
+        </p:txBody>
       </p:sp>
       <p:sp>
         <p:nvSpPr>
@@ -1983,7 +1751,7 @@
           <a:bodyPr wrap="square" lIns="0" tIns="0" rIns="0" bIns="0" rtlCol="0" anchor="ctr"/>
           <a:lstStyle/>
           <a:p>
-            <a:pPr algn="ctr" indent="0" marL="0">
+            <a:pPr marL="0" indent="0" algn="ctr">
               <a:buNone/>
             </a:pPr>
             <a:r>
@@ -2019,7 +1787,7 @@
           <a:bodyPr wrap="square" lIns="0" tIns="0" rIns="0" bIns="0" rtlCol="0" anchor="ctr"/>
           <a:lstStyle/>
           <a:p>
-            <a:pPr algn="ctr" indent="0" marL="0">
+            <a:pPr marL="0" indent="0" algn="ctr">
               <a:buNone/>
             </a:pPr>
             <a:r>
@@ -2058,6 +1826,13 @@
             <a:prstDash val="solid"/>
           </a:ln>
         </p:spPr>
+        <p:txBody>
+          <a:bodyPr/>
+          <a:lstStyle/>
+          <a:p>
+            <a:endParaRPr lang="en-US"/>
+          </a:p>
+        </p:txBody>
       </p:sp>
       <p:sp>
         <p:nvSpPr>
@@ -2080,7 +1855,7 @@
           <a:bodyPr wrap="square" lIns="0" tIns="0" rIns="0" bIns="0" rtlCol="0" anchor="ctr"/>
           <a:lstStyle/>
           <a:p>
-            <a:pPr algn="ctr" indent="0" marL="0">
+            <a:pPr marL="0" indent="0" algn="ctr">
               <a:buNone/>
             </a:pPr>
             <a:r>
@@ -2116,7 +1891,7 @@
           <a:bodyPr wrap="square" lIns="0" tIns="0" rIns="0" bIns="0" rtlCol="0" anchor="ctr"/>
           <a:lstStyle/>
           <a:p>
-            <a:pPr algn="ctr" indent="0" marL="0">
+            <a:pPr marL="0" indent="0" algn="ctr">
               <a:buNone/>
             </a:pPr>
             <a:r>
@@ -2155,6 +1930,13 @@
             <a:prstDash val="solid"/>
           </a:ln>
         </p:spPr>
+        <p:txBody>
+          <a:bodyPr/>
+          <a:lstStyle/>
+          <a:p>
+            <a:endParaRPr lang="en-US"/>
+          </a:p>
+        </p:txBody>
       </p:sp>
       <p:sp>
         <p:nvSpPr>
@@ -2177,7 +1959,7 @@
           <a:bodyPr wrap="square" lIns="0" tIns="0" rIns="0" bIns="0" rtlCol="0" anchor="ctr"/>
           <a:lstStyle/>
           <a:p>
-            <a:pPr algn="ctr" indent="0" marL="0">
+            <a:pPr marL="0" indent="0" algn="ctr">
               <a:buNone/>
             </a:pPr>
             <a:r>
@@ -2216,6 +1998,13 @@
             <a:prstDash val="solid"/>
           </a:ln>
         </p:spPr>
+        <p:txBody>
+          <a:bodyPr/>
+          <a:lstStyle/>
+          <a:p>
+            <a:endParaRPr lang="en-US"/>
+          </a:p>
+        </p:txBody>
       </p:sp>
       <p:sp>
         <p:nvSpPr>
@@ -2238,7 +2027,7 @@
           <a:bodyPr wrap="square" lIns="0" tIns="0" rIns="0" bIns="0" rtlCol="0" anchor="ctr"/>
           <a:lstStyle/>
           <a:p>
-            <a:pPr algn="ctr" indent="0" marL="0">
+            <a:pPr marL="0" indent="0" algn="ctr">
               <a:buNone/>
             </a:pPr>
             <a:r>
@@ -2277,6 +2066,13 @@
             <a:prstDash val="solid"/>
           </a:ln>
         </p:spPr>
+        <p:txBody>
+          <a:bodyPr/>
+          <a:lstStyle/>
+          <a:p>
+            <a:endParaRPr lang="en-US"/>
+          </a:p>
+        </p:txBody>
       </p:sp>
       <p:sp>
         <p:nvSpPr>
@@ -2299,7 +2095,7 @@
           <a:bodyPr wrap="square" lIns="0" tIns="0" rIns="0" bIns="0" rtlCol="0" anchor="ctr"/>
           <a:lstStyle/>
           <a:p>
-            <a:pPr algn="ctr" indent="0" marL="0">
+            <a:pPr marL="0" indent="0" algn="ctr">
               <a:buNone/>
             </a:pPr>
             <a:r>
@@ -2330,6 +2126,7 @@
         <a:solidFill>
           <a:srgbClr val="0A1628"/>
         </a:solidFill>
+        <a:effectLst/>
       </p:bgPr>
     </p:bg>
     <p:spTree>
@@ -2365,6 +2162,13 @@
           </a:solidFill>
           <a:ln/>
         </p:spPr>
+        <p:txBody>
+          <a:bodyPr/>
+          <a:lstStyle/>
+          <a:p>
+            <a:endParaRPr lang="en-US"/>
+          </a:p>
+        </p:txBody>
       </p:sp>
       <p:sp>
         <p:nvSpPr>
@@ -2387,11 +2191,11 @@
           <a:bodyPr wrap="square" lIns="0" tIns="0" rIns="0" bIns="0" rtlCol="0" anchor="ctr"/>
           <a:lstStyle/>
           <a:p>
-            <a:pPr indent="0" marL="0">
-              <a:buNone/>
-            </a:pPr>
-            <a:r>
-              <a:rPr lang="en-US" sz="1400" b="1" spc="400" kern="0" dirty="0">
+            <a:pPr marL="0" indent="0">
+              <a:buNone/>
+            </a:pPr>
+            <a:r>
+              <a:rPr lang="en-US" sz="1400" b="1" kern="0" spc="400" dirty="0">
                 <a:solidFill>
                   <a:srgbClr val="38BDF8"/>
                 </a:solidFill>
@@ -2423,7 +2227,7 @@
           <a:bodyPr wrap="square" lIns="0" tIns="0" rIns="0" bIns="0" rtlCol="0" anchor="ctr"/>
           <a:lstStyle/>
           <a:p>
-            <a:pPr indent="0" marL="0">
+            <a:pPr marL="0" indent="0">
               <a:buNone/>
             </a:pPr>
             <a:r>
@@ -2457,6 +2261,13 @@
           </a:solidFill>
           <a:ln/>
         </p:spPr>
+        <p:txBody>
+          <a:bodyPr/>
+          <a:lstStyle/>
+          <a:p>
+            <a:endParaRPr lang="en-US"/>
+          </a:p>
+        </p:txBody>
       </p:sp>
       <p:sp>
         <p:nvSpPr>
@@ -2479,7 +2290,7 @@
           <a:bodyPr wrap="square" lIns="0" tIns="0" rIns="0" bIns="0" rtlCol="0" anchor="ctr"/>
           <a:lstStyle/>
           <a:p>
-            <a:pPr algn="ctr" indent="0" marL="0">
+            <a:pPr marL="0" indent="0" algn="ctr">
               <a:buNone/>
             </a:pPr>
             <a:r>
@@ -2513,6 +2324,13 @@
           </a:solidFill>
           <a:ln/>
         </p:spPr>
+        <p:txBody>
+          <a:bodyPr/>
+          <a:lstStyle/>
+          <a:p>
+            <a:endParaRPr lang="en-US"/>
+          </a:p>
+        </p:txBody>
       </p:sp>
       <p:sp>
         <p:nvSpPr>
@@ -2535,7 +2353,7 @@
           <a:bodyPr wrap="square" lIns="0" tIns="0" rIns="0" bIns="0" rtlCol="0" anchor="ctr"/>
           <a:lstStyle/>
           <a:p>
-            <a:pPr indent="0" marL="0">
+            <a:pPr marL="0" indent="0">
               <a:buNone/>
             </a:pPr>
             <a:r>
@@ -2571,7 +2389,7 @@
           <a:bodyPr wrap="square" lIns="0" tIns="0" rIns="0" bIns="0" rtlCol="0" anchor="ctr"/>
           <a:lstStyle/>
           <a:p>
-            <a:pPr indent="0" marL="0">
+            <a:pPr marL="0" indent="0">
               <a:buNone/>
             </a:pPr>
             <a:r>
@@ -2605,6 +2423,13 @@
           </a:solidFill>
           <a:ln/>
         </p:spPr>
+        <p:txBody>
+          <a:bodyPr/>
+          <a:lstStyle/>
+          <a:p>
+            <a:endParaRPr lang="en-US"/>
+          </a:p>
+        </p:txBody>
       </p:sp>
       <p:sp>
         <p:nvSpPr>
@@ -2627,7 +2452,7 @@
           <a:bodyPr wrap="square" lIns="0" tIns="0" rIns="0" bIns="0" rtlCol="0" anchor="ctr"/>
           <a:lstStyle/>
           <a:p>
-            <a:pPr algn="ctr" indent="0" marL="0">
+            <a:pPr marL="0" indent="0" algn="ctr">
               <a:buNone/>
             </a:pPr>
             <a:r>
@@ -2661,6 +2486,13 @@
           </a:solidFill>
           <a:ln/>
         </p:spPr>
+        <p:txBody>
+          <a:bodyPr/>
+          <a:lstStyle/>
+          <a:p>
+            <a:endParaRPr lang="en-US"/>
+          </a:p>
+        </p:txBody>
       </p:sp>
       <p:sp>
         <p:nvSpPr>
@@ -2683,7 +2515,7 @@
           <a:bodyPr wrap="square" lIns="0" tIns="0" rIns="0" bIns="0" rtlCol="0" anchor="ctr"/>
           <a:lstStyle/>
           <a:p>
-            <a:pPr indent="0" marL="0">
+            <a:pPr marL="0" indent="0">
               <a:buNone/>
             </a:pPr>
             <a:r>
@@ -2719,7 +2551,7 @@
           <a:bodyPr wrap="square" lIns="0" tIns="0" rIns="0" bIns="0" rtlCol="0" anchor="ctr"/>
           <a:lstStyle/>
           <a:p>
-            <a:pPr indent="0" marL="0">
+            <a:pPr marL="0" indent="0">
               <a:buNone/>
             </a:pPr>
             <a:r>
@@ -2753,6 +2585,13 @@
           </a:solidFill>
           <a:ln/>
         </p:spPr>
+        <p:txBody>
+          <a:bodyPr/>
+          <a:lstStyle/>
+          <a:p>
+            <a:endParaRPr lang="en-US"/>
+          </a:p>
+        </p:txBody>
       </p:sp>
       <p:sp>
         <p:nvSpPr>
@@ -2775,7 +2614,7 @@
           <a:bodyPr wrap="square" lIns="0" tIns="0" rIns="0" bIns="0" rtlCol="0" anchor="ctr"/>
           <a:lstStyle/>
           <a:p>
-            <a:pPr algn="ctr" indent="0" marL="0">
+            <a:pPr marL="0" indent="0" algn="ctr">
               <a:buNone/>
             </a:pPr>
             <a:r>
@@ -2809,6 +2648,13 @@
           </a:solidFill>
           <a:ln/>
         </p:spPr>
+        <p:txBody>
+          <a:bodyPr/>
+          <a:lstStyle/>
+          <a:p>
+            <a:endParaRPr lang="en-US"/>
+          </a:p>
+        </p:txBody>
       </p:sp>
       <p:sp>
         <p:nvSpPr>
@@ -2831,7 +2677,7 @@
           <a:bodyPr wrap="square" lIns="0" tIns="0" rIns="0" bIns="0" rtlCol="0" anchor="ctr"/>
           <a:lstStyle/>
           <a:p>
-            <a:pPr indent="0" marL="0">
+            <a:pPr marL="0" indent="0">
               <a:buNone/>
             </a:pPr>
             <a:r>
@@ -2867,7 +2713,7 @@
           <a:bodyPr wrap="square" lIns="0" tIns="0" rIns="0" bIns="0" rtlCol="0" anchor="ctr"/>
           <a:lstStyle/>
           <a:p>
-            <a:pPr indent="0" marL="0">
+            <a:pPr marL="0" indent="0">
               <a:buNone/>
             </a:pPr>
             <a:r>
@@ -2901,6 +2747,13 @@
           </a:solidFill>
           <a:ln/>
         </p:spPr>
+        <p:txBody>
+          <a:bodyPr/>
+          <a:lstStyle/>
+          <a:p>
+            <a:endParaRPr lang="en-US"/>
+          </a:p>
+        </p:txBody>
       </p:sp>
       <p:sp>
         <p:nvSpPr>
@@ -2923,7 +2776,7 @@
           <a:bodyPr wrap="square" lIns="0" tIns="0" rIns="0" bIns="0" rtlCol="0" anchor="ctr"/>
           <a:lstStyle/>
           <a:p>
-            <a:pPr algn="ctr" indent="0" marL="0">
+            <a:pPr marL="0" indent="0" algn="ctr">
               <a:buNone/>
             </a:pPr>
             <a:r>
@@ -2957,6 +2810,13 @@
           </a:solidFill>
           <a:ln/>
         </p:spPr>
+        <p:txBody>
+          <a:bodyPr/>
+          <a:lstStyle/>
+          <a:p>
+            <a:endParaRPr lang="en-US"/>
+          </a:p>
+        </p:txBody>
       </p:sp>
       <p:sp>
         <p:nvSpPr>
@@ -2979,7 +2839,7 @@
           <a:bodyPr wrap="square" lIns="0" tIns="0" rIns="0" bIns="0" rtlCol="0" anchor="ctr"/>
           <a:lstStyle/>
           <a:p>
-            <a:pPr indent="0" marL="0">
+            <a:pPr marL="0" indent="0">
               <a:buNone/>
             </a:pPr>
             <a:r>
@@ -3015,7 +2875,7 @@
           <a:bodyPr wrap="square" lIns="0" tIns="0" rIns="0" bIns="0" rtlCol="0" anchor="ctr"/>
           <a:lstStyle/>
           <a:p>
-            <a:pPr indent="0" marL="0">
+            <a:pPr marL="0" indent="0">
               <a:buNone/>
             </a:pPr>
             <a:r>
@@ -3051,7 +2911,7 @@
           <a:bodyPr wrap="square" lIns="0" tIns="0" rIns="0" bIns="0" rtlCol="0" anchor="ctr"/>
           <a:lstStyle/>
           <a:p>
-            <a:pPr indent="0" marL="0">
+            <a:pPr marL="0" indent="0">
               <a:buNone/>
             </a:pPr>
             <a:r>
@@ -3090,6 +2950,13 @@
             <a:prstDash val="solid"/>
           </a:ln>
         </p:spPr>
+        <p:txBody>
+          <a:bodyPr/>
+          <a:lstStyle/>
+          <a:p>
+            <a:endParaRPr lang="en-US"/>
+          </a:p>
+        </p:txBody>
       </p:sp>
       <p:sp>
         <p:nvSpPr>
@@ -3112,7 +2979,7 @@
           <a:bodyPr wrap="square" lIns="0" tIns="0" rIns="0" bIns="0" rtlCol="0" anchor="ctr"/>
           <a:lstStyle/>
           <a:p>
-            <a:pPr algn="ctr" indent="0" marL="0">
+            <a:pPr marL="0" indent="0" algn="ctr">
               <a:buNone/>
             </a:pPr>
             <a:r>
@@ -3148,7 +3015,7 @@
           <a:bodyPr wrap="square" lIns="0" tIns="0" rIns="0" bIns="0" rtlCol="0" anchor="ctr"/>
           <a:lstStyle/>
           <a:p>
-            <a:pPr indent="0" marL="0">
+            <a:pPr marL="0" indent="0">
               <a:buNone/>
             </a:pPr>
             <a:r>
@@ -3187,6 +3054,13 @@
             <a:prstDash val="solid"/>
           </a:ln>
         </p:spPr>
+        <p:txBody>
+          <a:bodyPr/>
+          <a:lstStyle/>
+          <a:p>
+            <a:endParaRPr lang="en-US"/>
+          </a:p>
+        </p:txBody>
       </p:sp>
       <p:sp>
         <p:nvSpPr>
@@ -3209,7 +3083,7 @@
           <a:bodyPr wrap="square" lIns="0" tIns="0" rIns="0" bIns="0" rtlCol="0" anchor="ctr"/>
           <a:lstStyle/>
           <a:p>
-            <a:pPr algn="ctr" indent="0" marL="0">
+            <a:pPr marL="0" indent="0" algn="ctr">
               <a:buNone/>
             </a:pPr>
             <a:r>
@@ -3245,7 +3119,7 @@
           <a:bodyPr wrap="square" lIns="0" tIns="0" rIns="0" bIns="0" rtlCol="0" anchor="ctr"/>
           <a:lstStyle/>
           <a:p>
-            <a:pPr indent="0" marL="0">
+            <a:pPr marL="0" indent="0">
               <a:buNone/>
             </a:pPr>
             <a:r>
@@ -3284,6 +3158,13 @@
             <a:prstDash val="solid"/>
           </a:ln>
         </p:spPr>
+        <p:txBody>
+          <a:bodyPr/>
+          <a:lstStyle/>
+          <a:p>
+            <a:endParaRPr lang="en-US"/>
+          </a:p>
+        </p:txBody>
       </p:sp>
       <p:sp>
         <p:nvSpPr>
@@ -3306,7 +3187,7 @@
           <a:bodyPr wrap="square" lIns="0" tIns="0" rIns="0" bIns="0" rtlCol="0" anchor="ctr"/>
           <a:lstStyle/>
           <a:p>
-            <a:pPr algn="ctr" indent="0" marL="0">
+            <a:pPr marL="0" indent="0" algn="ctr">
               <a:buNone/>
             </a:pPr>
             <a:r>
@@ -3342,7 +3223,7 @@
           <a:bodyPr wrap="square" lIns="0" tIns="0" rIns="0" bIns="0" rtlCol="0" anchor="ctr"/>
           <a:lstStyle/>
           <a:p>
-            <a:pPr indent="0" marL="0">
+            <a:pPr marL="0" indent="0">
               <a:buNone/>
             </a:pPr>
             <a:r>
@@ -3381,6 +3262,13 @@
             <a:prstDash val="solid"/>
           </a:ln>
         </p:spPr>
+        <p:txBody>
+          <a:bodyPr/>
+          <a:lstStyle/>
+          <a:p>
+            <a:endParaRPr lang="en-US"/>
+          </a:p>
+        </p:txBody>
       </p:sp>
       <p:sp>
         <p:nvSpPr>
@@ -3403,7 +3291,7 @@
           <a:bodyPr wrap="square" lIns="0" tIns="0" rIns="0" bIns="0" rtlCol="0" anchor="ctr"/>
           <a:lstStyle/>
           <a:p>
-            <a:pPr algn="ctr" indent="0" marL="0">
+            <a:pPr marL="0" indent="0" algn="ctr">
               <a:buNone/>
             </a:pPr>
             <a:r>
@@ -3439,7 +3327,7 @@
           <a:bodyPr wrap="square" lIns="0" tIns="0" rIns="0" bIns="0" rtlCol="0" anchor="ctr"/>
           <a:lstStyle/>
           <a:p>
-            <a:pPr indent="0" marL="0">
+            <a:pPr marL="0" indent="0">
               <a:buNone/>
             </a:pPr>
             <a:r>
@@ -3478,6 +3366,13 @@
             <a:prstDash val="solid"/>
           </a:ln>
         </p:spPr>
+        <p:txBody>
+          <a:bodyPr/>
+          <a:lstStyle/>
+          <a:p>
+            <a:endParaRPr lang="en-US"/>
+          </a:p>
+        </p:txBody>
       </p:sp>
       <p:sp>
         <p:nvSpPr>
@@ -3500,7 +3395,7 @@
           <a:bodyPr wrap="square" lIns="0" tIns="0" rIns="0" bIns="0" rtlCol="0" anchor="ctr"/>
           <a:lstStyle/>
           <a:p>
-            <a:pPr algn="ctr" indent="0" marL="0">
+            <a:pPr marL="0" indent="0" algn="ctr">
               <a:buNone/>
             </a:pPr>
             <a:r>
@@ -3536,7 +3431,7 @@
           <a:bodyPr wrap="square" lIns="0" tIns="0" rIns="0" bIns="0" rtlCol="0" anchor="ctr"/>
           <a:lstStyle/>
           <a:p>
-            <a:pPr indent="0" marL="0">
+            <a:pPr marL="0" indent="0">
               <a:buNone/>
             </a:pPr>
             <a:r>
@@ -3575,6 +3470,13 @@
             <a:prstDash val="solid"/>
           </a:ln>
         </p:spPr>
+        <p:txBody>
+          <a:bodyPr/>
+          <a:lstStyle/>
+          <a:p>
+            <a:endParaRPr lang="en-US"/>
+          </a:p>
+        </p:txBody>
       </p:sp>
       <p:sp>
         <p:nvSpPr>
@@ -3597,7 +3499,7 @@
           <a:bodyPr wrap="square" lIns="0" tIns="0" rIns="0" bIns="0" rtlCol="0" anchor="ctr"/>
           <a:lstStyle/>
           <a:p>
-            <a:pPr indent="0" marL="0">
+            <a:pPr marL="0" indent="0">
               <a:buNone/>
             </a:pPr>
             <a:r>
@@ -3608,9 +3510,6 @@
               </a:rPr>
               <a:t>💰 Cost:  </a:t>
             </a:r>
-            <a:pPr indent="0" marL="0">
-              <a:buNone/>
-            </a:pPr>
             <a:r>
               <a:rPr lang="en-US" sz="1100" dirty="0">
                 <a:solidFill>
@@ -3619,9 +3518,6 @@
               </a:rPr>
               <a:t>Stages 0-1: &lt; $0.10  |  Stage 2: ~$0.70/hr (OpenSearch)  |  Stage 3: ~$0.10/hr  |  Stage 4: ~$0.05/hr  — </a:t>
             </a:r>
-            <a:pPr indent="0" marL="0">
-              <a:buNone/>
-            </a:pPr>
             <a:r>
               <a:rPr lang="en-US" sz="1100" b="1" dirty="0">
                 <a:solidFill>
@@ -3650,6 +3546,7 @@
         <a:solidFill>
           <a:srgbClr val="0A1628"/>
         </a:solidFill>
+        <a:effectLst/>
       </p:bgPr>
     </p:bg>
     <p:spTree>
@@ -3685,6 +3582,13 @@
           </a:solidFill>
           <a:ln/>
         </p:spPr>
+        <p:txBody>
+          <a:bodyPr/>
+          <a:lstStyle/>
+          <a:p>
+            <a:endParaRPr lang="en-US"/>
+          </a:p>
+        </p:txBody>
       </p:sp>
       <p:sp>
         <p:nvSpPr>
@@ -3707,11 +3611,11 @@
           <a:bodyPr wrap="square" lIns="0" tIns="0" rIns="0" bIns="0" rtlCol="0" anchor="ctr"/>
           <a:lstStyle/>
           <a:p>
-            <a:pPr indent="0" marL="0">
-              <a:buNone/>
-            </a:pPr>
-            <a:r>
-              <a:rPr lang="en-US" sz="1400" b="1" spc="400" kern="0" dirty="0">
+            <a:pPr marL="0" indent="0">
+              <a:buNone/>
+            </a:pPr>
+            <a:r>
+              <a:rPr lang="en-US" sz="1400" b="1" kern="0" spc="400" dirty="0">
                 <a:solidFill>
                   <a:srgbClr val="38BDF8"/>
                 </a:solidFill>
@@ -3746,6 +3650,13 @@
             <a:prstDash val="solid"/>
           </a:ln>
         </p:spPr>
+        <p:txBody>
+          <a:bodyPr/>
+          <a:lstStyle/>
+          <a:p>
+            <a:endParaRPr lang="en-US"/>
+          </a:p>
+        </p:txBody>
       </p:sp>
       <p:sp>
         <p:nvSpPr>
@@ -3768,7 +3679,7 @@
           <a:bodyPr wrap="square" lIns="0" tIns="0" rIns="0" bIns="0" rtlCol="0" anchor="ctr"/>
           <a:lstStyle/>
           <a:p>
-            <a:pPr indent="0" marL="0">
+            <a:pPr marL="0" indent="0">
               <a:buNone/>
             </a:pPr>
             <a:r>
@@ -3782,7 +3693,7 @@
             <a:endParaRPr lang="en-US" sz="2200" dirty="0"/>
           </a:p>
           <a:p>
-            <a:pPr indent="0" marL="0">
+            <a:pPr marL="0" indent="0">
               <a:buNone/>
             </a:pPr>
             <a:r>
@@ -3818,7 +3729,7 @@
           <a:bodyPr wrap="square" lIns="0" tIns="0" rIns="0" bIns="0" rtlCol="0" anchor="ctr"/>
           <a:lstStyle/>
           <a:p>
-            <a:pPr indent="0" marL="0">
+            <a:pPr marL="0" indent="0">
               <a:buNone/>
             </a:pPr>
             <a:r>
@@ -3854,7 +3765,7 @@
           <a:bodyPr wrap="square" lIns="0" tIns="0" rIns="0" bIns="0" rtlCol="0" anchor="ctr"/>
           <a:lstStyle/>
           <a:p>
-            <a:pPr indent="0" marL="0">
+            <a:pPr marL="0" indent="0">
               <a:buNone/>
             </a:pPr>
             <a:r>
@@ -3890,7 +3801,7 @@
           <a:bodyPr wrap="square" lIns="0" tIns="0" rIns="0" bIns="0" rtlCol="0" anchor="ctr"/>
           <a:lstStyle/>
           <a:p>
-            <a:pPr indent="0" marL="0">
+            <a:pPr marL="0" indent="0">
               <a:spcAft>
                 <a:spcPts val="600"/>
               </a:spcAft>
@@ -3904,12 +3815,6 @@
               </a:rPr>
               <a:t>✓  </a:t>
             </a:r>
-            <a:pPr indent="0" marL="0">
-              <a:spcAft>
-                <a:spcPts val="600"/>
-              </a:spcAft>
-              <a:buNone/>
-            </a:pPr>
             <a:r>
               <a:rPr lang="en-US" sz="1300" dirty="0">
                 <a:solidFill>
@@ -3919,12 +3824,6 @@
               <a:t>Up-to-date knowledge beyond training cutoff
 </a:t>
             </a:r>
-            <a:pPr indent="0" marL="0">
-              <a:spcAft>
-                <a:spcPts val="600"/>
-              </a:spcAft>
-              <a:buNone/>
-            </a:pPr>
             <a:r>
               <a:rPr lang="en-US" sz="1300" b="1" dirty="0">
                 <a:solidFill>
@@ -3933,12 +3832,6 @@
               </a:rPr>
               <a:t>✓  </a:t>
             </a:r>
-            <a:pPr indent="0" marL="0">
-              <a:spcAft>
-                <a:spcPts val="600"/>
-              </a:spcAft>
-              <a:buNone/>
-            </a:pPr>
             <a:r>
               <a:rPr lang="en-US" sz="1300" dirty="0">
                 <a:solidFill>
@@ -3948,12 +3841,6 @@
               <a:t>Answers grounded in your private documents
 </a:t>
             </a:r>
-            <a:pPr indent="0" marL="0">
-              <a:spcAft>
-                <a:spcPts val="600"/>
-              </a:spcAft>
-              <a:buNone/>
-            </a:pPr>
             <a:r>
               <a:rPr lang="en-US" sz="1300" b="1" dirty="0">
                 <a:solidFill>
@@ -3962,12 +3849,6 @@
               </a:rPr>
               <a:t>✓  </a:t>
             </a:r>
-            <a:pPr indent="0" marL="0">
-              <a:spcAft>
-                <a:spcPts val="600"/>
-              </a:spcAft>
-              <a:buNone/>
-            </a:pPr>
             <a:r>
               <a:rPr lang="en-US" sz="1300" dirty="0">
                 <a:solidFill>
@@ -3977,12 +3858,6 @@
               <a:t>Cite sources — auditable &amp; trustworthy
 </a:t>
             </a:r>
-            <a:pPr indent="0" marL="0">
-              <a:spcAft>
-                <a:spcPts val="600"/>
-              </a:spcAft>
-              <a:buNone/>
-            </a:pPr>
             <a:r>
               <a:rPr lang="en-US" sz="1300" b="1" dirty="0">
                 <a:solidFill>
@@ -3991,12 +3866,6 @@
               </a:rPr>
               <a:t>✓  </a:t>
             </a:r>
-            <a:pPr indent="0" marL="0">
-              <a:spcAft>
-                <a:spcPts val="600"/>
-              </a:spcAft>
-              <a:buNone/>
-            </a:pPr>
             <a:r>
               <a:rPr lang="en-US" sz="1300" dirty="0">
                 <a:solidFill>
@@ -4006,12 +3875,6 @@
               <a:t>No fine-tuning required
 </a:t>
             </a:r>
-            <a:pPr indent="0" marL="0">
-              <a:spcAft>
-                <a:spcPts val="600"/>
-              </a:spcAft>
-              <a:buNone/>
-            </a:pPr>
             <a:r>
               <a:rPr lang="en-US" sz="1300" b="1" dirty="0">
                 <a:solidFill>
@@ -4020,12 +3883,6 @@
               </a:rPr>
               <a:t>✓  </a:t>
             </a:r>
-            <a:pPr indent="0" marL="0">
-              <a:spcAft>
-                <a:spcPts val="600"/>
-              </a:spcAft>
-              <a:buNone/>
-            </a:pPr>
             <a:r>
               <a:rPr lang="en-US" sz="1300" dirty="0">
                 <a:solidFill>
@@ -4059,7 +3916,7 @@
           <a:bodyPr wrap="square" lIns="0" tIns="0" rIns="0" bIns="0" rtlCol="0" anchor="ctr"/>
           <a:lstStyle/>
           <a:p>
-            <a:pPr indent="0" marL="0">
+            <a:pPr marL="0" indent="0">
               <a:buNone/>
             </a:pPr>
             <a:r>
@@ -4076,14 +3933,14 @@
       </p:sp>
       <p:pic>
         <p:nvPicPr>
-          <p:cNvPr id="10" name="Image 0" descr="preencoded.png">    </p:cNvPr>
+          <p:cNvPr id="10" name="Image 0" descr="preencoded.png"/>
           <p:cNvPicPr>
             <a:picLocks noChangeAspect="1"/>
           </p:cNvPicPr>
           <p:nvPr/>
         </p:nvPicPr>
         <p:blipFill>
-          <a:blip r:embed="rId1"/>
+          <a:blip r:embed="rId3"/>
           <a:stretch>
             <a:fillRect/>
           </a:stretch>
@@ -4114,6 +3971,7 @@
         <a:solidFill>
           <a:srgbClr val="0A1628"/>
         </a:solidFill>
+        <a:effectLst/>
       </p:bgPr>
     </p:bg>
     <p:spTree>
@@ -4149,6 +4007,13 @@
           </a:solidFill>
           <a:ln/>
         </p:spPr>
+        <p:txBody>
+          <a:bodyPr/>
+          <a:lstStyle/>
+          <a:p>
+            <a:endParaRPr lang="en-US"/>
+          </a:p>
+        </p:txBody>
       </p:sp>
       <p:sp>
         <p:nvSpPr>
@@ -4171,11 +4036,11 @@
           <a:bodyPr wrap="square" lIns="0" tIns="0" rIns="0" bIns="0" rtlCol="0" anchor="ctr"/>
           <a:lstStyle/>
           <a:p>
-            <a:pPr indent="0" marL="0">
-              <a:buNone/>
-            </a:pPr>
-            <a:r>
-              <a:rPr lang="en-US" sz="1400" b="1" spc="400" kern="0" dirty="0">
+            <a:pPr marL="0" indent="0">
+              <a:buNone/>
+            </a:pPr>
+            <a:r>
+              <a:rPr lang="en-US" sz="1400" b="1" kern="0" spc="400" dirty="0">
                 <a:solidFill>
                   <a:srgbClr val="38BDF8"/>
                 </a:solidFill>
@@ -4207,7 +4072,7 @@
           <a:bodyPr wrap="square" lIns="0" tIns="0" rIns="0" bIns="0" rtlCol="0" anchor="ctr"/>
           <a:lstStyle/>
           <a:p>
-            <a:pPr indent="0" marL="0">
+            <a:pPr marL="0" indent="0">
               <a:buNone/>
             </a:pPr>
             <a:r>
@@ -4224,14 +4089,14 @@
       </p:sp>
       <p:pic>
         <p:nvPicPr>
-          <p:cNvPr id="5" name="Image 0" descr="preencoded.png">    </p:cNvPr>
+          <p:cNvPr id="5" name="Image 0" descr="preencoded.png"/>
           <p:cNvPicPr>
             <a:picLocks noChangeAspect="1"/>
           </p:cNvPicPr>
           <p:nvPr/>
         </p:nvPicPr>
         <p:blipFill>
-          <a:blip r:embed="rId1"/>
+          <a:blip r:embed="rId3"/>
           <a:stretch>
             <a:fillRect/>
           </a:stretch>
@@ -4270,6 +4135,13 @@
             <a:prstDash val="solid"/>
           </a:ln>
         </p:spPr>
+        <p:txBody>
+          <a:bodyPr/>
+          <a:lstStyle/>
+          <a:p>
+            <a:endParaRPr lang="en-US"/>
+          </a:p>
+        </p:txBody>
       </p:sp>
       <p:sp>
         <p:nvSpPr>
@@ -4290,6 +4162,13 @@
           </a:solidFill>
           <a:ln/>
         </p:spPr>
+        <p:txBody>
+          <a:bodyPr/>
+          <a:lstStyle/>
+          <a:p>
+            <a:endParaRPr lang="en-US"/>
+          </a:p>
+        </p:txBody>
       </p:sp>
       <p:sp>
         <p:nvSpPr>
@@ -4312,7 +4191,7 @@
           <a:bodyPr wrap="square" lIns="0" tIns="0" rIns="0" bIns="0" rtlCol="0" anchor="ctr"/>
           <a:lstStyle/>
           <a:p>
-            <a:pPr algn="ctr" indent="0" marL="0">
+            <a:pPr marL="0" indent="0" algn="ctr">
               <a:buNone/>
             </a:pPr>
             <a:r>
@@ -4348,7 +4227,7 @@
           <a:bodyPr wrap="square" lIns="0" tIns="0" rIns="0" bIns="0" rtlCol="0" anchor="ctr"/>
           <a:lstStyle/>
           <a:p>
-            <a:pPr indent="0" marL="0">
+            <a:pPr marL="0" indent="0">
               <a:buNone/>
             </a:pPr>
             <a:r>
@@ -4384,7 +4263,7 @@
           <a:bodyPr wrap="square" lIns="0" tIns="0" rIns="0" bIns="0" rtlCol="0" anchor="ctr"/>
           <a:lstStyle/>
           <a:p>
-            <a:pPr indent="0" marL="0">
+            <a:pPr marL="0" indent="0">
               <a:buNone/>
             </a:pPr>
             <a:r>
@@ -4423,6 +4302,13 @@
             <a:prstDash val="solid"/>
           </a:ln>
         </p:spPr>
+        <p:txBody>
+          <a:bodyPr/>
+          <a:lstStyle/>
+          <a:p>
+            <a:endParaRPr lang="en-US"/>
+          </a:p>
+        </p:txBody>
       </p:sp>
       <p:sp>
         <p:nvSpPr>
@@ -4443,6 +4329,13 @@
           </a:solidFill>
           <a:ln/>
         </p:spPr>
+        <p:txBody>
+          <a:bodyPr/>
+          <a:lstStyle/>
+          <a:p>
+            <a:endParaRPr lang="en-US"/>
+          </a:p>
+        </p:txBody>
       </p:sp>
       <p:sp>
         <p:nvSpPr>
@@ -4465,7 +4358,7 @@
           <a:bodyPr wrap="square" lIns="0" tIns="0" rIns="0" bIns="0" rtlCol="0" anchor="ctr"/>
           <a:lstStyle/>
           <a:p>
-            <a:pPr algn="ctr" indent="0" marL="0">
+            <a:pPr marL="0" indent="0" algn="ctr">
               <a:buNone/>
             </a:pPr>
             <a:r>
@@ -4501,7 +4394,7 @@
           <a:bodyPr wrap="square" lIns="0" tIns="0" rIns="0" bIns="0" rtlCol="0" anchor="ctr"/>
           <a:lstStyle/>
           <a:p>
-            <a:pPr indent="0" marL="0">
+            <a:pPr marL="0" indent="0">
               <a:buNone/>
             </a:pPr>
             <a:r>
@@ -4537,7 +4430,7 @@
           <a:bodyPr wrap="square" lIns="0" tIns="0" rIns="0" bIns="0" rtlCol="0" anchor="ctr"/>
           <a:lstStyle/>
           <a:p>
-            <a:pPr indent="0" marL="0">
+            <a:pPr marL="0" indent="0">
               <a:buNone/>
             </a:pPr>
             <a:r>
@@ -4576,6 +4469,13 @@
             <a:prstDash val="solid"/>
           </a:ln>
         </p:spPr>
+        <p:txBody>
+          <a:bodyPr/>
+          <a:lstStyle/>
+          <a:p>
+            <a:endParaRPr lang="en-US"/>
+          </a:p>
+        </p:txBody>
       </p:sp>
       <p:sp>
         <p:nvSpPr>
@@ -4596,6 +4496,13 @@
           </a:solidFill>
           <a:ln/>
         </p:spPr>
+        <p:txBody>
+          <a:bodyPr/>
+          <a:lstStyle/>
+          <a:p>
+            <a:endParaRPr lang="en-US"/>
+          </a:p>
+        </p:txBody>
       </p:sp>
       <p:sp>
         <p:nvSpPr>
@@ -4618,7 +4525,7 @@
           <a:bodyPr wrap="square" lIns="0" tIns="0" rIns="0" bIns="0" rtlCol="0" anchor="ctr"/>
           <a:lstStyle/>
           <a:p>
-            <a:pPr algn="ctr" indent="0" marL="0">
+            <a:pPr marL="0" indent="0" algn="ctr">
               <a:buNone/>
             </a:pPr>
             <a:r>
@@ -4654,7 +4561,7 @@
           <a:bodyPr wrap="square" lIns="0" tIns="0" rIns="0" bIns="0" rtlCol="0" anchor="ctr"/>
           <a:lstStyle/>
           <a:p>
-            <a:pPr indent="0" marL="0">
+            <a:pPr marL="0" indent="0">
               <a:buNone/>
             </a:pPr>
             <a:r>
@@ -4690,7 +4597,7 @@
           <a:bodyPr wrap="square" lIns="0" tIns="0" rIns="0" bIns="0" rtlCol="0" anchor="ctr"/>
           <a:lstStyle/>
           <a:p>
-            <a:pPr indent="0" marL="0">
+            <a:pPr marL="0" indent="0">
               <a:buNone/>
             </a:pPr>
             <a:r>
@@ -4729,6 +4636,13 @@
             <a:prstDash val="solid"/>
           </a:ln>
         </p:spPr>
+        <p:txBody>
+          <a:bodyPr/>
+          <a:lstStyle/>
+          <a:p>
+            <a:endParaRPr lang="en-US"/>
+          </a:p>
+        </p:txBody>
       </p:sp>
       <p:sp>
         <p:nvSpPr>
@@ -4749,6 +4663,13 @@
           </a:solidFill>
           <a:ln/>
         </p:spPr>
+        <p:txBody>
+          <a:bodyPr/>
+          <a:lstStyle/>
+          <a:p>
+            <a:endParaRPr lang="en-US"/>
+          </a:p>
+        </p:txBody>
       </p:sp>
       <p:sp>
         <p:nvSpPr>
@@ -4771,7 +4692,7 @@
           <a:bodyPr wrap="square" lIns="0" tIns="0" rIns="0" bIns="0" rtlCol="0" anchor="ctr"/>
           <a:lstStyle/>
           <a:p>
-            <a:pPr algn="ctr" indent="0" marL="0">
+            <a:pPr marL="0" indent="0" algn="ctr">
               <a:buNone/>
             </a:pPr>
             <a:r>
@@ -4807,7 +4728,7 @@
           <a:bodyPr wrap="square" lIns="0" tIns="0" rIns="0" bIns="0" rtlCol="0" anchor="ctr"/>
           <a:lstStyle/>
           <a:p>
-            <a:pPr indent="0" marL="0">
+            <a:pPr marL="0" indent="0">
               <a:buNone/>
             </a:pPr>
             <a:r>
@@ -4843,7 +4764,7 @@
           <a:bodyPr wrap="square" lIns="0" tIns="0" rIns="0" bIns="0" rtlCol="0" anchor="ctr"/>
           <a:lstStyle/>
           <a:p>
-            <a:pPr indent="0" marL="0">
+            <a:pPr marL="0" indent="0">
               <a:buNone/>
             </a:pPr>
             <a:r>
@@ -4874,6 +4795,7 @@
         <a:solidFill>
           <a:srgbClr val="0A1628"/>
         </a:solidFill>
+        <a:effectLst/>
       </p:bgPr>
     </p:bg>
     <p:spTree>
@@ -4909,6 +4831,13 @@
           </a:solidFill>
           <a:ln/>
         </p:spPr>
+        <p:txBody>
+          <a:bodyPr/>
+          <a:lstStyle/>
+          <a:p>
+            <a:endParaRPr lang="en-US"/>
+          </a:p>
+        </p:txBody>
       </p:sp>
       <p:sp>
         <p:nvSpPr>
@@ -4931,11 +4860,11 @@
           <a:bodyPr wrap="square" lIns="0" tIns="0" rIns="0" bIns="0" rtlCol="0" anchor="ctr"/>
           <a:lstStyle/>
           <a:p>
-            <a:pPr indent="0" marL="0">
-              <a:buNone/>
-            </a:pPr>
-            <a:r>
-              <a:rPr lang="en-US" sz="1100" b="1" spc="300" kern="0" dirty="0">
+            <a:pPr marL="0" indent="0">
+              <a:buNone/>
+            </a:pPr>
+            <a:r>
+              <a:rPr lang="en-US" sz="1100" b="1" kern="0" spc="300" dirty="0">
                 <a:solidFill>
                   <a:srgbClr val="F97316"/>
                 </a:solidFill>
@@ -4967,7 +4896,7 @@
           <a:bodyPr wrap="square" lIns="0" tIns="0" rIns="0" bIns="0" rtlCol="0" anchor="ctr"/>
           <a:lstStyle/>
           <a:p>
-            <a:pPr indent="0" marL="0">
+            <a:pPr marL="0" indent="0">
               <a:buNone/>
             </a:pPr>
             <a:r>
@@ -5003,7 +4932,7 @@
           <a:bodyPr wrap="square" lIns="0" tIns="0" rIns="0" bIns="0" rtlCol="0" anchor="ctr"/>
           <a:lstStyle/>
           <a:p>
-            <a:pPr algn="r" indent="0" marL="0">
+            <a:pPr marL="0" indent="0" algn="r">
               <a:buNone/>
             </a:pPr>
             <a:r>
@@ -5039,7 +4968,7 @@
           <a:bodyPr wrap="square" lIns="0" tIns="0" rIns="0" bIns="0" rtlCol="0" anchor="ctr"/>
           <a:lstStyle/>
           <a:p>
-            <a:pPr indent="0" marL="0">
+            <a:pPr marL="0" indent="0">
               <a:buNone/>
             </a:pPr>
             <a:r>
@@ -5056,14 +4985,14 @@
       </p:sp>
       <p:pic>
         <p:nvPicPr>
-          <p:cNvPr id="7" name="Image 0" descr="preencoded.png">    </p:cNvPr>
+          <p:cNvPr id="7" name="Image 0" descr="preencoded.png"/>
           <p:cNvPicPr>
             <a:picLocks noChangeAspect="1"/>
           </p:cNvPicPr>
           <p:nvPr/>
         </p:nvPicPr>
         <p:blipFill>
-          <a:blip r:embed="rId1"/>
+          <a:blip r:embed="rId3"/>
           <a:stretch>
             <a:fillRect/>
           </a:stretch>
@@ -5099,7 +5028,7 @@
           <a:bodyPr wrap="square" lIns="0" tIns="0" rIns="0" bIns="0" rtlCol="0" anchor="ctr"/>
           <a:lstStyle/>
           <a:p>
-            <a:pPr indent="0" marL="0">
+            <a:pPr marL="0" indent="0">
               <a:buNone/>
             </a:pPr>
             <a:r>
@@ -5138,6 +5067,13 @@
             <a:prstDash val="solid"/>
           </a:ln>
         </p:spPr>
+        <p:txBody>
+          <a:bodyPr/>
+          <a:lstStyle/>
+          <a:p>
+            <a:endParaRPr lang="en-US"/>
+          </a:p>
+        </p:txBody>
       </p:sp>
       <p:sp>
         <p:nvSpPr>
@@ -5160,7 +5096,7 @@
           <a:bodyPr wrap="square" lIns="0" tIns="0" rIns="0" bIns="0" rtlCol="0" anchor="ctr"/>
           <a:lstStyle/>
           <a:p>
-            <a:pPr algn="ctr" indent="0" marL="0">
+            <a:pPr marL="0" indent="0" algn="ctr">
               <a:buNone/>
             </a:pPr>
             <a:r>
@@ -5196,7 +5132,7 @@
           <a:bodyPr wrap="square" lIns="0" tIns="0" rIns="0" bIns="0" rtlCol="0" anchor="ctr"/>
           <a:lstStyle/>
           <a:p>
-            <a:pPr indent="0" marL="0">
+            <a:pPr marL="0" indent="0">
               <a:buNone/>
             </a:pPr>
             <a:r>
@@ -5232,7 +5168,7 @@
           <a:bodyPr wrap="square" lIns="0" tIns="0" rIns="0" bIns="0" rtlCol="0" anchor="ctr"/>
           <a:lstStyle/>
           <a:p>
-            <a:pPr indent="0" marL="0">
+            <a:pPr marL="0" indent="0">
               <a:buNone/>
             </a:pPr>
             <a:r>
@@ -5271,6 +5207,13 @@
             <a:prstDash val="solid"/>
           </a:ln>
         </p:spPr>
+        <p:txBody>
+          <a:bodyPr/>
+          <a:lstStyle/>
+          <a:p>
+            <a:endParaRPr lang="en-US"/>
+          </a:p>
+        </p:txBody>
       </p:sp>
       <p:sp>
         <p:nvSpPr>
@@ -5293,7 +5236,7 @@
           <a:bodyPr wrap="square" lIns="0" tIns="0" rIns="0" bIns="0" rtlCol="0" anchor="ctr"/>
           <a:lstStyle/>
           <a:p>
-            <a:pPr algn="ctr" indent="0" marL="0">
+            <a:pPr marL="0" indent="0" algn="ctr">
               <a:buNone/>
             </a:pPr>
             <a:r>
@@ -5329,7 +5272,7 @@
           <a:bodyPr wrap="square" lIns="0" tIns="0" rIns="0" bIns="0" rtlCol="0" anchor="ctr"/>
           <a:lstStyle/>
           <a:p>
-            <a:pPr indent="0" marL="0">
+            <a:pPr marL="0" indent="0">
               <a:buNone/>
             </a:pPr>
             <a:r>
@@ -5365,7 +5308,7 @@
           <a:bodyPr wrap="square" lIns="0" tIns="0" rIns="0" bIns="0" rtlCol="0" anchor="ctr"/>
           <a:lstStyle/>
           <a:p>
-            <a:pPr indent="0" marL="0">
+            <a:pPr marL="0" indent="0">
               <a:buNone/>
             </a:pPr>
             <a:r>
@@ -5404,6 +5347,13 @@
             <a:prstDash val="solid"/>
           </a:ln>
         </p:spPr>
+        <p:txBody>
+          <a:bodyPr/>
+          <a:lstStyle/>
+          <a:p>
+            <a:endParaRPr lang="en-US"/>
+          </a:p>
+        </p:txBody>
       </p:sp>
       <p:sp>
         <p:nvSpPr>
@@ -5426,7 +5376,7 @@
           <a:bodyPr wrap="square" lIns="0" tIns="0" rIns="0" bIns="0" rtlCol="0" anchor="ctr"/>
           <a:lstStyle/>
           <a:p>
-            <a:pPr algn="ctr" indent="0" marL="0">
+            <a:pPr marL="0" indent="0" algn="ctr">
               <a:buNone/>
             </a:pPr>
             <a:r>
@@ -5462,7 +5412,7 @@
           <a:bodyPr wrap="square" lIns="0" tIns="0" rIns="0" bIns="0" rtlCol="0" anchor="ctr"/>
           <a:lstStyle/>
           <a:p>
-            <a:pPr indent="0" marL="0">
+            <a:pPr marL="0" indent="0">
               <a:buNone/>
             </a:pPr>
             <a:r>
@@ -5498,7 +5448,7 @@
           <a:bodyPr wrap="square" lIns="0" tIns="0" rIns="0" bIns="0" rtlCol="0" anchor="ctr"/>
           <a:lstStyle/>
           <a:p>
-            <a:pPr indent="0" marL="0">
+            <a:pPr marL="0" indent="0">
               <a:buNone/>
             </a:pPr>
             <a:r>
@@ -5537,6 +5487,13 @@
             <a:prstDash val="solid"/>
           </a:ln>
         </p:spPr>
+        <p:txBody>
+          <a:bodyPr/>
+          <a:lstStyle/>
+          <a:p>
+            <a:endParaRPr lang="en-US"/>
+          </a:p>
+        </p:txBody>
       </p:sp>
       <p:sp>
         <p:nvSpPr>
@@ -5559,7 +5516,7 @@
           <a:bodyPr wrap="square" lIns="0" tIns="0" rIns="0" bIns="0" rtlCol="0" anchor="ctr"/>
           <a:lstStyle/>
           <a:p>
-            <a:pPr algn="ctr" indent="0" marL="0">
+            <a:pPr marL="0" indent="0" algn="ctr">
               <a:buNone/>
             </a:pPr>
             <a:r>
@@ -5595,7 +5552,7 @@
           <a:bodyPr wrap="square" lIns="0" tIns="0" rIns="0" bIns="0" rtlCol="0" anchor="ctr"/>
           <a:lstStyle/>
           <a:p>
-            <a:pPr indent="0" marL="0">
+            <a:pPr marL="0" indent="0">
               <a:buNone/>
             </a:pPr>
             <a:r>
@@ -5631,7 +5588,7 @@
           <a:bodyPr wrap="square" lIns="0" tIns="0" rIns="0" bIns="0" rtlCol="0" anchor="ctr"/>
           <a:lstStyle/>
           <a:p>
-            <a:pPr indent="0" marL="0">
+            <a:pPr marL="0" indent="0">
               <a:buNone/>
             </a:pPr>
             <a:r>
@@ -5667,7 +5624,7 @@
           <a:bodyPr wrap="square" lIns="0" tIns="0" rIns="0" bIns="0" rtlCol="0" anchor="ctr"/>
           <a:lstStyle/>
           <a:p>
-            <a:pPr indent="0" marL="0">
+            <a:pPr marL="0" indent="0">
               <a:buNone/>
             </a:pPr>
             <a:r>
@@ -5706,6 +5663,13 @@
             <a:prstDash val="solid"/>
           </a:ln>
         </p:spPr>
+        <p:txBody>
+          <a:bodyPr/>
+          <a:lstStyle/>
+          <a:p>
+            <a:endParaRPr lang="en-US"/>
+          </a:p>
+        </p:txBody>
       </p:sp>
       <p:sp>
         <p:nvSpPr>
@@ -5728,7 +5692,7 @@
           <a:bodyPr wrap="square" lIns="0" tIns="0" rIns="0" bIns="0" rtlCol="0" anchor="ctr"/>
           <a:lstStyle/>
           <a:p>
-            <a:pPr algn="ctr" indent="0" marL="0">
+            <a:pPr marL="0" indent="0" algn="ctr">
               <a:buNone/>
             </a:pPr>
             <a:r>
@@ -5764,7 +5728,7 @@
           <a:bodyPr wrap="square" lIns="0" tIns="0" rIns="0" bIns="0" rtlCol="0" anchor="ctr"/>
           <a:lstStyle/>
           <a:p>
-            <a:pPr indent="0" marL="0">
+            <a:pPr marL="0" indent="0">
               <a:buNone/>
             </a:pPr>
             <a:r>
@@ -5803,6 +5767,13 @@
             <a:prstDash val="solid"/>
           </a:ln>
         </p:spPr>
+        <p:txBody>
+          <a:bodyPr/>
+          <a:lstStyle/>
+          <a:p>
+            <a:endParaRPr lang="en-US"/>
+          </a:p>
+        </p:txBody>
       </p:sp>
       <p:sp>
         <p:nvSpPr>
@@ -5825,7 +5796,7 @@
           <a:bodyPr wrap="square" lIns="0" tIns="0" rIns="0" bIns="0" rtlCol="0" anchor="ctr"/>
           <a:lstStyle/>
           <a:p>
-            <a:pPr algn="ctr" indent="0" marL="0">
+            <a:pPr marL="0" indent="0" algn="ctr">
               <a:buNone/>
             </a:pPr>
             <a:r>
@@ -5861,7 +5832,7 @@
           <a:bodyPr wrap="square" lIns="0" tIns="0" rIns="0" bIns="0" rtlCol="0" anchor="ctr"/>
           <a:lstStyle/>
           <a:p>
-            <a:pPr indent="0" marL="0">
+            <a:pPr marL="0" indent="0">
               <a:buNone/>
             </a:pPr>
             <a:r>
@@ -5900,6 +5871,13 @@
             <a:prstDash val="solid"/>
           </a:ln>
         </p:spPr>
+        <p:txBody>
+          <a:bodyPr/>
+          <a:lstStyle/>
+          <a:p>
+            <a:endParaRPr lang="en-US"/>
+          </a:p>
+        </p:txBody>
       </p:sp>
       <p:sp>
         <p:nvSpPr>
@@ -5922,7 +5900,7 @@
           <a:bodyPr wrap="square" lIns="0" tIns="0" rIns="0" bIns="0" rtlCol="0" anchor="ctr"/>
           <a:lstStyle/>
           <a:p>
-            <a:pPr algn="ctr" indent="0" marL="0">
+            <a:pPr marL="0" indent="0" algn="ctr">
               <a:buNone/>
             </a:pPr>
             <a:r>
@@ -5958,7 +5936,7 @@
           <a:bodyPr wrap="square" lIns="0" tIns="0" rIns="0" bIns="0" rtlCol="0" anchor="ctr"/>
           <a:lstStyle/>
           <a:p>
-            <a:pPr indent="0" marL="0">
+            <a:pPr marL="0" indent="0">
               <a:buNone/>
             </a:pPr>
             <a:r>
@@ -5997,6 +5975,13 @@
             <a:prstDash val="solid"/>
           </a:ln>
         </p:spPr>
+        <p:txBody>
+          <a:bodyPr/>
+          <a:lstStyle/>
+          <a:p>
+            <a:endParaRPr lang="en-US"/>
+          </a:p>
+        </p:txBody>
       </p:sp>
       <p:sp>
         <p:nvSpPr>
@@ -6019,7 +6004,7 @@
           <a:bodyPr wrap="square" lIns="0" tIns="0" rIns="0" bIns="0" rtlCol="0" anchor="ctr"/>
           <a:lstStyle/>
           <a:p>
-            <a:pPr algn="ctr" indent="0" marL="0">
+            <a:pPr marL="0" indent="0" algn="ctr">
               <a:buNone/>
             </a:pPr>
             <a:r>
@@ -6055,7 +6040,7 @@
           <a:bodyPr wrap="square" lIns="0" tIns="0" rIns="0" bIns="0" rtlCol="0" anchor="ctr"/>
           <a:lstStyle/>
           <a:p>
-            <a:pPr indent="0" marL="0">
+            <a:pPr marL="0" indent="0">
               <a:buNone/>
             </a:pPr>
             <a:r>
@@ -6086,6 +6071,7 @@
         <a:solidFill>
           <a:srgbClr val="0A1628"/>
         </a:solidFill>
+        <a:effectLst/>
       </p:bgPr>
     </p:bg>
     <p:spTree>
@@ -6121,6 +6107,13 @@
           </a:solidFill>
           <a:ln/>
         </p:spPr>
+        <p:txBody>
+          <a:bodyPr/>
+          <a:lstStyle/>
+          <a:p>
+            <a:endParaRPr lang="en-US"/>
+          </a:p>
+        </p:txBody>
       </p:sp>
       <p:sp>
         <p:nvSpPr>
@@ -6143,11 +6136,11 @@
           <a:bodyPr wrap="square" lIns="0" tIns="0" rIns="0" bIns="0" rtlCol="0" anchor="ctr"/>
           <a:lstStyle/>
           <a:p>
-            <a:pPr indent="0" marL="0">
-              <a:buNone/>
-            </a:pPr>
-            <a:r>
-              <a:rPr lang="en-US" sz="1100" b="1" spc="300" kern="0" dirty="0">
+            <a:pPr marL="0" indent="0">
+              <a:buNone/>
+            </a:pPr>
+            <a:r>
+              <a:rPr lang="en-US" sz="1100" b="1" kern="0" spc="300" dirty="0">
                 <a:solidFill>
                   <a:srgbClr val="F97316"/>
                 </a:solidFill>
@@ -6179,7 +6172,7 @@
           <a:bodyPr wrap="square" lIns="0" tIns="0" rIns="0" bIns="0" rtlCol="0" anchor="ctr"/>
           <a:lstStyle/>
           <a:p>
-            <a:pPr indent="0" marL="0">
+            <a:pPr marL="0" indent="0">
               <a:buNone/>
             </a:pPr>
             <a:r>
@@ -6215,7 +6208,7 @@
           <a:bodyPr wrap="square" lIns="0" tIns="0" rIns="0" bIns="0" rtlCol="0" anchor="ctr"/>
           <a:lstStyle/>
           <a:p>
-            <a:pPr algn="r" indent="0" marL="0">
+            <a:pPr marL="0" indent="0" algn="r">
               <a:buNone/>
             </a:pPr>
             <a:r>
@@ -6251,7 +6244,7 @@
           <a:bodyPr wrap="square" lIns="0" tIns="0" rIns="0" bIns="0" rtlCol="0" anchor="ctr"/>
           <a:lstStyle/>
           <a:p>
-            <a:pPr indent="0" marL="0">
+            <a:pPr marL="0" indent="0">
               <a:buNone/>
             </a:pPr>
             <a:r>
@@ -6268,14 +6261,14 @@
       </p:sp>
       <p:pic>
         <p:nvPicPr>
-          <p:cNvPr id="7" name="Image 0" descr="preencoded.png">    </p:cNvPr>
+          <p:cNvPr id="7" name="Image 0" descr="preencoded.png"/>
           <p:cNvPicPr>
             <a:picLocks noChangeAspect="1"/>
           </p:cNvPicPr>
           <p:nvPr/>
         </p:nvPicPr>
         <p:blipFill>
-          <a:blip r:embed="rId1"/>
+          <a:blip r:embed="rId3"/>
           <a:stretch>
             <a:fillRect/>
           </a:stretch>
@@ -6311,7 +6304,7 @@
           <a:bodyPr wrap="square" lIns="0" tIns="0" rIns="0" bIns="0" rtlCol="0" anchor="ctr"/>
           <a:lstStyle/>
           <a:p>
-            <a:pPr indent="0" marL="0">
+            <a:pPr marL="0" indent="0">
               <a:buNone/>
             </a:pPr>
             <a:r>
@@ -6328,14 +6321,14 @@
       </p:sp>
       <p:pic>
         <p:nvPicPr>
-          <p:cNvPr id="9" name="Image 1" descr="preencoded.png">    </p:cNvPr>
+          <p:cNvPr id="9" name="Image 1" descr="preencoded.png"/>
           <p:cNvPicPr>
             <a:picLocks noChangeAspect="1"/>
           </p:cNvPicPr>
           <p:nvPr/>
         </p:nvPicPr>
         <p:blipFill>
-          <a:blip r:embed="rId2"/>
+          <a:blip r:embed="rId4"/>
           <a:stretch>
             <a:fillRect/>
           </a:stretch>
@@ -6366,6 +6359,7 @@
         <a:solidFill>
           <a:srgbClr val="0A1628"/>
         </a:solidFill>
+        <a:effectLst/>
       </p:bgPr>
     </p:bg>
     <p:spTree>
@@ -6401,6 +6395,13 @@
           </a:solidFill>
           <a:ln/>
         </p:spPr>
+        <p:txBody>
+          <a:bodyPr/>
+          <a:lstStyle/>
+          <a:p>
+            <a:endParaRPr lang="en-US"/>
+          </a:p>
+        </p:txBody>
       </p:sp>
       <p:sp>
         <p:nvSpPr>
@@ -6423,7 +6424,7 @@
           <a:bodyPr wrap="square" lIns="0" tIns="0" rIns="0" bIns="0" rtlCol="0" anchor="ctr"/>
           <a:lstStyle/>
           <a:p>
-            <a:pPr indent="0" marL="0">
+            <a:pPr marL="0" indent="0">
               <a:buNone/>
             </a:pPr>
             <a:r>
@@ -6457,6 +6458,13 @@
           </a:solidFill>
           <a:ln/>
         </p:spPr>
+        <p:txBody>
+          <a:bodyPr/>
+          <a:lstStyle/>
+          <a:p>
+            <a:endParaRPr lang="en-US"/>
+          </a:p>
+        </p:txBody>
       </p:sp>
       <p:sp>
         <p:nvSpPr>
@@ -6479,7 +6487,7 @@
           <a:bodyPr wrap="square" lIns="0" tIns="0" rIns="0" bIns="0" rtlCol="0" anchor="ctr"/>
           <a:lstStyle/>
           <a:p>
-            <a:pPr indent="0" marL="0">
+            <a:pPr marL="0" indent="0">
               <a:buNone/>
             </a:pPr>
             <a:r>
@@ -6518,6 +6526,13 @@
             <a:prstDash val="solid"/>
           </a:ln>
         </p:spPr>
+        <p:txBody>
+          <a:bodyPr/>
+          <a:lstStyle/>
+          <a:p>
+            <a:endParaRPr lang="en-US"/>
+          </a:p>
+        </p:txBody>
       </p:sp>
       <p:sp>
         <p:nvSpPr>
@@ -6540,7 +6555,7 @@
           <a:bodyPr wrap="square" lIns="0" tIns="0" rIns="0" bIns="0" rtlCol="0" anchor="ctr"/>
           <a:lstStyle/>
           <a:p>
-            <a:pPr indent="0" marL="0">
+            <a:pPr marL="0" indent="0">
               <a:buNone/>
             </a:pPr>
             <a:r>
@@ -6551,9 +6566,6 @@
               </a:rPr>
               <a:t>•  </a:t>
             </a:r>
-            <a:pPr indent="0" marL="0">
-              <a:buNone/>
-            </a:pPr>
             <a:r>
               <a:rPr lang="en-US" sz="1200" dirty="0">
                 <a:solidFill>
@@ -6590,6 +6602,13 @@
             <a:prstDash val="solid"/>
           </a:ln>
         </p:spPr>
+        <p:txBody>
+          <a:bodyPr/>
+          <a:lstStyle/>
+          <a:p>
+            <a:endParaRPr lang="en-US"/>
+          </a:p>
+        </p:txBody>
       </p:sp>
       <p:sp>
         <p:nvSpPr>
@@ -6612,7 +6631,7 @@
           <a:bodyPr wrap="square" lIns="0" tIns="0" rIns="0" bIns="0" rtlCol="0" anchor="ctr"/>
           <a:lstStyle/>
           <a:p>
-            <a:pPr indent="0" marL="0">
+            <a:pPr marL="0" indent="0">
               <a:buNone/>
             </a:pPr>
             <a:r>
@@ -6623,9 +6642,6 @@
               </a:rPr>
               <a:t>•  </a:t>
             </a:r>
-            <a:pPr indent="0" marL="0">
-              <a:buNone/>
-            </a:pPr>
             <a:r>
               <a:rPr lang="en-US" sz="1200" dirty="0">
                 <a:solidFill>
@@ -6662,6 +6678,13 @@
             <a:prstDash val="solid"/>
           </a:ln>
         </p:spPr>
+        <p:txBody>
+          <a:bodyPr/>
+          <a:lstStyle/>
+          <a:p>
+            <a:endParaRPr lang="en-US"/>
+          </a:p>
+        </p:txBody>
       </p:sp>
       <p:sp>
         <p:nvSpPr>
@@ -6684,7 +6707,7 @@
           <a:bodyPr wrap="square" lIns="0" tIns="0" rIns="0" bIns="0" rtlCol="0" anchor="ctr"/>
           <a:lstStyle/>
           <a:p>
-            <a:pPr indent="0" marL="0">
+            <a:pPr marL="0" indent="0">
               <a:buNone/>
             </a:pPr>
             <a:r>
@@ -6695,9 +6718,6 @@
               </a:rPr>
               <a:t>•  </a:t>
             </a:r>
-            <a:pPr indent="0" marL="0">
-              <a:buNone/>
-            </a:pPr>
             <a:r>
               <a:rPr lang="en-US" sz="1200" dirty="0">
                 <a:solidFill>
@@ -6734,6 +6754,13 @@
             <a:prstDash val="solid"/>
           </a:ln>
         </p:spPr>
+        <p:txBody>
+          <a:bodyPr/>
+          <a:lstStyle/>
+          <a:p>
+            <a:endParaRPr lang="en-US"/>
+          </a:p>
+        </p:txBody>
       </p:sp>
       <p:sp>
         <p:nvSpPr>
@@ -6756,7 +6783,7 @@
           <a:bodyPr wrap="square" lIns="0" tIns="0" rIns="0" bIns="0" rtlCol="0" anchor="ctr"/>
           <a:lstStyle/>
           <a:p>
-            <a:pPr indent="0" marL="0">
+            <a:pPr marL="0" indent="0">
               <a:buNone/>
             </a:pPr>
             <a:r>
@@ -6767,9 +6794,6 @@
               </a:rPr>
               <a:t>•  </a:t>
             </a:r>
-            <a:pPr indent="0" marL="0">
-              <a:buNone/>
-            </a:pPr>
             <a:r>
               <a:rPr lang="en-US" sz="1200" dirty="0">
                 <a:solidFill>
@@ -6781,7 +6805,7 @@
             <a:endParaRPr lang="en-US" sz="1200" dirty="0"/>
           </a:p>
           <a:p>
-            <a:pPr indent="0" marL="0">
+            <a:pPr marL="0" indent="0">
               <a:buNone/>
             </a:pPr>
             <a:r>
@@ -6815,6 +6839,13 @@
           </a:solidFill>
           <a:ln/>
         </p:spPr>
+        <p:txBody>
+          <a:bodyPr/>
+          <a:lstStyle/>
+          <a:p>
+            <a:endParaRPr lang="en-US"/>
+          </a:p>
+        </p:txBody>
       </p:sp>
       <p:sp>
         <p:nvSpPr>
@@ -6837,7 +6868,7 @@
           <a:bodyPr wrap="square" lIns="0" tIns="0" rIns="0" bIns="0" rtlCol="0" anchor="ctr"/>
           <a:lstStyle/>
           <a:p>
-            <a:pPr indent="0" marL="0">
+            <a:pPr marL="0" indent="0">
               <a:buNone/>
             </a:pPr>
             <a:r>
@@ -6876,6 +6907,13 @@
             <a:prstDash val="solid"/>
           </a:ln>
         </p:spPr>
+        <p:txBody>
+          <a:bodyPr/>
+          <a:lstStyle/>
+          <a:p>
+            <a:endParaRPr lang="en-US"/>
+          </a:p>
+        </p:txBody>
       </p:sp>
       <p:sp>
         <p:nvSpPr>
@@ -6898,7 +6936,7 @@
           <a:bodyPr wrap="square" lIns="0" tIns="0" rIns="0" bIns="0" rtlCol="0" anchor="ctr"/>
           <a:lstStyle/>
           <a:p>
-            <a:pPr indent="0" marL="0">
+            <a:pPr marL="0" indent="0">
               <a:buNone/>
             </a:pPr>
             <a:r>
@@ -6909,9 +6947,6 @@
               </a:rPr>
               <a:t>✓  </a:t>
             </a:r>
-            <a:pPr indent="0" marL="0">
-              <a:buNone/>
-            </a:pPr>
             <a:r>
               <a:rPr lang="en-US" sz="1200" dirty="0">
                 <a:solidFill>
@@ -6948,6 +6983,13 @@
             <a:prstDash val="solid"/>
           </a:ln>
         </p:spPr>
+        <p:txBody>
+          <a:bodyPr/>
+          <a:lstStyle/>
+          <a:p>
+            <a:endParaRPr lang="en-US"/>
+          </a:p>
+        </p:txBody>
       </p:sp>
       <p:sp>
         <p:nvSpPr>
@@ -6970,7 +7012,7 @@
           <a:bodyPr wrap="square" lIns="0" tIns="0" rIns="0" bIns="0" rtlCol="0" anchor="ctr"/>
           <a:lstStyle/>
           <a:p>
-            <a:pPr indent="0" marL="0">
+            <a:pPr marL="0" indent="0">
               <a:buNone/>
             </a:pPr>
             <a:r>
@@ -6981,9 +7023,6 @@
               </a:rPr>
               <a:t>✓  </a:t>
             </a:r>
-            <a:pPr indent="0" marL="0">
-              <a:buNone/>
-            </a:pPr>
             <a:r>
               <a:rPr lang="en-US" sz="1200" dirty="0">
                 <a:solidFill>
@@ -7020,6 +7059,13 @@
             <a:prstDash val="solid"/>
           </a:ln>
         </p:spPr>
+        <p:txBody>
+          <a:bodyPr/>
+          <a:lstStyle/>
+          <a:p>
+            <a:endParaRPr lang="en-US"/>
+          </a:p>
+        </p:txBody>
       </p:sp>
       <p:sp>
         <p:nvSpPr>
@@ -7042,7 +7088,7 @@
           <a:bodyPr wrap="square" lIns="0" tIns="0" rIns="0" bIns="0" rtlCol="0" anchor="ctr"/>
           <a:lstStyle/>
           <a:p>
-            <a:pPr indent="0" marL="0">
+            <a:pPr marL="0" indent="0">
               <a:buNone/>
             </a:pPr>
             <a:r>
@@ -7053,9 +7099,6 @@
               </a:rPr>
               <a:t>✓  </a:t>
             </a:r>
-            <a:pPr indent="0" marL="0">
-              <a:buNone/>
-            </a:pPr>
             <a:r>
               <a:rPr lang="en-US" sz="1200" dirty="0">
                 <a:solidFill>
@@ -7092,6 +7135,13 @@
             <a:prstDash val="solid"/>
           </a:ln>
         </p:spPr>
+        <p:txBody>
+          <a:bodyPr/>
+          <a:lstStyle/>
+          <a:p>
+            <a:endParaRPr lang="en-US"/>
+          </a:p>
+        </p:txBody>
       </p:sp>
       <p:sp>
         <p:nvSpPr>
@@ -7114,7 +7164,7 @@
           <a:bodyPr wrap="square" lIns="0" tIns="0" rIns="0" bIns="0" rtlCol="0" anchor="ctr"/>
           <a:lstStyle/>
           <a:p>
-            <a:pPr indent="0" marL="0">
+            <a:pPr marL="0" indent="0">
               <a:buNone/>
             </a:pPr>
             <a:r>
@@ -7125,9 +7175,6 @@
               </a:rPr>
               <a:t>✓  </a:t>
             </a:r>
-            <a:pPr indent="0" marL="0">
-              <a:buNone/>
-            </a:pPr>
             <a:r>
               <a:rPr lang="en-US" sz="1200" dirty="0">
                 <a:solidFill>
@@ -7139,7 +7186,7 @@
             <a:endParaRPr lang="en-US" sz="1200" dirty="0"/>
           </a:p>
           <a:p>
-            <a:pPr indent="0" marL="0">
+            <a:pPr marL="0" indent="0">
               <a:buNone/>
             </a:pPr>
             <a:r>
@@ -7151,100 +7198,6 @@
               <a:t>semantic AND exact phrase matches</a:t>
             </a:r>
             <a:endParaRPr lang="en-US" sz="1200" dirty="0"/>
-          </a:p>
-        </p:txBody>
-      </p:sp>
-      <p:sp>
-        <p:nvSpPr>
-          <p:cNvPr id="24" name="Shape 22"/>
-          <p:cNvSpPr/>
-          <p:nvPr/>
-        </p:nvSpPr>
-        <p:spPr>
-          <a:xfrm>
-            <a:off x="228600" y="4297680"/>
-            <a:ext cx="8686800" cy="548640"/>
-          </a:xfrm>
-          <a:prstGeom prst="rect">
-            <a:avLst/>
-          </a:prstGeom>
-          <a:solidFill>
-            <a:srgbClr val="1C1917"/>
-          </a:solidFill>
-          <a:ln w="12700">
-            <a:solidFill>
-              <a:srgbClr val="F97316"/>
-            </a:solidFill>
-            <a:prstDash val="solid"/>
-          </a:ln>
-        </p:spPr>
-      </p:sp>
-      <p:sp>
-        <p:nvSpPr>
-          <p:cNvPr id="25" name="Text 23"/>
-          <p:cNvSpPr/>
-          <p:nvPr/>
-        </p:nvSpPr>
-        <p:spPr>
-          <a:xfrm>
-            <a:off x="365760" y="4370832"/>
-            <a:ext cx="8412480" cy="402336"/>
-          </a:xfrm>
-          <a:prstGeom prst="rect">
-            <a:avLst/>
-          </a:prstGeom>
-          <a:noFill/>
-          <a:ln/>
-        </p:spPr>
-        <p:txBody>
-          <a:bodyPr wrap="square" lIns="0" tIns="0" rIns="0" bIns="0" rtlCol="0" anchor="ctr"/>
-          <a:lstStyle/>
-          <a:p>
-            <a:pPr indent="0" marL="0">
-              <a:buNone/>
-            </a:pPr>
-            <a:r>
-              <a:rPr lang="en-US" sz="1300" b="1" dirty="0">
-                <a:solidFill>
-                  <a:srgbClr val="F97316"/>
-                </a:solidFill>
-              </a:rPr>
-              <a:t>Pro Tip:  </a:t>
-            </a:r>
-            <a:pPr indent="0" marL="0">
-              <a:buNone/>
-            </a:pPr>
-            <a:r>
-              <a:rPr lang="en-US" sz="1300" dirty="0">
-                <a:solidFill>
-                  <a:srgbClr val="FFFFFF"/>
-                </a:solidFill>
-              </a:rPr>
-              <a:t>Use </a:t>
-            </a:r>
-            <a:pPr indent="0" marL="0">
-              <a:buNone/>
-            </a:pPr>
-            <a:r>
-              <a:rPr lang="en-US" sz="1300" b="1" dirty="0">
-                <a:solidFill>
-                  <a:srgbClr val="38BDF8"/>
-                </a:solidFill>
-              </a:rPr>
-              <a:t>overrideSearchType: 'HYBRID'</a:t>
-            </a:r>
-            <a:pPr indent="0" marL="0">
-              <a:buNone/>
-            </a:pPr>
-            <a:r>
-              <a:rPr lang="en-US" sz="1300" dirty="0">
-                <a:solidFill>
-                  <a:srgbClr val="FFFFFF"/>
-                </a:solidFill>
-              </a:rPr>
-              <a:t> in the Bedrock KB retrieve() call — no extra infra needed.</a:t>
-            </a:r>
-            <a:endParaRPr lang="en-US" sz="1300" dirty="0"/>
           </a:p>
         </p:txBody>
       </p:sp>
@@ -7264,6 +7217,7 @@
         <a:solidFill>
           <a:srgbClr val="0A1628"/>
         </a:solidFill>
+        <a:effectLst/>
       </p:bgPr>
     </p:bg>
     <p:spTree>
@@ -7299,6 +7253,13 @@
           </a:solidFill>
           <a:ln/>
         </p:spPr>
+        <p:txBody>
+          <a:bodyPr/>
+          <a:lstStyle/>
+          <a:p>
+            <a:endParaRPr lang="en-US"/>
+          </a:p>
+        </p:txBody>
       </p:sp>
       <p:sp>
         <p:nvSpPr>
@@ -7321,11 +7282,11 @@
           <a:bodyPr wrap="square" lIns="0" tIns="0" rIns="0" bIns="0" rtlCol="0" anchor="ctr"/>
           <a:lstStyle/>
           <a:p>
-            <a:pPr indent="0" marL="0">
-              <a:buNone/>
-            </a:pPr>
-            <a:r>
-              <a:rPr lang="en-US" sz="1100" b="1" spc="300" kern="0" dirty="0">
+            <a:pPr marL="0" indent="0">
+              <a:buNone/>
+            </a:pPr>
+            <a:r>
+              <a:rPr lang="en-US" sz="1100" b="1" kern="0" spc="300" dirty="0">
                 <a:solidFill>
                   <a:srgbClr val="F97316"/>
                 </a:solidFill>
@@ -7357,7 +7318,7 @@
           <a:bodyPr wrap="square" lIns="0" tIns="0" rIns="0" bIns="0" rtlCol="0" anchor="ctr"/>
           <a:lstStyle/>
           <a:p>
-            <a:pPr indent="0" marL="0">
+            <a:pPr marL="0" indent="0">
               <a:buNone/>
             </a:pPr>
             <a:r>
@@ -7393,7 +7354,7 @@
           <a:bodyPr wrap="square" lIns="0" tIns="0" rIns="0" bIns="0" rtlCol="0" anchor="ctr"/>
           <a:lstStyle/>
           <a:p>
-            <a:pPr algn="r" indent="0" marL="0">
+            <a:pPr marL="0" indent="0" algn="r">
               <a:buNone/>
             </a:pPr>
             <a:r>
@@ -7429,7 +7390,7 @@
           <a:bodyPr wrap="square" lIns="0" tIns="0" rIns="0" bIns="0" rtlCol="0" anchor="ctr"/>
           <a:lstStyle/>
           <a:p>
-            <a:pPr indent="0" marL="0">
+            <a:pPr marL="0" indent="0">
               <a:buNone/>
             </a:pPr>
             <a:r>
@@ -7446,14 +7407,14 @@
       </p:sp>
       <p:pic>
         <p:nvPicPr>
-          <p:cNvPr id="7" name="Image 0" descr="preencoded.png">    </p:cNvPr>
+          <p:cNvPr id="7" name="Image 0" descr="preencoded.png"/>
           <p:cNvPicPr>
             <a:picLocks noChangeAspect="1"/>
           </p:cNvPicPr>
           <p:nvPr/>
         </p:nvPicPr>
         <p:blipFill>
-          <a:blip r:embed="rId1"/>
+          <a:blip r:embed="rId3"/>
           <a:stretch>
             <a:fillRect/>
           </a:stretch>
@@ -7489,7 +7450,7 @@
           <a:bodyPr wrap="square" lIns="0" tIns="0" rIns="0" bIns="0" rtlCol="0" anchor="ctr"/>
           <a:lstStyle/>
           <a:p>
-            <a:pPr indent="0" marL="0">
+            <a:pPr marL="0" indent="0">
               <a:buNone/>
             </a:pPr>
             <a:r>
@@ -7528,6 +7489,13 @@
             <a:prstDash val="solid"/>
           </a:ln>
         </p:spPr>
+        <p:txBody>
+          <a:bodyPr/>
+          <a:lstStyle/>
+          <a:p>
+            <a:endParaRPr lang="en-US"/>
+          </a:p>
+        </p:txBody>
       </p:sp>
       <p:sp>
         <p:nvSpPr>
@@ -7550,7 +7518,7 @@
           <a:bodyPr wrap="square" lIns="0" tIns="0" rIns="0" bIns="0" rtlCol="0" anchor="ctr"/>
           <a:lstStyle/>
           <a:p>
-            <a:pPr algn="ctr" indent="0" marL="0">
+            <a:pPr marL="0" indent="0" algn="ctr">
               <a:buNone/>
             </a:pPr>
             <a:r>
@@ -7586,7 +7554,7 @@
           <a:bodyPr wrap="square" lIns="0" tIns="0" rIns="0" bIns="0" rtlCol="0" anchor="ctr"/>
           <a:lstStyle/>
           <a:p>
-            <a:pPr algn="ctr" indent="0" marL="0">
+            <a:pPr marL="0" indent="0" algn="ctr">
               <a:buNone/>
             </a:pPr>
             <a:r>
@@ -7625,6 +7593,13 @@
             <a:prstDash val="solid"/>
           </a:ln>
         </p:spPr>
+        <p:txBody>
+          <a:bodyPr/>
+          <a:lstStyle/>
+          <a:p>
+            <a:endParaRPr lang="en-US"/>
+          </a:p>
+        </p:txBody>
       </p:sp>
       <p:sp>
         <p:nvSpPr>
@@ -7647,7 +7622,7 @@
           <a:bodyPr wrap="square" lIns="0" tIns="0" rIns="0" bIns="0" rtlCol="0" anchor="ctr"/>
           <a:lstStyle/>
           <a:p>
-            <a:pPr algn="ctr" indent="0" marL="0">
+            <a:pPr marL="0" indent="0" algn="ctr">
               <a:buNone/>
             </a:pPr>
             <a:r>
@@ -7683,7 +7658,7 @@
           <a:bodyPr wrap="square" lIns="0" tIns="0" rIns="0" bIns="0" rtlCol="0" anchor="ctr"/>
           <a:lstStyle/>
           <a:p>
-            <a:pPr algn="ctr" indent="0" marL="0">
+            <a:pPr marL="0" indent="0" algn="ctr">
               <a:buNone/>
             </a:pPr>
             <a:r>
@@ -7722,6 +7697,13 @@
             <a:prstDash val="solid"/>
           </a:ln>
         </p:spPr>
+        <p:txBody>
+          <a:bodyPr/>
+          <a:lstStyle/>
+          <a:p>
+            <a:endParaRPr lang="en-US"/>
+          </a:p>
+        </p:txBody>
       </p:sp>
       <p:sp>
         <p:nvSpPr>
@@ -7744,7 +7726,7 @@
           <a:bodyPr wrap="square" lIns="0" tIns="0" rIns="0" bIns="0" rtlCol="0" anchor="ctr"/>
           <a:lstStyle/>
           <a:p>
-            <a:pPr algn="ctr" indent="0" marL="0">
+            <a:pPr marL="0" indent="0" algn="ctr">
               <a:buNone/>
             </a:pPr>
             <a:r>
@@ -7780,7 +7762,7 @@
           <a:bodyPr wrap="square" lIns="0" tIns="0" rIns="0" bIns="0" rtlCol="0" anchor="ctr"/>
           <a:lstStyle/>
           <a:p>
-            <a:pPr algn="ctr" indent="0" marL="0">
+            <a:pPr marL="0" indent="0" algn="ctr">
               <a:buNone/>
             </a:pPr>
             <a:r>
@@ -7819,6 +7801,13 @@
             <a:prstDash val="solid"/>
           </a:ln>
         </p:spPr>
+        <p:txBody>
+          <a:bodyPr/>
+          <a:lstStyle/>
+          <a:p>
+            <a:endParaRPr lang="en-US"/>
+          </a:p>
+        </p:txBody>
       </p:sp>
       <p:sp>
         <p:nvSpPr>
@@ -7841,7 +7830,7 @@
           <a:bodyPr wrap="square" lIns="0" tIns="0" rIns="0" bIns="0" rtlCol="0" anchor="ctr"/>
           <a:lstStyle/>
           <a:p>
-            <a:pPr algn="ctr" indent="0" marL="0">
+            <a:pPr marL="0" indent="0" algn="ctr">
               <a:buNone/>
             </a:pPr>
             <a:r>
@@ -7877,7 +7866,7 @@
           <a:bodyPr wrap="square" lIns="0" tIns="0" rIns="0" bIns="0" rtlCol="0" anchor="ctr"/>
           <a:lstStyle/>
           <a:p>
-            <a:pPr algn="ctr" indent="0" marL="0">
+            <a:pPr marL="0" indent="0" algn="ctr">
               <a:buNone/>
             </a:pPr>
             <a:r>
@@ -7916,6 +7905,13 @@
             <a:prstDash val="solid"/>
           </a:ln>
         </p:spPr>
+        <p:txBody>
+          <a:bodyPr/>
+          <a:lstStyle/>
+          <a:p>
+            <a:endParaRPr lang="en-US"/>
+          </a:p>
+        </p:txBody>
       </p:sp>
       <p:sp>
         <p:nvSpPr>
@@ -7938,7 +7934,7 @@
           <a:bodyPr wrap="square" lIns="0" tIns="0" rIns="0" bIns="0" rtlCol="0" anchor="ctr"/>
           <a:lstStyle/>
           <a:p>
-            <a:pPr algn="ctr" indent="0" marL="0">
+            <a:pPr marL="0" indent="0" algn="ctr">
               <a:buNone/>
             </a:pPr>
             <a:r>
@@ -7974,7 +7970,7 @@
           <a:bodyPr wrap="square" lIns="0" tIns="0" rIns="0" bIns="0" rtlCol="0" anchor="ctr"/>
           <a:lstStyle/>
           <a:p>
-            <a:pPr algn="ctr" indent="0" marL="0">
+            <a:pPr marL="0" indent="0" algn="ctr">
               <a:buNone/>
             </a:pPr>
             <a:r>
@@ -8005,6 +8001,7 @@
         <a:solidFill>
           <a:srgbClr val="0A1628"/>
         </a:solidFill>
+        <a:effectLst/>
       </p:bgPr>
     </p:bg>
     <p:spTree>
@@ -8040,6 +8037,13 @@
           </a:solidFill>
           <a:ln/>
         </p:spPr>
+        <p:txBody>
+          <a:bodyPr/>
+          <a:lstStyle/>
+          <a:p>
+            <a:endParaRPr lang="en-US"/>
+          </a:p>
+        </p:txBody>
       </p:sp>
       <p:sp>
         <p:nvSpPr>
@@ -8062,11 +8066,11 @@
           <a:bodyPr wrap="square" lIns="0" tIns="0" rIns="0" bIns="0" rtlCol="0" anchor="ctr"/>
           <a:lstStyle/>
           <a:p>
-            <a:pPr indent="0" marL="0">
-              <a:buNone/>
-            </a:pPr>
-            <a:r>
-              <a:rPr lang="en-US" sz="1100" b="1" spc="300" kern="0" dirty="0">
+            <a:pPr marL="0" indent="0">
+              <a:buNone/>
+            </a:pPr>
+            <a:r>
+              <a:rPr lang="en-US" sz="1100" b="1" kern="0" spc="300" dirty="0">
                 <a:solidFill>
                   <a:srgbClr val="F97316"/>
                 </a:solidFill>
@@ -8098,7 +8102,7 @@
           <a:bodyPr wrap="square" lIns="0" tIns="0" rIns="0" bIns="0" rtlCol="0" anchor="ctr"/>
           <a:lstStyle/>
           <a:p>
-            <a:pPr indent="0" marL="0">
+            <a:pPr marL="0" indent="0">
               <a:buNone/>
             </a:pPr>
             <a:r>
@@ -8134,7 +8138,7 @@
           <a:bodyPr wrap="square" lIns="0" tIns="0" rIns="0" bIns="0" rtlCol="0" anchor="ctr"/>
           <a:lstStyle/>
           <a:p>
-            <a:pPr algn="r" indent="0" marL="0">
+            <a:pPr marL="0" indent="0" algn="r">
               <a:buNone/>
             </a:pPr>
             <a:r>
@@ -8170,7 +8174,7 @@
           <a:bodyPr wrap="square" lIns="0" tIns="0" rIns="0" bIns="0" rtlCol="0" anchor="ctr"/>
           <a:lstStyle/>
           <a:p>
-            <a:pPr indent="0" marL="0">
+            <a:pPr marL="0" indent="0">
               <a:buNone/>
             </a:pPr>
             <a:r>
@@ -8187,14 +8191,14 @@
       </p:sp>
       <p:pic>
         <p:nvPicPr>
-          <p:cNvPr id="7" name="Image 0" descr="preencoded.png">    </p:cNvPr>
+          <p:cNvPr id="7" name="Image 0" descr="preencoded.png"/>
           <p:cNvPicPr>
             <a:picLocks noChangeAspect="1"/>
           </p:cNvPicPr>
           <p:nvPr/>
         </p:nvPicPr>
         <p:blipFill>
-          <a:blip r:embed="rId1"/>
+          <a:blip r:embed="rId3"/>
           <a:stretch>
             <a:fillRect/>
           </a:stretch>
@@ -8233,6 +8237,13 @@
             <a:prstDash val="solid"/>
           </a:ln>
         </p:spPr>
+        <p:txBody>
+          <a:bodyPr/>
+          <a:lstStyle/>
+          <a:p>
+            <a:endParaRPr lang="en-US"/>
+          </a:p>
+        </p:txBody>
       </p:sp>
       <p:sp>
         <p:nvSpPr>
@@ -8255,7 +8266,7 @@
           <a:bodyPr wrap="square" lIns="0" tIns="0" rIns="0" bIns="0" rtlCol="0" anchor="ctr"/>
           <a:lstStyle/>
           <a:p>
-            <a:pPr algn="ctr" indent="0" marL="0">
+            <a:pPr marL="0" indent="0" algn="ctr">
               <a:buNone/>
             </a:pPr>
             <a:r>
@@ -8291,7 +8302,7 @@
           <a:bodyPr wrap="square" lIns="0" tIns="0" rIns="0" bIns="0" rtlCol="0" anchor="ctr"/>
           <a:lstStyle/>
           <a:p>
-            <a:pPr indent="0" marL="0">
+            <a:pPr marL="0" indent="0">
               <a:buNone/>
             </a:pPr>
             <a:r>
@@ -8327,7 +8338,7 @@
           <a:bodyPr wrap="square" lIns="0" tIns="0" rIns="0" bIns="0" rtlCol="0" anchor="ctr"/>
           <a:lstStyle/>
           <a:p>
-            <a:pPr indent="0" marL="0">
+            <a:pPr marL="0" indent="0">
               <a:buNone/>
             </a:pPr>
             <a:r>
@@ -8366,6 +8377,13 @@
             <a:prstDash val="solid"/>
           </a:ln>
         </p:spPr>
+        <p:txBody>
+          <a:bodyPr/>
+          <a:lstStyle/>
+          <a:p>
+            <a:endParaRPr lang="en-US"/>
+          </a:p>
+        </p:txBody>
       </p:sp>
       <p:sp>
         <p:nvSpPr>
@@ -8388,7 +8406,7 @@
           <a:bodyPr wrap="square" lIns="0" tIns="0" rIns="0" bIns="0" rtlCol="0" anchor="ctr"/>
           <a:lstStyle/>
           <a:p>
-            <a:pPr algn="ctr" indent="0" marL="0">
+            <a:pPr marL="0" indent="0" algn="ctr">
               <a:buNone/>
             </a:pPr>
             <a:r>
@@ -8424,7 +8442,7 @@
           <a:bodyPr wrap="square" lIns="0" tIns="0" rIns="0" bIns="0" rtlCol="0" anchor="ctr"/>
           <a:lstStyle/>
           <a:p>
-            <a:pPr indent="0" marL="0">
+            <a:pPr marL="0" indent="0">
               <a:buNone/>
             </a:pPr>
             <a:r>
@@ -8460,7 +8478,7 @@
           <a:bodyPr wrap="square" lIns="0" tIns="0" rIns="0" bIns="0" rtlCol="0" anchor="ctr"/>
           <a:lstStyle/>
           <a:p>
-            <a:pPr indent="0" marL="0">
+            <a:pPr marL="0" indent="0">
               <a:buNone/>
             </a:pPr>
             <a:r>
@@ -8499,6 +8517,13 @@
             <a:prstDash val="solid"/>
           </a:ln>
         </p:spPr>
+        <p:txBody>
+          <a:bodyPr/>
+          <a:lstStyle/>
+          <a:p>
+            <a:endParaRPr lang="en-US"/>
+          </a:p>
+        </p:txBody>
       </p:sp>
       <p:sp>
         <p:nvSpPr>
@@ -8521,7 +8546,7 @@
           <a:bodyPr wrap="square" lIns="0" tIns="0" rIns="0" bIns="0" rtlCol="0" anchor="ctr"/>
           <a:lstStyle/>
           <a:p>
-            <a:pPr algn="ctr" indent="0" marL="0">
+            <a:pPr marL="0" indent="0" algn="ctr">
               <a:buNone/>
             </a:pPr>
             <a:r>
@@ -8557,7 +8582,7 @@
           <a:bodyPr wrap="square" lIns="0" tIns="0" rIns="0" bIns="0" rtlCol="0" anchor="ctr"/>
           <a:lstStyle/>
           <a:p>
-            <a:pPr indent="0" marL="0">
+            <a:pPr marL="0" indent="0">
               <a:buNone/>
             </a:pPr>
             <a:r>
@@ -8593,7 +8618,7 @@
           <a:bodyPr wrap="square" lIns="0" tIns="0" rIns="0" bIns="0" rtlCol="0" anchor="ctr"/>
           <a:lstStyle/>
           <a:p>
-            <a:pPr indent="0" marL="0">
+            <a:pPr marL="0" indent="0">
               <a:buNone/>
             </a:pPr>
             <a:r>
@@ -8632,6 +8657,13 @@
             <a:prstDash val="solid"/>
           </a:ln>
         </p:spPr>
+        <p:txBody>
+          <a:bodyPr/>
+          <a:lstStyle/>
+          <a:p>
+            <a:endParaRPr lang="en-US"/>
+          </a:p>
+        </p:txBody>
       </p:sp>
       <p:sp>
         <p:nvSpPr>
@@ -8654,7 +8686,7 @@
           <a:bodyPr wrap="square" lIns="0" tIns="0" rIns="0" bIns="0" rtlCol="0" anchor="ctr"/>
           <a:lstStyle/>
           <a:p>
-            <a:pPr algn="ctr" indent="0" marL="0">
+            <a:pPr marL="0" indent="0" algn="ctr">
               <a:buNone/>
             </a:pPr>
             <a:r>
@@ -8690,7 +8722,7 @@
           <a:bodyPr wrap="square" lIns="0" tIns="0" rIns="0" bIns="0" rtlCol="0" anchor="ctr"/>
           <a:lstStyle/>
           <a:p>
-            <a:pPr indent="0" marL="0">
+            <a:pPr marL="0" indent="0">
               <a:buNone/>
             </a:pPr>
             <a:r>
@@ -8726,7 +8758,7 @@
           <a:bodyPr wrap="square" lIns="0" tIns="0" rIns="0" bIns="0" rtlCol="0" anchor="ctr"/>
           <a:lstStyle/>
           <a:p>
-            <a:pPr indent="0" marL="0">
+            <a:pPr marL="0" indent="0">
               <a:buNone/>
             </a:pPr>
             <a:r>
@@ -8757,6 +8789,7 @@
         <a:solidFill>
           <a:srgbClr val="0A1628"/>
         </a:solidFill>
+        <a:effectLst/>
       </p:bgPr>
     </p:bg>
     <p:spTree>
@@ -8792,6 +8825,13 @@
           </a:solidFill>
           <a:ln/>
         </p:spPr>
+        <p:txBody>
+          <a:bodyPr/>
+          <a:lstStyle/>
+          <a:p>
+            <a:endParaRPr lang="en-US"/>
+          </a:p>
+        </p:txBody>
       </p:sp>
       <p:sp>
         <p:nvSpPr>
@@ -8814,11 +8854,11 @@
           <a:bodyPr wrap="square" lIns="0" tIns="0" rIns="0" bIns="0" rtlCol="0" anchor="ctr"/>
           <a:lstStyle/>
           <a:p>
-            <a:pPr indent="0" marL="0">
-              <a:buNone/>
-            </a:pPr>
-            <a:r>
-              <a:rPr lang="en-US" sz="1400" b="1" spc="300" kern="0" dirty="0">
+            <a:pPr marL="0" indent="0">
+              <a:buNone/>
+            </a:pPr>
+            <a:r>
+              <a:rPr lang="en-US" sz="1400" b="1" kern="0" spc="300" dirty="0">
                 <a:solidFill>
                   <a:srgbClr val="38BDF8"/>
                 </a:solidFill>
@@ -8853,6 +8893,13 @@
             <a:prstDash val="solid"/>
           </a:ln>
         </p:spPr>
+        <p:txBody>
+          <a:bodyPr/>
+          <a:lstStyle/>
+          <a:p>
+            <a:endParaRPr lang="en-US"/>
+          </a:p>
+        </p:txBody>
       </p:sp>
       <p:sp>
         <p:nvSpPr>
@@ -8875,7 +8922,7 @@
           <a:bodyPr wrap="square" lIns="0" tIns="0" rIns="0" bIns="0" rtlCol="0" anchor="ctr"/>
           <a:lstStyle/>
           <a:p>
-            <a:pPr indent="0" marL="0">
+            <a:pPr marL="0" indent="0">
               <a:buNone/>
             </a:pPr>
             <a:r>
@@ -8911,7 +8958,7 @@
           <a:bodyPr wrap="square" lIns="0" tIns="0" rIns="0" bIns="0" rtlCol="0" anchor="ctr"/>
           <a:lstStyle/>
           <a:p>
-            <a:pPr indent="0" marL="0">
+            <a:pPr marL="0" indent="0">
               <a:buNone/>
             </a:pPr>
             <a:r>
@@ -8947,7 +8994,7 @@
           <a:bodyPr wrap="square" lIns="0" tIns="0" rIns="0" bIns="0" rtlCol="0" anchor="ctr"/>
           <a:lstStyle/>
           <a:p>
-            <a:pPr indent="0" marL="0">
+            <a:pPr marL="0" indent="0">
               <a:buNone/>
             </a:pPr>
             <a:r>
@@ -8986,6 +9033,13 @@
             <a:prstDash val="solid"/>
           </a:ln>
         </p:spPr>
+        <p:txBody>
+          <a:bodyPr/>
+          <a:lstStyle/>
+          <a:p>
+            <a:endParaRPr lang="en-US"/>
+          </a:p>
+        </p:txBody>
       </p:sp>
       <p:sp>
         <p:nvSpPr>
@@ -9008,7 +9062,7 @@
           <a:bodyPr wrap="square" lIns="0" tIns="0" rIns="0" bIns="0" rtlCol="0" anchor="ctr"/>
           <a:lstStyle/>
           <a:p>
-            <a:pPr indent="0" marL="0">
+            <a:pPr marL="0" indent="0">
               <a:buNone/>
             </a:pPr>
             <a:r>
@@ -9044,7 +9098,7 @@
           <a:bodyPr wrap="square" lIns="0" tIns="0" rIns="0" bIns="0" rtlCol="0" anchor="ctr"/>
           <a:lstStyle/>
           <a:p>
-            <a:pPr indent="0" marL="0">
+            <a:pPr marL="0" indent="0">
               <a:buNone/>
             </a:pPr>
             <a:r>
@@ -9080,7 +9134,7 @@
           <a:bodyPr wrap="square" lIns="0" tIns="0" rIns="0" bIns="0" rtlCol="0" anchor="ctr"/>
           <a:lstStyle/>
           <a:p>
-            <a:pPr indent="0" marL="0">
+            <a:pPr marL="0" indent="0">
               <a:buNone/>
             </a:pPr>
             <a:r>
@@ -9119,6 +9173,13 @@
             <a:prstDash val="solid"/>
           </a:ln>
         </p:spPr>
+        <p:txBody>
+          <a:bodyPr/>
+          <a:lstStyle/>
+          <a:p>
+            <a:endParaRPr lang="en-US"/>
+          </a:p>
+        </p:txBody>
       </p:sp>
       <p:sp>
         <p:nvSpPr>
@@ -9141,7 +9202,7 @@
           <a:bodyPr wrap="square" lIns="0" tIns="0" rIns="0" bIns="0" rtlCol="0" anchor="ctr"/>
           <a:lstStyle/>
           <a:p>
-            <a:pPr indent="0" marL="0">
+            <a:pPr marL="0" indent="0">
               <a:buNone/>
             </a:pPr>
             <a:r>
@@ -9177,7 +9238,7 @@
           <a:bodyPr wrap="square" lIns="0" tIns="0" rIns="0" bIns="0" rtlCol="0" anchor="ctr"/>
           <a:lstStyle/>
           <a:p>
-            <a:pPr indent="0" marL="0">
+            <a:pPr marL="0" indent="0">
               <a:buNone/>
             </a:pPr>
             <a:r>
@@ -9213,7 +9274,7 @@
           <a:bodyPr wrap="square" lIns="0" tIns="0" rIns="0" bIns="0" rtlCol="0" anchor="ctr"/>
           <a:lstStyle/>
           <a:p>
-            <a:pPr indent="0" marL="0">
+            <a:pPr marL="0" indent="0">
               <a:buNone/>
             </a:pPr>
             <a:r>
@@ -9252,6 +9313,13 @@
             <a:prstDash val="solid"/>
           </a:ln>
         </p:spPr>
+        <p:txBody>
+          <a:bodyPr/>
+          <a:lstStyle/>
+          <a:p>
+            <a:endParaRPr lang="en-US"/>
+          </a:p>
+        </p:txBody>
       </p:sp>
       <p:sp>
         <p:nvSpPr>
@@ -9274,7 +9342,7 @@
           <a:bodyPr wrap="square" lIns="0" tIns="0" rIns="0" bIns="0" rtlCol="0" anchor="ctr"/>
           <a:lstStyle/>
           <a:p>
-            <a:pPr indent="0" marL="0">
+            <a:pPr marL="0" indent="0">
               <a:buNone/>
             </a:pPr>
             <a:r>
@@ -9310,7 +9378,7 @@
           <a:bodyPr wrap="square" lIns="0" tIns="0" rIns="0" bIns="0" rtlCol="0" anchor="ctr"/>
           <a:lstStyle/>
           <a:p>
-            <a:pPr indent="0" marL="0">
+            <a:pPr marL="0" indent="0">
               <a:buNone/>
             </a:pPr>
             <a:r>
@@ -9346,7 +9414,7 @@
           <a:bodyPr wrap="square" lIns="0" tIns="0" rIns="0" bIns="0" rtlCol="0" anchor="ctr"/>
           <a:lstStyle/>
           <a:p>
-            <a:pPr indent="0" marL="0">
+            <a:pPr marL="0" indent="0">
               <a:buNone/>
             </a:pPr>
             <a:r>
@@ -9385,6 +9453,13 @@
             <a:prstDash val="solid"/>
           </a:ln>
         </p:spPr>
+        <p:txBody>
+          <a:bodyPr/>
+          <a:lstStyle/>
+          <a:p>
+            <a:endParaRPr lang="en-US"/>
+          </a:p>
+        </p:txBody>
       </p:sp>
       <p:sp>
         <p:nvSpPr>
@@ -9407,7 +9482,7 @@
           <a:bodyPr wrap="square" lIns="0" tIns="0" rIns="0" bIns="0" rtlCol="0" anchor="ctr"/>
           <a:lstStyle/>
           <a:p>
-            <a:pPr indent="0" marL="0">
+            <a:pPr marL="0" indent="0">
               <a:buNone/>
             </a:pPr>
             <a:r>
@@ -9443,7 +9518,7 @@
           <a:bodyPr wrap="square" lIns="0" tIns="0" rIns="0" bIns="0" rtlCol="0" anchor="ctr"/>
           <a:lstStyle/>
           <a:p>
-            <a:pPr indent="0" marL="0">
+            <a:pPr marL="0" indent="0">
               <a:buNone/>
             </a:pPr>
             <a:r>
@@ -9479,7 +9554,7 @@
           <a:bodyPr wrap="square" lIns="0" tIns="0" rIns="0" bIns="0" rtlCol="0" anchor="ctr"/>
           <a:lstStyle/>
           <a:p>
-            <a:pPr indent="0" marL="0">
+            <a:pPr marL="0" indent="0">
               <a:buNone/>
             </a:pPr>
             <a:r>
@@ -9518,6 +9593,13 @@
             <a:prstDash val="solid"/>
           </a:ln>
         </p:spPr>
+        <p:txBody>
+          <a:bodyPr/>
+          <a:lstStyle/>
+          <a:p>
+            <a:endParaRPr lang="en-US"/>
+          </a:p>
+        </p:txBody>
       </p:sp>
       <p:sp>
         <p:nvSpPr>
@@ -9540,7 +9622,7 @@
           <a:bodyPr wrap="square" lIns="0" tIns="0" rIns="0" bIns="0" rtlCol="0" anchor="ctr"/>
           <a:lstStyle/>
           <a:p>
-            <a:pPr indent="0" marL="0">
+            <a:pPr marL="0" indent="0">
               <a:buNone/>
             </a:pPr>
             <a:r>
@@ -9576,7 +9658,7 @@
           <a:bodyPr wrap="square" lIns="0" tIns="0" rIns="0" bIns="0" rtlCol="0" anchor="ctr"/>
           <a:lstStyle/>
           <a:p>
-            <a:pPr indent="0" marL="0">
+            <a:pPr marL="0" indent="0">
               <a:buNone/>
             </a:pPr>
             <a:r>
@@ -9612,7 +9694,7 @@
           <a:bodyPr wrap="square" lIns="0" tIns="0" rIns="0" bIns="0" rtlCol="0" anchor="ctr"/>
           <a:lstStyle/>
           <a:p>
-            <a:pPr indent="0" marL="0">
+            <a:pPr marL="0" indent="0">
               <a:buNone/>
             </a:pPr>
             <a:r>
@@ -9928,4 +10010,319 @@
     </a:ext>
   </a:extLst>
 </a:theme>
+</file>
+
+<file path=ppt/theme/theme2.xml><?xml version="1.0" encoding="utf-8"?>
+<a:theme xmlns:a="http://schemas.openxmlformats.org/drawingml/2006/main" name="Office Theme">
+  <a:themeElements>
+    <a:clrScheme name="Office">
+      <a:dk1>
+        <a:sysClr val="windowText" lastClr="000000"/>
+      </a:dk1>
+      <a:lt1>
+        <a:sysClr val="window" lastClr="FFFFFF"/>
+      </a:lt1>
+      <a:dk2>
+        <a:srgbClr val="0E2841"/>
+      </a:dk2>
+      <a:lt2>
+        <a:srgbClr val="E8E8E8"/>
+      </a:lt2>
+      <a:accent1>
+        <a:srgbClr val="156082"/>
+      </a:accent1>
+      <a:accent2>
+        <a:srgbClr val="E97132"/>
+      </a:accent2>
+      <a:accent3>
+        <a:srgbClr val="196B24"/>
+      </a:accent3>
+      <a:accent4>
+        <a:srgbClr val="0F9ED5"/>
+      </a:accent4>
+      <a:accent5>
+        <a:srgbClr val="A02B93"/>
+      </a:accent5>
+      <a:accent6>
+        <a:srgbClr val="4EA72E"/>
+      </a:accent6>
+      <a:hlink>
+        <a:srgbClr val="467886"/>
+      </a:hlink>
+      <a:folHlink>
+        <a:srgbClr val="96607D"/>
+      </a:folHlink>
+    </a:clrScheme>
+    <a:fontScheme name="Office">
+      <a:majorFont>
+        <a:latin typeface="Aptos Display" panose="02110004020202020204"/>
+        <a:ea typeface=""/>
+        <a:cs typeface=""/>
+        <a:font script="Jpan" typeface="游ゴシック Light"/>
+        <a:font script="Hang" typeface="맑은 고딕"/>
+        <a:font script="Hans" typeface="等线 Light"/>
+        <a:font script="Hant" typeface="新細明體"/>
+        <a:font script="Arab" typeface="Times New Roman"/>
+        <a:font script="Hebr" typeface="Times New Roman"/>
+        <a:font script="Thai" typeface="Angsana New"/>
+        <a:font script="Ethi" typeface="Nyala"/>
+        <a:font script="Beng" typeface="Vrinda"/>
+        <a:font script="Gujr" typeface="Shruti"/>
+        <a:font script="Khmr" typeface="MoolBoran"/>
+        <a:font script="Knda" typeface="Tunga"/>
+        <a:font script="Guru" typeface="Raavi"/>
+        <a:font script="Cans" typeface="Euphemia"/>
+        <a:font script="Cher" typeface="Plantagenet Cherokee"/>
+        <a:font script="Yiii" typeface="Microsoft Yi Baiti"/>
+        <a:font script="Tibt" typeface="Microsoft Himalaya"/>
+        <a:font script="Thaa" typeface="MV Boli"/>
+        <a:font script="Deva" typeface="Mangal"/>
+        <a:font script="Telu" typeface="Gautami"/>
+        <a:font script="Taml" typeface="Latha"/>
+        <a:font script="Syrc" typeface="Estrangelo Edessa"/>
+        <a:font script="Orya" typeface="Kalinga"/>
+        <a:font script="Mlym" typeface="Kartika"/>
+        <a:font script="Laoo" typeface="DokChampa"/>
+        <a:font script="Sinh" typeface="Iskoola Pota"/>
+        <a:font script="Mong" typeface="Mongolian Baiti"/>
+        <a:font script="Viet" typeface="Times New Roman"/>
+        <a:font script="Uigh" typeface="Microsoft Uighur"/>
+        <a:font script="Geor" typeface="Sylfaen"/>
+        <a:font script="Armn" typeface="Arial"/>
+        <a:font script="Bugi" typeface="Leelawadee UI"/>
+        <a:font script="Bopo" typeface="Microsoft JhengHei"/>
+        <a:font script="Java" typeface="Javanese Text"/>
+        <a:font script="Lisu" typeface="Segoe UI"/>
+        <a:font script="Mymr" typeface="Myanmar Text"/>
+        <a:font script="Nkoo" typeface="Ebrima"/>
+        <a:font script="Olck" typeface="Nirmala UI"/>
+        <a:font script="Osma" typeface="Ebrima"/>
+        <a:font script="Phag" typeface="Phagspa"/>
+        <a:font script="Syrn" typeface="Estrangelo Edessa"/>
+        <a:font script="Syrj" typeface="Estrangelo Edessa"/>
+        <a:font script="Syre" typeface="Estrangelo Edessa"/>
+        <a:font script="Sora" typeface="Nirmala UI"/>
+        <a:font script="Tale" typeface="Microsoft Tai Le"/>
+        <a:font script="Talu" typeface="Microsoft New Tai Lue"/>
+        <a:font script="Tfng" typeface="Ebrima"/>
+      </a:majorFont>
+      <a:minorFont>
+        <a:latin typeface="Aptos" panose="02110004020202020204"/>
+        <a:ea typeface=""/>
+        <a:cs typeface=""/>
+        <a:font script="Jpan" typeface="游ゴシック"/>
+        <a:font script="Hang" typeface="맑은 고딕"/>
+        <a:font script="Hans" typeface="等线"/>
+        <a:font script="Hant" typeface="新細明體"/>
+        <a:font script="Arab" typeface="Arial"/>
+        <a:font script="Hebr" typeface="Arial"/>
+        <a:font script="Thai" typeface="Cordia New"/>
+        <a:font script="Ethi" typeface="Nyala"/>
+        <a:font script="Beng" typeface="Vrinda"/>
+        <a:font script="Gujr" typeface="Shruti"/>
+        <a:font script="Khmr" typeface="DaunPenh"/>
+        <a:font script="Knda" typeface="Tunga"/>
+        <a:font script="Guru" typeface="Raavi"/>
+        <a:font script="Cans" typeface="Euphemia"/>
+        <a:font script="Cher" typeface="Plantagenet Cherokee"/>
+        <a:font script="Yiii" typeface="Microsoft Yi Baiti"/>
+        <a:font script="Tibt" typeface="Microsoft Himalaya"/>
+        <a:font script="Thaa" typeface="MV Boli"/>
+        <a:font script="Deva" typeface="Mangal"/>
+        <a:font script="Telu" typeface="Gautami"/>
+        <a:font script="Taml" typeface="Latha"/>
+        <a:font script="Syrc" typeface="Estrangelo Edessa"/>
+        <a:font script="Orya" typeface="Kalinga"/>
+        <a:font script="Mlym" typeface="Kartika"/>
+        <a:font script="Laoo" typeface="DokChampa"/>
+        <a:font script="Sinh" typeface="Iskoola Pota"/>
+        <a:font script="Mong" typeface="Mongolian Baiti"/>
+        <a:font script="Viet" typeface="Arial"/>
+        <a:font script="Uigh" typeface="Microsoft Uighur"/>
+        <a:font script="Geor" typeface="Sylfaen"/>
+        <a:font script="Armn" typeface="Arial"/>
+        <a:font script="Bugi" typeface="Leelawadee UI"/>
+        <a:font script="Bopo" typeface="Microsoft JhengHei"/>
+        <a:font script="Java" typeface="Javanese Text"/>
+        <a:font script="Lisu" typeface="Segoe UI"/>
+        <a:font script="Mymr" typeface="Myanmar Text"/>
+        <a:font script="Nkoo" typeface="Ebrima"/>
+        <a:font script="Olck" typeface="Nirmala UI"/>
+        <a:font script="Osma" typeface="Ebrima"/>
+        <a:font script="Phag" typeface="Phagspa"/>
+        <a:font script="Syrn" typeface="Estrangelo Edessa"/>
+        <a:font script="Syrj" typeface="Estrangelo Edessa"/>
+        <a:font script="Syre" typeface="Estrangelo Edessa"/>
+        <a:font script="Sora" typeface="Nirmala UI"/>
+        <a:font script="Tale" typeface="Microsoft Tai Le"/>
+        <a:font script="Talu" typeface="Microsoft New Tai Lue"/>
+        <a:font script="Tfng" typeface="Ebrima"/>
+      </a:minorFont>
+    </a:fontScheme>
+    <a:fmtScheme name="Office">
+      <a:fillStyleLst>
+        <a:solidFill>
+          <a:schemeClr val="phClr"/>
+        </a:solidFill>
+        <a:gradFill rotWithShape="1">
+          <a:gsLst>
+            <a:gs pos="0">
+              <a:schemeClr val="phClr">
+                <a:lumMod val="110000"/>
+                <a:satMod val="105000"/>
+                <a:tint val="67000"/>
+              </a:schemeClr>
+            </a:gs>
+            <a:gs pos="50000">
+              <a:schemeClr val="phClr">
+                <a:lumMod val="105000"/>
+                <a:satMod val="103000"/>
+                <a:tint val="73000"/>
+              </a:schemeClr>
+            </a:gs>
+            <a:gs pos="100000">
+              <a:schemeClr val="phClr">
+                <a:lumMod val="105000"/>
+                <a:satMod val="109000"/>
+                <a:tint val="81000"/>
+              </a:schemeClr>
+            </a:gs>
+          </a:gsLst>
+          <a:lin ang="5400000" scaled="0"/>
+        </a:gradFill>
+        <a:gradFill rotWithShape="1">
+          <a:gsLst>
+            <a:gs pos="0">
+              <a:schemeClr val="phClr">
+                <a:satMod val="103000"/>
+                <a:lumMod val="102000"/>
+                <a:tint val="94000"/>
+              </a:schemeClr>
+            </a:gs>
+            <a:gs pos="50000">
+              <a:schemeClr val="phClr">
+                <a:satMod val="110000"/>
+                <a:lumMod val="100000"/>
+                <a:shade val="100000"/>
+              </a:schemeClr>
+            </a:gs>
+            <a:gs pos="100000">
+              <a:schemeClr val="phClr">
+                <a:lumMod val="99000"/>
+                <a:satMod val="120000"/>
+                <a:shade val="78000"/>
+              </a:schemeClr>
+            </a:gs>
+          </a:gsLst>
+          <a:lin ang="5400000" scaled="0"/>
+        </a:gradFill>
+      </a:fillStyleLst>
+      <a:lnStyleLst>
+        <a:ln w="12700" cap="flat" cmpd="sng" algn="ctr">
+          <a:solidFill>
+            <a:schemeClr val="phClr"/>
+          </a:solidFill>
+          <a:prstDash val="solid"/>
+          <a:miter lim="800000"/>
+        </a:ln>
+        <a:ln w="19050" cap="flat" cmpd="sng" algn="ctr">
+          <a:solidFill>
+            <a:schemeClr val="phClr"/>
+          </a:solidFill>
+          <a:prstDash val="solid"/>
+          <a:miter lim="800000"/>
+        </a:ln>
+        <a:ln w="25400" cap="flat" cmpd="sng" algn="ctr">
+          <a:solidFill>
+            <a:schemeClr val="phClr"/>
+          </a:solidFill>
+          <a:prstDash val="solid"/>
+          <a:miter lim="800000"/>
+        </a:ln>
+      </a:lnStyleLst>
+      <a:effectStyleLst>
+        <a:effectStyle>
+          <a:effectLst/>
+        </a:effectStyle>
+        <a:effectStyle>
+          <a:effectLst/>
+        </a:effectStyle>
+        <a:effectStyle>
+          <a:effectLst>
+            <a:outerShdw blurRad="57150" dist="19050" dir="5400000" algn="ctr" rotWithShape="0">
+              <a:srgbClr val="000000">
+                <a:alpha val="63000"/>
+              </a:srgbClr>
+            </a:outerShdw>
+          </a:effectLst>
+        </a:effectStyle>
+      </a:effectStyleLst>
+      <a:bgFillStyleLst>
+        <a:solidFill>
+          <a:schemeClr val="phClr"/>
+        </a:solidFill>
+        <a:solidFill>
+          <a:schemeClr val="phClr">
+            <a:tint val="95000"/>
+            <a:satMod val="170000"/>
+          </a:schemeClr>
+        </a:solidFill>
+        <a:gradFill rotWithShape="1">
+          <a:gsLst>
+            <a:gs pos="0">
+              <a:schemeClr val="phClr">
+                <a:tint val="93000"/>
+                <a:satMod val="150000"/>
+                <a:shade val="98000"/>
+                <a:lumMod val="102000"/>
+              </a:schemeClr>
+            </a:gs>
+            <a:gs pos="50000">
+              <a:schemeClr val="phClr">
+                <a:tint val="98000"/>
+                <a:satMod val="130000"/>
+                <a:shade val="90000"/>
+                <a:lumMod val="103000"/>
+              </a:schemeClr>
+            </a:gs>
+            <a:gs pos="100000">
+              <a:schemeClr val="phClr">
+                <a:shade val="63000"/>
+                <a:satMod val="120000"/>
+              </a:schemeClr>
+            </a:gs>
+          </a:gsLst>
+          <a:lin ang="5400000" scaled="0"/>
+        </a:gradFill>
+      </a:bgFillStyleLst>
+    </a:fmtScheme>
+  </a:themeElements>
+  <a:objectDefaults>
+    <a:lnDef>
+      <a:spPr/>
+      <a:bodyPr/>
+      <a:lstStyle/>
+      <a:style>
+        <a:lnRef idx="2">
+          <a:schemeClr val="accent1"/>
+        </a:lnRef>
+        <a:fillRef idx="0">
+          <a:schemeClr val="accent1"/>
+        </a:fillRef>
+        <a:effectRef idx="1">
+          <a:schemeClr val="accent1"/>
+        </a:effectRef>
+        <a:fontRef idx="minor">
+          <a:schemeClr val="tx1"/>
+        </a:fontRef>
+      </a:style>
+    </a:lnDef>
+  </a:objectDefaults>
+  <a:extraClrSchemeLst/>
+  <a:extLst>
+    <a:ext uri="{05A4C25C-085E-4340-85A3-A5531E510DB2}">
+      <thm15:themeFamily xmlns:thm15="http://schemas.microsoft.com/office/thememl/2012/main" name="Office Theme" id="{2E142A2C-CD16-42D6-873A-C26D2A0506FA}" vid="{1BDDFF52-6CD6-40A5-AB3C-68EB2F1E4D0A}"/>
+    </a:ext>
+  </a:extLst>
+</a:theme>
 </file>
--- a/RAG_AgentCore_Workshop.pptx
+++ b/RAG_AgentCore_Workshop.pptx
@@ -5,19 +5,20 @@
     <p:sldMasterId id="2147483648" r:id="rId1"/>
   </p:sldMasterIdLst>
   <p:notesMasterIdLst>
-    <p:notesMasterId r:id="rId12"/>
+    <p:notesMasterId r:id="rId13"/>
   </p:notesMasterIdLst>
   <p:sldIdLst>
     <p:sldId id="256" r:id="rId2"/>
-    <p:sldId id="257" r:id="rId3"/>
-    <p:sldId id="258" r:id="rId4"/>
-    <p:sldId id="259" r:id="rId5"/>
-    <p:sldId id="260" r:id="rId6"/>
-    <p:sldId id="261" r:id="rId7"/>
-    <p:sldId id="262" r:id="rId8"/>
-    <p:sldId id="263" r:id="rId9"/>
-    <p:sldId id="264" r:id="rId10"/>
-    <p:sldId id="265" r:id="rId11"/>
+    <p:sldId id="266" r:id="rId3"/>
+    <p:sldId id="257" r:id="rId4"/>
+    <p:sldId id="258" r:id="rId5"/>
+    <p:sldId id="259" r:id="rId6"/>
+    <p:sldId id="260" r:id="rId7"/>
+    <p:sldId id="261" r:id="rId8"/>
+    <p:sldId id="262" r:id="rId9"/>
+    <p:sldId id="263" r:id="rId10"/>
+    <p:sldId id="264" r:id="rId11"/>
+    <p:sldId id="265" r:id="rId12"/>
   </p:sldIdLst>
   <p:sldSz cx="9144000" cy="5143500" type="screen16x9"/>
   <p:notesSz cx="5143500" cy="9144000"/>
@@ -414,7 +415,7 @@
 </p:notes>
 </file>
 
-<file path=ppt/notesSlides/notesSlide2.xml><?xml version="1.0" encoding="utf-8"?>
+<file path=ppt/notesSlides/notesSlide11.xml><?xml version="1.0" encoding="utf-8"?>
 <p:notes xmlns:a="http://schemas.openxmlformats.org/drawingml/2006/main" xmlns:r="http://schemas.openxmlformats.org/officeDocument/2006/relationships" xmlns:p="http://schemas.openxmlformats.org/presentationml/2006/main">
   <p:cSld>
     <p:spTree>
@@ -479,7 +480,7 @@
           <a:p>
             <a:fld id="{F7021451-1387-4CA6-816F-3879F97B5CBC}" type="slidenum">
               <a:rPr lang="en-US"/>
-              <a:t>2</a:t>
+              <a:t>11</a:t>
             </a:fld>
             <a:endParaRPr lang="en-US"/>
           </a:p>
@@ -489,6 +490,114 @@
     <p:extLst>
       <p:ext uri="{BB962C8B-B14F-4D97-AF65-F5344CB8AC3E}">
         <p14:creationId xmlns:p14="http://schemas.microsoft.com/office/powerpoint/2010/main" val="1024086991"/>
+      </p:ext>
+    </p:extLst>
+  </p:cSld>
+  <p:clrMapOvr>
+    <a:masterClrMapping/>
+  </p:clrMapOvr>
+</p:notes>
+</file>
+
+<file path=ppt/notesSlides/notesSlide2.xml><?xml version="1.0" encoding="utf-8"?>
+<p:notes xmlns:a="http://schemas.openxmlformats.org/drawingml/2006/main" xmlns:r="http://schemas.openxmlformats.org/officeDocument/2006/relationships" xmlns:p="http://schemas.openxmlformats.org/presentationml/2006/main">
+  <p:cSld>
+    <p:spTree>
+      <p:nvGrpSpPr>
+        <p:cNvPr id="1" name="">
+          <a:extLst>
+            <a:ext uri="{FF2B5EF4-FFF2-40B4-BE49-F238E27FC236}">
+              <a16:creationId xmlns:a16="http://schemas.microsoft.com/office/drawing/2014/main" id="{4FF13541-CCFC-F3F4-B3CC-4C22227BA1AD}"/>
+            </a:ext>
+          </a:extLst>
+        </p:cNvPr>
+        <p:cNvGrpSpPr/>
+        <p:nvPr/>
+      </p:nvGrpSpPr>
+      <p:grpSpPr>
+        <a:xfrm>
+          <a:off x="0" y="0"/>
+          <a:ext cx="0" cy="0"/>
+          <a:chOff x="0" y="0"/>
+          <a:chExt cx="0" cy="0"/>
+        </a:xfrm>
+      </p:grpSpPr>
+      <p:sp>
+        <p:nvSpPr>
+          <p:cNvPr id="2" name="Slide Image Placeholder 1">
+            <a:extLst>
+              <a:ext uri="{FF2B5EF4-FFF2-40B4-BE49-F238E27FC236}">
+                <a16:creationId xmlns:a16="http://schemas.microsoft.com/office/drawing/2014/main" id="{43AA44D5-2B2C-FDD7-8AD0-6859F44EDF35}"/>
+              </a:ext>
+            </a:extLst>
+          </p:cNvPr>
+          <p:cNvSpPr>
+            <a:spLocks noGrp="1" noRot="1" noChangeAspect="1"/>
+          </p:cNvSpPr>
+          <p:nvPr>
+            <p:ph type="sldImg"/>
+          </p:nvPr>
+        </p:nvSpPr>
+        <p:spPr/>
+      </p:sp>
+      <p:sp>
+        <p:nvSpPr>
+          <p:cNvPr id="3" name="Notes Placeholder 2">
+            <a:extLst>
+              <a:ext uri="{FF2B5EF4-FFF2-40B4-BE49-F238E27FC236}">
+                <a16:creationId xmlns:a16="http://schemas.microsoft.com/office/drawing/2014/main" id="{56118A1E-17C8-5813-AF4A-128123F6DEA0}"/>
+              </a:ext>
+            </a:extLst>
+          </p:cNvPr>
+          <p:cNvSpPr>
+            <a:spLocks noGrp="1"/>
+          </p:cNvSpPr>
+          <p:nvPr>
+            <p:ph type="body" idx="1"/>
+          </p:nvPr>
+        </p:nvSpPr>
+        <p:spPr/>
+        <p:txBody>
+          <a:bodyPr/>
+          <a:lstStyle/>
+          <a:p>
+            <a:endParaRPr lang="en-US" dirty="0"/>
+          </a:p>
+        </p:txBody>
+      </p:sp>
+      <p:sp>
+        <p:nvSpPr>
+          <p:cNvPr id="4" name="Slide Number Placeholder 3">
+            <a:extLst>
+              <a:ext uri="{FF2B5EF4-FFF2-40B4-BE49-F238E27FC236}">
+                <a16:creationId xmlns:a16="http://schemas.microsoft.com/office/drawing/2014/main" id="{AE35E8BE-276B-0305-8C5C-43C7C4972040}"/>
+              </a:ext>
+            </a:extLst>
+          </p:cNvPr>
+          <p:cNvSpPr>
+            <a:spLocks noGrp="1"/>
+          </p:cNvSpPr>
+          <p:nvPr>
+            <p:ph type="sldNum" sz="quarter" idx="10"/>
+          </p:nvPr>
+        </p:nvSpPr>
+        <p:spPr/>
+        <p:txBody>
+          <a:bodyPr/>
+          <a:lstStyle/>
+          <a:p>
+            <a:fld id="{F7021451-1387-4CA6-816F-3879F97B5CBC}" type="slidenum">
+              <a:rPr lang="en-US"/>
+              <a:t>2</a:t>
+            </a:fld>
+            <a:endParaRPr lang="en-US"/>
+          </a:p>
+        </p:txBody>
+      </p:sp>
+    </p:spTree>
+    <p:extLst>
+      <p:ext uri="{BB962C8B-B14F-4D97-AF65-F5344CB8AC3E}">
+        <p14:creationId xmlns:p14="http://schemas.microsoft.com/office/powerpoint/2010/main" val="976405511"/>
       </p:ext>
     </p:extLst>
   </p:cSld>
@@ -2120,6 +2229,942 @@
 
 <file path=ppt/slides/slide10.xml><?xml version="1.0" encoding="utf-8"?>
 <p:sld xmlns:a="http://schemas.openxmlformats.org/drawingml/2006/main" xmlns:r="http://schemas.openxmlformats.org/officeDocument/2006/relationships" xmlns:p="http://schemas.openxmlformats.org/presentationml/2006/main">
+  <p:cSld name="Slide 9">
+    <p:bg>
+      <p:bgPr>
+        <a:solidFill>
+          <a:srgbClr val="0A1628"/>
+        </a:solidFill>
+        <a:effectLst/>
+      </p:bgPr>
+    </p:bg>
+    <p:spTree>
+      <p:nvGrpSpPr>
+        <p:cNvPr id="1" name=""/>
+        <p:cNvGrpSpPr/>
+        <p:nvPr/>
+      </p:nvGrpSpPr>
+      <p:grpSpPr>
+        <a:xfrm>
+          <a:off x="0" y="0"/>
+          <a:ext cx="0" cy="0"/>
+          <a:chOff x="0" y="0"/>
+          <a:chExt cx="0" cy="0"/>
+        </a:xfrm>
+      </p:grpSpPr>
+      <p:sp>
+        <p:nvSpPr>
+          <p:cNvPr id="2" name="Shape 0"/>
+          <p:cNvSpPr/>
+          <p:nvPr/>
+        </p:nvSpPr>
+        <p:spPr>
+          <a:xfrm>
+            <a:off x="0" y="0"/>
+            <a:ext cx="9144000" cy="640080"/>
+          </a:xfrm>
+          <a:prstGeom prst="rect">
+            <a:avLst/>
+          </a:prstGeom>
+          <a:solidFill>
+            <a:srgbClr val="0E3A5C"/>
+          </a:solidFill>
+          <a:ln/>
+        </p:spPr>
+        <p:txBody>
+          <a:bodyPr/>
+          <a:lstStyle/>
+          <a:p>
+            <a:endParaRPr lang="en-US"/>
+          </a:p>
+        </p:txBody>
+      </p:sp>
+      <p:sp>
+        <p:nvSpPr>
+          <p:cNvPr id="3" name="Text 1"/>
+          <p:cNvSpPr/>
+          <p:nvPr/>
+        </p:nvSpPr>
+        <p:spPr>
+          <a:xfrm>
+            <a:off x="274320" y="137160"/>
+            <a:ext cx="8595360" cy="402336"/>
+          </a:xfrm>
+          <a:prstGeom prst="rect">
+            <a:avLst/>
+          </a:prstGeom>
+          <a:noFill/>
+          <a:ln/>
+        </p:spPr>
+        <p:txBody>
+          <a:bodyPr wrap="square" lIns="0" tIns="0" rIns="0" bIns="0" rtlCol="0" anchor="ctr"/>
+          <a:lstStyle/>
+          <a:p>
+            <a:pPr marL="0" indent="0">
+              <a:buNone/>
+            </a:pPr>
+            <a:r>
+              <a:rPr lang="en-US" sz="1400" b="1" kern="0" spc="300" dirty="0">
+                <a:solidFill>
+                  <a:srgbClr val="38BDF8"/>
+                </a:solidFill>
+              </a:rPr>
+              <a:t>AWS SERVICES USED IN THIS WORKSHOP</a:t>
+            </a:r>
+            <a:endParaRPr lang="en-US" sz="1400" dirty="0"/>
+          </a:p>
+        </p:txBody>
+      </p:sp>
+      <p:sp>
+        <p:nvSpPr>
+          <p:cNvPr id="4" name="Shape 2"/>
+          <p:cNvSpPr/>
+          <p:nvPr/>
+        </p:nvSpPr>
+        <p:spPr>
+          <a:xfrm>
+            <a:off x="228600" y="822960"/>
+            <a:ext cx="4251960" cy="1261872"/>
+          </a:xfrm>
+          <a:prstGeom prst="rect">
+            <a:avLst/>
+          </a:prstGeom>
+          <a:solidFill>
+            <a:srgbClr val="1A5276"/>
+          </a:solidFill>
+          <a:ln w="9525">
+            <a:solidFill>
+              <a:srgbClr val="0891B2"/>
+            </a:solidFill>
+            <a:prstDash val="solid"/>
+          </a:ln>
+        </p:spPr>
+        <p:txBody>
+          <a:bodyPr/>
+          <a:lstStyle/>
+          <a:p>
+            <a:endParaRPr lang="en-US"/>
+          </a:p>
+        </p:txBody>
+      </p:sp>
+      <p:sp>
+        <p:nvSpPr>
+          <p:cNvPr id="5" name="Text 3"/>
+          <p:cNvSpPr/>
+          <p:nvPr/>
+        </p:nvSpPr>
+        <p:spPr>
+          <a:xfrm>
+            <a:off x="320040" y="960120"/>
+            <a:ext cx="777240" cy="777240"/>
+          </a:xfrm>
+          <a:prstGeom prst="rect">
+            <a:avLst/>
+          </a:prstGeom>
+          <a:noFill/>
+          <a:ln/>
+        </p:spPr>
+        <p:txBody>
+          <a:bodyPr wrap="square" lIns="0" tIns="0" rIns="0" bIns="0" rtlCol="0" anchor="ctr"/>
+          <a:lstStyle/>
+          <a:p>
+            <a:pPr marL="0" indent="0">
+              <a:buNone/>
+            </a:pPr>
+            <a:r>
+              <a:rPr lang="en-US" sz="3000" dirty="0">
+                <a:solidFill>
+                  <a:srgbClr val="000000"/>
+                </a:solidFill>
+              </a:rPr>
+              <a:t>🧠</a:t>
+            </a:r>
+            <a:endParaRPr lang="en-US" sz="3000" dirty="0"/>
+          </a:p>
+        </p:txBody>
+      </p:sp>
+      <p:sp>
+        <p:nvSpPr>
+          <p:cNvPr id="6" name="Text 4"/>
+          <p:cNvSpPr/>
+          <p:nvPr/>
+        </p:nvSpPr>
+        <p:spPr>
+          <a:xfrm>
+            <a:off x="1143000" y="932688"/>
+            <a:ext cx="3246120" cy="347472"/>
+          </a:xfrm>
+          <a:prstGeom prst="rect">
+            <a:avLst/>
+          </a:prstGeom>
+          <a:noFill/>
+          <a:ln/>
+        </p:spPr>
+        <p:txBody>
+          <a:bodyPr wrap="square" lIns="0" tIns="0" rIns="0" bIns="0" rtlCol="0" anchor="ctr"/>
+          <a:lstStyle/>
+          <a:p>
+            <a:pPr marL="0" indent="0">
+              <a:buNone/>
+            </a:pPr>
+            <a:r>
+              <a:rPr lang="en-US" sz="1400" b="1" dirty="0">
+                <a:solidFill>
+                  <a:srgbClr val="FFFFFF"/>
+                </a:solidFill>
+              </a:rPr>
+              <a:t>Amazon Bedrock</a:t>
+            </a:r>
+            <a:endParaRPr lang="en-US" sz="1400" dirty="0"/>
+          </a:p>
+        </p:txBody>
+      </p:sp>
+      <p:sp>
+        <p:nvSpPr>
+          <p:cNvPr id="7" name="Text 5"/>
+          <p:cNvSpPr/>
+          <p:nvPr/>
+        </p:nvSpPr>
+        <p:spPr>
+          <a:xfrm>
+            <a:off x="1143000" y="1280160"/>
+            <a:ext cx="3246120" cy="685800"/>
+          </a:xfrm>
+          <a:prstGeom prst="rect">
+            <a:avLst/>
+          </a:prstGeom>
+          <a:noFill/>
+          <a:ln/>
+        </p:spPr>
+        <p:txBody>
+          <a:bodyPr wrap="square" lIns="0" tIns="0" rIns="0" bIns="0" rtlCol="0" anchor="ctr"/>
+          <a:lstStyle/>
+          <a:p>
+            <a:pPr marL="0" indent="0">
+              <a:buNone/>
+            </a:pPr>
+            <a:r>
+              <a:rPr lang="en-US" sz="1100" dirty="0">
+                <a:solidFill>
+                  <a:srgbClr val="E2E8F0"/>
+                </a:solidFill>
+              </a:rPr>
+              <a:t>Foundation models, Knowledge Bases, AgentCore Runtime &amp; Memory, Gateway</a:t>
+            </a:r>
+            <a:endParaRPr lang="en-US" sz="1100" dirty="0"/>
+          </a:p>
+        </p:txBody>
+      </p:sp>
+      <p:sp>
+        <p:nvSpPr>
+          <p:cNvPr id="8" name="Shape 6"/>
+          <p:cNvSpPr/>
+          <p:nvPr/>
+        </p:nvSpPr>
+        <p:spPr>
+          <a:xfrm>
+            <a:off x="4709160" y="822960"/>
+            <a:ext cx="4251960" cy="1261872"/>
+          </a:xfrm>
+          <a:prstGeom prst="rect">
+            <a:avLst/>
+          </a:prstGeom>
+          <a:solidFill>
+            <a:srgbClr val="0E7490"/>
+          </a:solidFill>
+          <a:ln w="9525">
+            <a:solidFill>
+              <a:srgbClr val="0891B2"/>
+            </a:solidFill>
+            <a:prstDash val="solid"/>
+          </a:ln>
+        </p:spPr>
+        <p:txBody>
+          <a:bodyPr/>
+          <a:lstStyle/>
+          <a:p>
+            <a:endParaRPr lang="en-US"/>
+          </a:p>
+        </p:txBody>
+      </p:sp>
+      <p:sp>
+        <p:nvSpPr>
+          <p:cNvPr id="9" name="Text 7"/>
+          <p:cNvSpPr/>
+          <p:nvPr/>
+        </p:nvSpPr>
+        <p:spPr>
+          <a:xfrm>
+            <a:off x="4800600" y="960120"/>
+            <a:ext cx="777240" cy="777240"/>
+          </a:xfrm>
+          <a:prstGeom prst="rect">
+            <a:avLst/>
+          </a:prstGeom>
+          <a:noFill/>
+          <a:ln/>
+        </p:spPr>
+        <p:txBody>
+          <a:bodyPr wrap="square" lIns="0" tIns="0" rIns="0" bIns="0" rtlCol="0" anchor="ctr"/>
+          <a:lstStyle/>
+          <a:p>
+            <a:pPr marL="0" indent="0">
+              <a:buNone/>
+            </a:pPr>
+            <a:r>
+              <a:rPr lang="en-US" sz="3000" dirty="0">
+                <a:solidFill>
+                  <a:srgbClr val="000000"/>
+                </a:solidFill>
+              </a:rPr>
+              <a:t>🔍</a:t>
+            </a:r>
+            <a:endParaRPr lang="en-US" sz="3000" dirty="0"/>
+          </a:p>
+        </p:txBody>
+      </p:sp>
+      <p:sp>
+        <p:nvSpPr>
+          <p:cNvPr id="10" name="Text 8"/>
+          <p:cNvSpPr/>
+          <p:nvPr/>
+        </p:nvSpPr>
+        <p:spPr>
+          <a:xfrm>
+            <a:off x="5623560" y="932688"/>
+            <a:ext cx="3246120" cy="347472"/>
+          </a:xfrm>
+          <a:prstGeom prst="rect">
+            <a:avLst/>
+          </a:prstGeom>
+          <a:noFill/>
+          <a:ln/>
+        </p:spPr>
+        <p:txBody>
+          <a:bodyPr wrap="square" lIns="0" tIns="0" rIns="0" bIns="0" rtlCol="0" anchor="ctr"/>
+          <a:lstStyle/>
+          <a:p>
+            <a:pPr marL="0" indent="0">
+              <a:buNone/>
+            </a:pPr>
+            <a:r>
+              <a:rPr lang="en-US" sz="1400" b="1" dirty="0">
+                <a:solidFill>
+                  <a:srgbClr val="FFFFFF"/>
+                </a:solidFill>
+              </a:rPr>
+              <a:t>OpenSearch Serverless</a:t>
+            </a:r>
+            <a:endParaRPr lang="en-US" sz="1400" dirty="0"/>
+          </a:p>
+        </p:txBody>
+      </p:sp>
+      <p:sp>
+        <p:nvSpPr>
+          <p:cNvPr id="11" name="Text 9"/>
+          <p:cNvSpPr/>
+          <p:nvPr/>
+        </p:nvSpPr>
+        <p:spPr>
+          <a:xfrm>
+            <a:off x="5623560" y="1280160"/>
+            <a:ext cx="3246120" cy="685800"/>
+          </a:xfrm>
+          <a:prstGeom prst="rect">
+            <a:avLst/>
+          </a:prstGeom>
+          <a:noFill/>
+          <a:ln/>
+        </p:spPr>
+        <p:txBody>
+          <a:bodyPr wrap="square" lIns="0" tIns="0" rIns="0" bIns="0" rtlCol="0" anchor="ctr"/>
+          <a:lstStyle/>
+          <a:p>
+            <a:pPr marL="0" indent="0">
+              <a:buNone/>
+            </a:pPr>
+            <a:r>
+              <a:rPr lang="en-US" sz="1100" dirty="0">
+                <a:solidFill>
+                  <a:srgbClr val="E2E8F0"/>
+                </a:solidFill>
+              </a:rPr>
+              <a:t>Managed vector index with HNSW — powers hybrid search in Stage 2</a:t>
+            </a:r>
+            <a:endParaRPr lang="en-US" sz="1100" dirty="0"/>
+          </a:p>
+        </p:txBody>
+      </p:sp>
+      <p:sp>
+        <p:nvSpPr>
+          <p:cNvPr id="12" name="Shape 10"/>
+          <p:cNvSpPr/>
+          <p:nvPr/>
+        </p:nvSpPr>
+        <p:spPr>
+          <a:xfrm>
+            <a:off x="228600" y="2240280"/>
+            <a:ext cx="4251960" cy="1261872"/>
+          </a:xfrm>
+          <a:prstGeom prst="rect">
+            <a:avLst/>
+          </a:prstGeom>
+          <a:solidFill>
+            <a:srgbClr val="1E4D78"/>
+          </a:solidFill>
+          <a:ln w="9525">
+            <a:solidFill>
+              <a:srgbClr val="0891B2"/>
+            </a:solidFill>
+            <a:prstDash val="solid"/>
+          </a:ln>
+        </p:spPr>
+        <p:txBody>
+          <a:bodyPr/>
+          <a:lstStyle/>
+          <a:p>
+            <a:endParaRPr lang="en-US"/>
+          </a:p>
+        </p:txBody>
+      </p:sp>
+      <p:sp>
+        <p:nvSpPr>
+          <p:cNvPr id="13" name="Text 11"/>
+          <p:cNvSpPr/>
+          <p:nvPr/>
+        </p:nvSpPr>
+        <p:spPr>
+          <a:xfrm>
+            <a:off x="320040" y="2377440"/>
+            <a:ext cx="777240" cy="777240"/>
+          </a:xfrm>
+          <a:prstGeom prst="rect">
+            <a:avLst/>
+          </a:prstGeom>
+          <a:noFill/>
+          <a:ln/>
+        </p:spPr>
+        <p:txBody>
+          <a:bodyPr wrap="square" lIns="0" tIns="0" rIns="0" bIns="0" rtlCol="0" anchor="ctr"/>
+          <a:lstStyle/>
+          <a:p>
+            <a:pPr marL="0" indent="0">
+              <a:buNone/>
+            </a:pPr>
+            <a:r>
+              <a:rPr lang="en-US" sz="3000" dirty="0">
+                <a:solidFill>
+                  <a:srgbClr val="000000"/>
+                </a:solidFill>
+              </a:rPr>
+              <a:t>🪣</a:t>
+            </a:r>
+            <a:endParaRPr lang="en-US" sz="3000" dirty="0"/>
+          </a:p>
+        </p:txBody>
+      </p:sp>
+      <p:sp>
+        <p:nvSpPr>
+          <p:cNvPr id="14" name="Text 12"/>
+          <p:cNvSpPr/>
+          <p:nvPr/>
+        </p:nvSpPr>
+        <p:spPr>
+          <a:xfrm>
+            <a:off x="1143000" y="2350008"/>
+            <a:ext cx="3246120" cy="347472"/>
+          </a:xfrm>
+          <a:prstGeom prst="rect">
+            <a:avLst/>
+          </a:prstGeom>
+          <a:noFill/>
+          <a:ln/>
+        </p:spPr>
+        <p:txBody>
+          <a:bodyPr wrap="square" lIns="0" tIns="0" rIns="0" bIns="0" rtlCol="0" anchor="ctr"/>
+          <a:lstStyle/>
+          <a:p>
+            <a:pPr marL="0" indent="0">
+              <a:buNone/>
+            </a:pPr>
+            <a:r>
+              <a:rPr lang="en-US" sz="1400" b="1" dirty="0">
+                <a:solidFill>
+                  <a:srgbClr val="FFFFFF"/>
+                </a:solidFill>
+              </a:rPr>
+              <a:t>Amazon S3</a:t>
+            </a:r>
+            <a:endParaRPr lang="en-US" sz="1400" dirty="0"/>
+          </a:p>
+        </p:txBody>
+      </p:sp>
+      <p:sp>
+        <p:nvSpPr>
+          <p:cNvPr id="15" name="Text 13"/>
+          <p:cNvSpPr/>
+          <p:nvPr/>
+        </p:nvSpPr>
+        <p:spPr>
+          <a:xfrm>
+            <a:off x="1143000" y="2697480"/>
+            <a:ext cx="3246120" cy="685800"/>
+          </a:xfrm>
+          <a:prstGeom prst="rect">
+            <a:avLst/>
+          </a:prstGeom>
+          <a:noFill/>
+          <a:ln/>
+        </p:spPr>
+        <p:txBody>
+          <a:bodyPr wrap="square" lIns="0" tIns="0" rIns="0" bIns="0" rtlCol="0" anchor="ctr"/>
+          <a:lstStyle/>
+          <a:p>
+            <a:pPr marL="0" indent="0">
+              <a:buNone/>
+            </a:pPr>
+            <a:r>
+              <a:rPr lang="en-US" sz="1100" dirty="0">
+                <a:solidFill>
+                  <a:srgbClr val="E2E8F0"/>
+                </a:solidFill>
+              </a:rPr>
+              <a:t>Document data source for Bedrock Knowledge Base ingestion pipeline</a:t>
+            </a:r>
+            <a:endParaRPr lang="en-US" sz="1100" dirty="0"/>
+          </a:p>
+        </p:txBody>
+      </p:sp>
+      <p:sp>
+        <p:nvSpPr>
+          <p:cNvPr id="16" name="Shape 14"/>
+          <p:cNvSpPr/>
+          <p:nvPr/>
+        </p:nvSpPr>
+        <p:spPr>
+          <a:xfrm>
+            <a:off x="4709160" y="2240280"/>
+            <a:ext cx="4251960" cy="1261872"/>
+          </a:xfrm>
+          <a:prstGeom prst="rect">
+            <a:avLst/>
+          </a:prstGeom>
+          <a:solidFill>
+            <a:srgbClr val="166534"/>
+          </a:solidFill>
+          <a:ln w="9525">
+            <a:solidFill>
+              <a:srgbClr val="0891B2"/>
+            </a:solidFill>
+            <a:prstDash val="solid"/>
+          </a:ln>
+        </p:spPr>
+        <p:txBody>
+          <a:bodyPr/>
+          <a:lstStyle/>
+          <a:p>
+            <a:endParaRPr lang="en-US"/>
+          </a:p>
+        </p:txBody>
+      </p:sp>
+      <p:sp>
+        <p:nvSpPr>
+          <p:cNvPr id="17" name="Text 15"/>
+          <p:cNvSpPr/>
+          <p:nvPr/>
+        </p:nvSpPr>
+        <p:spPr>
+          <a:xfrm>
+            <a:off x="4800600" y="2377440"/>
+            <a:ext cx="777240" cy="777240"/>
+          </a:xfrm>
+          <a:prstGeom prst="rect">
+            <a:avLst/>
+          </a:prstGeom>
+          <a:noFill/>
+          <a:ln/>
+        </p:spPr>
+        <p:txBody>
+          <a:bodyPr wrap="square" lIns="0" tIns="0" rIns="0" bIns="0" rtlCol="0" anchor="ctr"/>
+          <a:lstStyle/>
+          <a:p>
+            <a:pPr marL="0" indent="0">
+              <a:buNone/>
+            </a:pPr>
+            <a:r>
+              <a:rPr lang="en-US" sz="3000" dirty="0">
+                <a:solidFill>
+                  <a:srgbClr val="000000"/>
+                </a:solidFill>
+              </a:rPr>
+              <a:t>📦</a:t>
+            </a:r>
+            <a:endParaRPr lang="en-US" sz="3000" dirty="0"/>
+          </a:p>
+        </p:txBody>
+      </p:sp>
+      <p:sp>
+        <p:nvSpPr>
+          <p:cNvPr id="18" name="Text 16"/>
+          <p:cNvSpPr/>
+          <p:nvPr/>
+        </p:nvSpPr>
+        <p:spPr>
+          <a:xfrm>
+            <a:off x="5623560" y="2350008"/>
+            <a:ext cx="3246120" cy="347472"/>
+          </a:xfrm>
+          <a:prstGeom prst="rect">
+            <a:avLst/>
+          </a:prstGeom>
+          <a:noFill/>
+          <a:ln/>
+        </p:spPr>
+        <p:txBody>
+          <a:bodyPr wrap="square" lIns="0" tIns="0" rIns="0" bIns="0" rtlCol="0" anchor="ctr"/>
+          <a:lstStyle/>
+          <a:p>
+            <a:pPr marL="0" indent="0">
+              <a:buNone/>
+            </a:pPr>
+            <a:r>
+              <a:rPr lang="en-US" sz="1400" b="1" dirty="0">
+                <a:solidFill>
+                  <a:srgbClr val="FFFFFF"/>
+                </a:solidFill>
+              </a:rPr>
+              <a:t>Amazon ECR</a:t>
+            </a:r>
+            <a:endParaRPr lang="en-US" sz="1400" dirty="0"/>
+          </a:p>
+        </p:txBody>
+      </p:sp>
+      <p:sp>
+        <p:nvSpPr>
+          <p:cNvPr id="19" name="Text 17"/>
+          <p:cNvSpPr/>
+          <p:nvPr/>
+        </p:nvSpPr>
+        <p:spPr>
+          <a:xfrm>
+            <a:off x="5623560" y="2697480"/>
+            <a:ext cx="3246120" cy="685800"/>
+          </a:xfrm>
+          <a:prstGeom prst="rect">
+            <a:avLst/>
+          </a:prstGeom>
+          <a:noFill/>
+          <a:ln/>
+        </p:spPr>
+        <p:txBody>
+          <a:bodyPr wrap="square" lIns="0" tIns="0" rIns="0" bIns="0" rtlCol="0" anchor="ctr"/>
+          <a:lstStyle/>
+          <a:p>
+            <a:pPr marL="0" indent="0">
+              <a:buNone/>
+            </a:pPr>
+            <a:r>
+              <a:rPr lang="en-US" sz="1100" dirty="0">
+                <a:solidFill>
+                  <a:srgbClr val="E2E8F0"/>
+                </a:solidFill>
+              </a:rPr>
+              <a:t>Container registry for Strands agent Docker images in Stage 3</a:t>
+            </a:r>
+            <a:endParaRPr lang="en-US" sz="1100" dirty="0"/>
+          </a:p>
+        </p:txBody>
+      </p:sp>
+      <p:sp>
+        <p:nvSpPr>
+          <p:cNvPr id="20" name="Shape 18"/>
+          <p:cNvSpPr/>
+          <p:nvPr/>
+        </p:nvSpPr>
+        <p:spPr>
+          <a:xfrm>
+            <a:off x="228600" y="3657600"/>
+            <a:ext cx="4251960" cy="1261872"/>
+          </a:xfrm>
+          <a:prstGeom prst="rect">
+            <a:avLst/>
+          </a:prstGeom>
+          <a:solidFill>
+            <a:srgbClr val="5B21B6"/>
+          </a:solidFill>
+          <a:ln w="9525">
+            <a:solidFill>
+              <a:srgbClr val="0891B2"/>
+            </a:solidFill>
+            <a:prstDash val="solid"/>
+          </a:ln>
+        </p:spPr>
+        <p:txBody>
+          <a:bodyPr/>
+          <a:lstStyle/>
+          <a:p>
+            <a:endParaRPr lang="en-US"/>
+          </a:p>
+        </p:txBody>
+      </p:sp>
+      <p:sp>
+        <p:nvSpPr>
+          <p:cNvPr id="21" name="Text 19"/>
+          <p:cNvSpPr/>
+          <p:nvPr/>
+        </p:nvSpPr>
+        <p:spPr>
+          <a:xfrm>
+            <a:off x="320040" y="3794760"/>
+            <a:ext cx="777240" cy="777240"/>
+          </a:xfrm>
+          <a:prstGeom prst="rect">
+            <a:avLst/>
+          </a:prstGeom>
+          <a:noFill/>
+          <a:ln/>
+        </p:spPr>
+        <p:txBody>
+          <a:bodyPr wrap="square" lIns="0" tIns="0" rIns="0" bIns="0" rtlCol="0" anchor="ctr"/>
+          <a:lstStyle/>
+          <a:p>
+            <a:pPr marL="0" indent="0">
+              <a:buNone/>
+            </a:pPr>
+            <a:r>
+              <a:rPr lang="en-US" sz="3000" dirty="0">
+                <a:solidFill>
+                  <a:srgbClr val="000000"/>
+                </a:solidFill>
+              </a:rPr>
+              <a:t>🔐</a:t>
+            </a:r>
+            <a:endParaRPr lang="en-US" sz="3000" dirty="0"/>
+          </a:p>
+        </p:txBody>
+      </p:sp>
+      <p:sp>
+        <p:nvSpPr>
+          <p:cNvPr id="22" name="Text 20"/>
+          <p:cNvSpPr/>
+          <p:nvPr/>
+        </p:nvSpPr>
+        <p:spPr>
+          <a:xfrm>
+            <a:off x="1143000" y="3767328"/>
+            <a:ext cx="3246120" cy="347472"/>
+          </a:xfrm>
+          <a:prstGeom prst="rect">
+            <a:avLst/>
+          </a:prstGeom>
+          <a:noFill/>
+          <a:ln/>
+        </p:spPr>
+        <p:txBody>
+          <a:bodyPr wrap="square" lIns="0" tIns="0" rIns="0" bIns="0" rtlCol="0" anchor="ctr"/>
+          <a:lstStyle/>
+          <a:p>
+            <a:pPr marL="0" indent="0">
+              <a:buNone/>
+            </a:pPr>
+            <a:r>
+              <a:rPr lang="en-US" sz="1400" b="1" dirty="0">
+                <a:solidFill>
+                  <a:srgbClr val="FFFFFF"/>
+                </a:solidFill>
+              </a:rPr>
+              <a:t>AWS IAM</a:t>
+            </a:r>
+            <a:endParaRPr lang="en-US" sz="1400" dirty="0"/>
+          </a:p>
+        </p:txBody>
+      </p:sp>
+      <p:sp>
+        <p:nvSpPr>
+          <p:cNvPr id="23" name="Text 21"/>
+          <p:cNvSpPr/>
+          <p:nvPr/>
+        </p:nvSpPr>
+        <p:spPr>
+          <a:xfrm>
+            <a:off x="1143000" y="4114800"/>
+            <a:ext cx="3246120" cy="685800"/>
+          </a:xfrm>
+          <a:prstGeom prst="rect">
+            <a:avLst/>
+          </a:prstGeom>
+          <a:noFill/>
+          <a:ln/>
+        </p:spPr>
+        <p:txBody>
+          <a:bodyPr wrap="square" lIns="0" tIns="0" rIns="0" bIns="0" rtlCol="0" anchor="ctr"/>
+          <a:lstStyle/>
+          <a:p>
+            <a:pPr marL="0" indent="0">
+              <a:buNone/>
+            </a:pPr>
+            <a:r>
+              <a:rPr lang="en-US" sz="1100" dirty="0">
+                <a:solidFill>
+                  <a:srgbClr val="E2E8F0"/>
+                </a:solidFill>
+              </a:rPr>
+              <a:t>Least-privilege execution roles for Bedrock, ECR, CloudWatch access</a:t>
+            </a:r>
+            <a:endParaRPr lang="en-US" sz="1100" dirty="0"/>
+          </a:p>
+        </p:txBody>
+      </p:sp>
+      <p:sp>
+        <p:nvSpPr>
+          <p:cNvPr id="24" name="Shape 22"/>
+          <p:cNvSpPr/>
+          <p:nvPr/>
+        </p:nvSpPr>
+        <p:spPr>
+          <a:xfrm>
+            <a:off x="4709160" y="3657600"/>
+            <a:ext cx="4251960" cy="1261872"/>
+          </a:xfrm>
+          <a:prstGeom prst="rect">
+            <a:avLst/>
+          </a:prstGeom>
+          <a:solidFill>
+            <a:srgbClr val="7C3AED"/>
+          </a:solidFill>
+          <a:ln w="9525">
+            <a:solidFill>
+              <a:srgbClr val="0891B2"/>
+            </a:solidFill>
+            <a:prstDash val="solid"/>
+          </a:ln>
+        </p:spPr>
+        <p:txBody>
+          <a:bodyPr/>
+          <a:lstStyle/>
+          <a:p>
+            <a:endParaRPr lang="en-US"/>
+          </a:p>
+        </p:txBody>
+      </p:sp>
+      <p:sp>
+        <p:nvSpPr>
+          <p:cNvPr id="25" name="Text 23"/>
+          <p:cNvSpPr/>
+          <p:nvPr/>
+        </p:nvSpPr>
+        <p:spPr>
+          <a:xfrm>
+            <a:off x="4800600" y="3794760"/>
+            <a:ext cx="777240" cy="777240"/>
+          </a:xfrm>
+          <a:prstGeom prst="rect">
+            <a:avLst/>
+          </a:prstGeom>
+          <a:noFill/>
+          <a:ln/>
+        </p:spPr>
+        <p:txBody>
+          <a:bodyPr wrap="square" lIns="0" tIns="0" rIns="0" bIns="0" rtlCol="0" anchor="ctr"/>
+          <a:lstStyle/>
+          <a:p>
+            <a:pPr marL="0" indent="0">
+              <a:buNone/>
+            </a:pPr>
+            <a:r>
+              <a:rPr lang="en-US" sz="3000" dirty="0">
+                <a:solidFill>
+                  <a:srgbClr val="000000"/>
+                </a:solidFill>
+              </a:rPr>
+              <a:t>📊</a:t>
+            </a:r>
+            <a:endParaRPr lang="en-US" sz="3000" dirty="0"/>
+          </a:p>
+        </p:txBody>
+      </p:sp>
+      <p:sp>
+        <p:nvSpPr>
+          <p:cNvPr id="26" name="Text 24"/>
+          <p:cNvSpPr/>
+          <p:nvPr/>
+        </p:nvSpPr>
+        <p:spPr>
+          <a:xfrm>
+            <a:off x="5623560" y="3767328"/>
+            <a:ext cx="3246120" cy="347472"/>
+          </a:xfrm>
+          <a:prstGeom prst="rect">
+            <a:avLst/>
+          </a:prstGeom>
+          <a:noFill/>
+          <a:ln/>
+        </p:spPr>
+        <p:txBody>
+          <a:bodyPr wrap="square" lIns="0" tIns="0" rIns="0" bIns="0" rtlCol="0" anchor="ctr"/>
+          <a:lstStyle/>
+          <a:p>
+            <a:pPr marL="0" indent="0">
+              <a:buNone/>
+            </a:pPr>
+            <a:r>
+              <a:rPr lang="en-US" sz="1400" b="1" dirty="0">
+                <a:solidFill>
+                  <a:srgbClr val="FFFFFF"/>
+                </a:solidFill>
+              </a:rPr>
+              <a:t>CloudWatch + X-Ray</a:t>
+            </a:r>
+            <a:endParaRPr lang="en-US" sz="1400" dirty="0"/>
+          </a:p>
+        </p:txBody>
+      </p:sp>
+      <p:sp>
+        <p:nvSpPr>
+          <p:cNvPr id="27" name="Text 25"/>
+          <p:cNvSpPr/>
+          <p:nvPr/>
+        </p:nvSpPr>
+        <p:spPr>
+          <a:xfrm>
+            <a:off x="5623560" y="4114800"/>
+            <a:ext cx="3246120" cy="685800"/>
+          </a:xfrm>
+          <a:prstGeom prst="rect">
+            <a:avLst/>
+          </a:prstGeom>
+          <a:noFill/>
+          <a:ln/>
+        </p:spPr>
+        <p:txBody>
+          <a:bodyPr wrap="square" lIns="0" tIns="0" rIns="0" bIns="0" rtlCol="0" anchor="ctr"/>
+          <a:lstStyle/>
+          <a:p>
+            <a:pPr marL="0" indent="0">
+              <a:buNone/>
+            </a:pPr>
+            <a:r>
+              <a:rPr lang="en-US" sz="1100" dirty="0">
+                <a:solidFill>
+                  <a:srgbClr val="E2E8F0"/>
+                </a:solidFill>
+              </a:rPr>
+              <a:t>Logs, metrics, and distributed traces for the production pipeline</a:t>
+            </a:r>
+            <a:endParaRPr lang="en-US" sz="1100" dirty="0"/>
+          </a:p>
+        </p:txBody>
+      </p:sp>
+    </p:spTree>
+  </p:cSld>
+  <p:clrMapOvr>
+    <a:masterClrMapping/>
+  </p:clrMapOvr>
+</p:sld>
+</file>
+
+<file path=ppt/slides/slide11.xml><?xml version="1.0" encoding="utf-8"?>
+<p:sld xmlns:a="http://schemas.openxmlformats.org/drawingml/2006/main" xmlns:r="http://schemas.openxmlformats.org/officeDocument/2006/relationships" xmlns:p="http://schemas.openxmlformats.org/presentationml/2006/main">
   <p:cSld name="Slide 10">
     <p:bg>
       <p:bgPr>
@@ -3539,6 +4584,687 @@
 </file>
 
 <file path=ppt/slides/slide2.xml><?xml version="1.0" encoding="utf-8"?>
+<p:sld xmlns:a="http://schemas.openxmlformats.org/drawingml/2006/main" xmlns:r="http://schemas.openxmlformats.org/officeDocument/2006/relationships" xmlns:p="http://schemas.openxmlformats.org/presentationml/2006/main">
+  <p:cSld>
+    <p:bg>
+      <p:bgPr>
+        <a:solidFill>
+          <a:srgbClr val="0A1628"/>
+        </a:solidFill>
+        <a:effectLst/>
+      </p:bgPr>
+    </p:bg>
+    <p:spTree>
+      <p:nvGrpSpPr>
+        <p:cNvPr id="1" name="">
+          <a:extLst>
+            <a:ext uri="{FF2B5EF4-FFF2-40B4-BE49-F238E27FC236}">
+              <a16:creationId xmlns:a16="http://schemas.microsoft.com/office/drawing/2014/main" id="{D3AD3D6E-4B01-AD5A-F97E-E6DBE00C45AD}"/>
+            </a:ext>
+          </a:extLst>
+        </p:cNvPr>
+        <p:cNvGrpSpPr/>
+        <p:nvPr/>
+      </p:nvGrpSpPr>
+      <p:grpSpPr>
+        <a:xfrm>
+          <a:off x="0" y="0"/>
+          <a:ext cx="0" cy="0"/>
+          <a:chOff x="0" y="0"/>
+          <a:chExt cx="0" cy="0"/>
+        </a:xfrm>
+      </p:grpSpPr>
+      <p:sp>
+        <p:nvSpPr>
+          <p:cNvPr id="2" name="Shape 0">
+            <a:extLst>
+              <a:ext uri="{FF2B5EF4-FFF2-40B4-BE49-F238E27FC236}">
+                <a16:creationId xmlns:a16="http://schemas.microsoft.com/office/drawing/2014/main" id="{BD4E1F2C-37A9-BF80-6C4D-7B8651F9A62F}"/>
+              </a:ext>
+            </a:extLst>
+          </p:cNvPr>
+          <p:cNvSpPr/>
+          <p:nvPr/>
+        </p:nvSpPr>
+        <p:spPr>
+          <a:xfrm>
+            <a:off x="0" y="0"/>
+            <a:ext cx="64008" cy="5143500"/>
+          </a:xfrm>
+          <a:prstGeom prst="rect">
+            <a:avLst/>
+          </a:prstGeom>
+          <a:solidFill>
+            <a:srgbClr val="F97316"/>
+          </a:solidFill>
+          <a:ln/>
+        </p:spPr>
+        <p:txBody>
+          <a:bodyPr/>
+          <a:lstStyle/>
+          <a:p>
+            <a:endParaRPr lang="en-US"/>
+          </a:p>
+        </p:txBody>
+      </p:sp>
+      <p:sp>
+        <p:nvSpPr>
+          <p:cNvPr id="3" name="Text 1">
+            <a:extLst>
+              <a:ext uri="{FF2B5EF4-FFF2-40B4-BE49-F238E27FC236}">
+                <a16:creationId xmlns:a16="http://schemas.microsoft.com/office/drawing/2014/main" id="{D0A1A24B-1293-895A-9DB1-6BA652F2BAED}"/>
+              </a:ext>
+            </a:extLst>
+          </p:cNvPr>
+          <p:cNvSpPr/>
+          <p:nvPr/>
+        </p:nvSpPr>
+        <p:spPr>
+          <a:xfrm>
+            <a:off x="274320" y="274320"/>
+            <a:ext cx="8229600" cy="365760"/>
+          </a:xfrm>
+          <a:prstGeom prst="rect">
+            <a:avLst/>
+          </a:prstGeom>
+          <a:noFill/>
+          <a:ln/>
+        </p:spPr>
+        <p:txBody>
+          <a:bodyPr wrap="square" lIns="0" tIns="0" rIns="0" bIns="0" rtlCol="0" anchor="ctr"/>
+          <a:lstStyle/>
+          <a:p>
+            <a:pPr marL="0" indent="0">
+              <a:buNone/>
+            </a:pPr>
+            <a:r>
+              <a:rPr lang="en-US" sz="1100" b="1" kern="0" spc="600" dirty="0">
+                <a:solidFill>
+                  <a:srgbClr val="F97316"/>
+                </a:solidFill>
+              </a:rPr>
+              <a:t>WORKSHOP</a:t>
+            </a:r>
+            <a:endParaRPr lang="en-US" sz="1100" dirty="0"/>
+          </a:p>
+        </p:txBody>
+      </p:sp>
+      <p:sp>
+        <p:nvSpPr>
+          <p:cNvPr id="4" name="Text 2">
+            <a:extLst>
+              <a:ext uri="{FF2B5EF4-FFF2-40B4-BE49-F238E27FC236}">
+                <a16:creationId xmlns:a16="http://schemas.microsoft.com/office/drawing/2014/main" id="{11282625-4EBC-A71C-2131-3E17CF2CC6E7}"/>
+              </a:ext>
+            </a:extLst>
+          </p:cNvPr>
+          <p:cNvSpPr/>
+          <p:nvPr/>
+        </p:nvSpPr>
+        <p:spPr>
+          <a:xfrm>
+            <a:off x="274320" y="822960"/>
+            <a:ext cx="8595360" cy="822960"/>
+          </a:xfrm>
+          <a:prstGeom prst="rect">
+            <a:avLst/>
+          </a:prstGeom>
+          <a:noFill/>
+          <a:ln/>
+        </p:spPr>
+        <p:txBody>
+          <a:bodyPr wrap="square" lIns="0" tIns="0" rIns="0" bIns="0" rtlCol="0" anchor="ctr"/>
+          <a:lstStyle/>
+          <a:p>
+            <a:pPr marL="0" indent="0">
+              <a:buNone/>
+            </a:pPr>
+            <a:r>
+              <a:rPr lang="en-US" sz="4200" b="1" dirty="0">
+                <a:solidFill>
+                  <a:srgbClr val="FFFFFF"/>
+                </a:solidFill>
+              </a:rPr>
+              <a:t>GitHub Link</a:t>
+            </a:r>
+            <a:endParaRPr lang="en-US" sz="4200" dirty="0"/>
+          </a:p>
+        </p:txBody>
+      </p:sp>
+      <p:sp>
+        <p:nvSpPr>
+          <p:cNvPr id="5" name="Text 3">
+            <a:extLst>
+              <a:ext uri="{FF2B5EF4-FFF2-40B4-BE49-F238E27FC236}">
+                <a16:creationId xmlns:a16="http://schemas.microsoft.com/office/drawing/2014/main" id="{9D9D00AE-AA24-A0F5-8C40-5047882C705E}"/>
+              </a:ext>
+            </a:extLst>
+          </p:cNvPr>
+          <p:cNvSpPr/>
+          <p:nvPr/>
+        </p:nvSpPr>
+        <p:spPr>
+          <a:xfrm>
+            <a:off x="274320" y="1600200"/>
+            <a:ext cx="8595360" cy="822960"/>
+          </a:xfrm>
+          <a:prstGeom prst="rect">
+            <a:avLst/>
+          </a:prstGeom>
+          <a:noFill/>
+          <a:ln/>
+        </p:spPr>
+        <p:txBody>
+          <a:bodyPr wrap="square" lIns="0" tIns="0" rIns="0" bIns="0" rtlCol="0" anchor="ctr"/>
+          <a:lstStyle/>
+          <a:p>
+            <a:r>
+              <a:rPr lang="en-US" sz="2000" dirty="0">
+                <a:solidFill>
+                  <a:schemeClr val="accent5">
+                    <a:lumMod val="75000"/>
+                  </a:schemeClr>
+                </a:solidFill>
+              </a:rPr>
+              <a:t>https://github.com/AlpETuna/intro-to-RAG-Agentcore-Workshop </a:t>
+            </a:r>
+          </a:p>
+        </p:txBody>
+      </p:sp>
+      <p:sp>
+        <p:nvSpPr>
+          <p:cNvPr id="6" name="Text 4">
+            <a:extLst>
+              <a:ext uri="{FF2B5EF4-FFF2-40B4-BE49-F238E27FC236}">
+                <a16:creationId xmlns:a16="http://schemas.microsoft.com/office/drawing/2014/main" id="{030B2C5C-BE4A-2000-8655-273467DDA8C6}"/>
+              </a:ext>
+            </a:extLst>
+          </p:cNvPr>
+          <p:cNvSpPr/>
+          <p:nvPr/>
+        </p:nvSpPr>
+        <p:spPr>
+          <a:xfrm>
+            <a:off x="274320" y="2606040"/>
+            <a:ext cx="6858000" cy="731520"/>
+          </a:xfrm>
+          <a:prstGeom prst="rect">
+            <a:avLst/>
+          </a:prstGeom>
+          <a:noFill/>
+          <a:ln/>
+        </p:spPr>
+        <p:txBody>
+          <a:bodyPr wrap="square" lIns="0" tIns="0" rIns="0" bIns="0" rtlCol="0" anchor="ctr"/>
+          <a:lstStyle/>
+          <a:p>
+            <a:pPr marL="0" indent="0">
+              <a:buNone/>
+            </a:pPr>
+            <a:endParaRPr lang="en-US" sz="1500" dirty="0"/>
+          </a:p>
+        </p:txBody>
+      </p:sp>
+      <p:sp>
+        <p:nvSpPr>
+          <p:cNvPr id="8" name="Text 6">
+            <a:extLst>
+              <a:ext uri="{FF2B5EF4-FFF2-40B4-BE49-F238E27FC236}">
+                <a16:creationId xmlns:a16="http://schemas.microsoft.com/office/drawing/2014/main" id="{03A1E16E-08D5-961E-7E1D-92443625935D}"/>
+              </a:ext>
+            </a:extLst>
+          </p:cNvPr>
+          <p:cNvSpPr/>
+          <p:nvPr/>
+        </p:nvSpPr>
+        <p:spPr>
+          <a:xfrm>
+            <a:off x="274320" y="3657600"/>
+            <a:ext cx="2103120" cy="365760"/>
+          </a:xfrm>
+          <a:prstGeom prst="rect">
+            <a:avLst/>
+          </a:prstGeom>
+          <a:noFill/>
+          <a:ln/>
+        </p:spPr>
+        <p:txBody>
+          <a:bodyPr wrap="square" lIns="0" tIns="0" rIns="0" bIns="0" rtlCol="0" anchor="ctr"/>
+          <a:lstStyle/>
+          <a:p>
+            <a:pPr marL="0" indent="0" algn="ctr">
+              <a:buNone/>
+            </a:pPr>
+            <a:endParaRPr lang="en-US" sz="1600" dirty="0"/>
+          </a:p>
+        </p:txBody>
+      </p:sp>
+      <p:sp>
+        <p:nvSpPr>
+          <p:cNvPr id="9" name="Text 7">
+            <a:extLst>
+              <a:ext uri="{FF2B5EF4-FFF2-40B4-BE49-F238E27FC236}">
+                <a16:creationId xmlns:a16="http://schemas.microsoft.com/office/drawing/2014/main" id="{F04997A8-7A5A-1C43-CC78-3DF38078EAF3}"/>
+              </a:ext>
+            </a:extLst>
+          </p:cNvPr>
+          <p:cNvSpPr/>
+          <p:nvPr/>
+        </p:nvSpPr>
+        <p:spPr>
+          <a:xfrm>
+            <a:off x="274320" y="4023360"/>
+            <a:ext cx="2103120" cy="274320"/>
+          </a:xfrm>
+          <a:prstGeom prst="rect">
+            <a:avLst/>
+          </a:prstGeom>
+          <a:noFill/>
+          <a:ln/>
+        </p:spPr>
+        <p:txBody>
+          <a:bodyPr wrap="square" lIns="0" tIns="0" rIns="0" bIns="0" rtlCol="0" anchor="ctr"/>
+          <a:lstStyle/>
+          <a:p>
+            <a:pPr marL="0" indent="0" algn="ctr">
+              <a:buNone/>
+            </a:pPr>
+            <a:endParaRPr lang="en-US" sz="1000" dirty="0"/>
+          </a:p>
+        </p:txBody>
+      </p:sp>
+      <p:sp>
+        <p:nvSpPr>
+          <p:cNvPr id="11" name="Text 9">
+            <a:extLst>
+              <a:ext uri="{FF2B5EF4-FFF2-40B4-BE49-F238E27FC236}">
+                <a16:creationId xmlns:a16="http://schemas.microsoft.com/office/drawing/2014/main" id="{4143B197-C3EF-2941-C1AE-46898EA14070}"/>
+              </a:ext>
+            </a:extLst>
+          </p:cNvPr>
+          <p:cNvSpPr/>
+          <p:nvPr/>
+        </p:nvSpPr>
+        <p:spPr>
+          <a:xfrm>
+            <a:off x="2651760" y="3657600"/>
+            <a:ext cx="2103120" cy="365760"/>
+          </a:xfrm>
+          <a:prstGeom prst="rect">
+            <a:avLst/>
+          </a:prstGeom>
+          <a:noFill/>
+          <a:ln/>
+        </p:spPr>
+        <p:txBody>
+          <a:bodyPr wrap="square" lIns="0" tIns="0" rIns="0" bIns="0" rtlCol="0" anchor="ctr"/>
+          <a:lstStyle/>
+          <a:p>
+            <a:pPr marL="0" indent="0" algn="ctr">
+              <a:buNone/>
+            </a:pPr>
+            <a:endParaRPr lang="en-US" sz="1600" dirty="0"/>
+          </a:p>
+        </p:txBody>
+      </p:sp>
+      <p:sp>
+        <p:nvSpPr>
+          <p:cNvPr id="12" name="Text 10">
+            <a:extLst>
+              <a:ext uri="{FF2B5EF4-FFF2-40B4-BE49-F238E27FC236}">
+                <a16:creationId xmlns:a16="http://schemas.microsoft.com/office/drawing/2014/main" id="{5490F227-C3D9-9EFF-53C2-C6FE0177C7F2}"/>
+              </a:ext>
+            </a:extLst>
+          </p:cNvPr>
+          <p:cNvSpPr/>
+          <p:nvPr/>
+        </p:nvSpPr>
+        <p:spPr>
+          <a:xfrm>
+            <a:off x="2651760" y="4023360"/>
+            <a:ext cx="2103120" cy="274320"/>
+          </a:xfrm>
+          <a:prstGeom prst="rect">
+            <a:avLst/>
+          </a:prstGeom>
+          <a:noFill/>
+          <a:ln/>
+        </p:spPr>
+        <p:txBody>
+          <a:bodyPr wrap="square" lIns="0" tIns="0" rIns="0" bIns="0" rtlCol="0" anchor="ctr"/>
+          <a:lstStyle/>
+          <a:p>
+            <a:pPr marL="0" indent="0" algn="ctr">
+              <a:buNone/>
+            </a:pPr>
+            <a:endParaRPr lang="en-US" sz="1000" dirty="0"/>
+          </a:p>
+        </p:txBody>
+      </p:sp>
+      <p:sp>
+        <p:nvSpPr>
+          <p:cNvPr id="14" name="Text 12">
+            <a:extLst>
+              <a:ext uri="{FF2B5EF4-FFF2-40B4-BE49-F238E27FC236}">
+                <a16:creationId xmlns:a16="http://schemas.microsoft.com/office/drawing/2014/main" id="{C42AF7F7-764F-0FD3-0686-7911C5289251}"/>
+              </a:ext>
+            </a:extLst>
+          </p:cNvPr>
+          <p:cNvSpPr/>
+          <p:nvPr/>
+        </p:nvSpPr>
+        <p:spPr>
+          <a:xfrm>
+            <a:off x="5029200" y="3657600"/>
+            <a:ext cx="2103120" cy="365760"/>
+          </a:xfrm>
+          <a:prstGeom prst="rect">
+            <a:avLst/>
+          </a:prstGeom>
+          <a:noFill/>
+          <a:ln/>
+        </p:spPr>
+        <p:txBody>
+          <a:bodyPr wrap="square" lIns="0" tIns="0" rIns="0" bIns="0" rtlCol="0" anchor="ctr"/>
+          <a:lstStyle/>
+          <a:p>
+            <a:pPr marL="0" indent="0" algn="ctr">
+              <a:buNone/>
+            </a:pPr>
+            <a:endParaRPr lang="en-US" sz="1600" dirty="0"/>
+          </a:p>
+        </p:txBody>
+      </p:sp>
+      <p:sp>
+        <p:nvSpPr>
+          <p:cNvPr id="16" name="Shape 14">
+            <a:extLst>
+              <a:ext uri="{FF2B5EF4-FFF2-40B4-BE49-F238E27FC236}">
+                <a16:creationId xmlns:a16="http://schemas.microsoft.com/office/drawing/2014/main" id="{9E012956-DB1C-6616-C6F9-3020E8F98ADB}"/>
+              </a:ext>
+            </a:extLst>
+          </p:cNvPr>
+          <p:cNvSpPr/>
+          <p:nvPr/>
+        </p:nvSpPr>
+        <p:spPr>
+          <a:xfrm>
+            <a:off x="7315200" y="457200"/>
+            <a:ext cx="1645920" cy="1645920"/>
+          </a:xfrm>
+          <a:prstGeom prst="ellipse">
+            <a:avLst/>
+          </a:prstGeom>
+          <a:solidFill>
+            <a:srgbClr val="0E3A5C"/>
+          </a:solidFill>
+          <a:ln w="12700">
+            <a:solidFill>
+              <a:srgbClr val="0891B2"/>
+            </a:solidFill>
+            <a:prstDash val="solid"/>
+          </a:ln>
+        </p:spPr>
+        <p:txBody>
+          <a:bodyPr/>
+          <a:lstStyle/>
+          <a:p>
+            <a:endParaRPr lang="en-US"/>
+          </a:p>
+        </p:txBody>
+      </p:sp>
+      <p:sp>
+        <p:nvSpPr>
+          <p:cNvPr id="17" name="Text 15">
+            <a:extLst>
+              <a:ext uri="{FF2B5EF4-FFF2-40B4-BE49-F238E27FC236}">
+                <a16:creationId xmlns:a16="http://schemas.microsoft.com/office/drawing/2014/main" id="{5364DC8D-17FD-4E3A-C213-ECECE4B85F7C}"/>
+              </a:ext>
+            </a:extLst>
+          </p:cNvPr>
+          <p:cNvSpPr/>
+          <p:nvPr/>
+        </p:nvSpPr>
+        <p:spPr>
+          <a:xfrm>
+            <a:off x="7315200" y="640080"/>
+            <a:ext cx="1645920" cy="1280160"/>
+          </a:xfrm>
+          <a:prstGeom prst="rect">
+            <a:avLst/>
+          </a:prstGeom>
+          <a:noFill/>
+          <a:ln/>
+        </p:spPr>
+        <p:txBody>
+          <a:bodyPr wrap="square" lIns="0" tIns="0" rIns="0" bIns="0" rtlCol="0" anchor="ctr"/>
+          <a:lstStyle/>
+          <a:p>
+            <a:pPr marL="0" indent="0" algn="ctr">
+              <a:buNone/>
+            </a:pPr>
+            <a:r>
+              <a:rPr lang="en-US" sz="4400" dirty="0">
+                <a:solidFill>
+                  <a:srgbClr val="000000"/>
+                </a:solidFill>
+              </a:rPr>
+              <a:t>🧠</a:t>
+            </a:r>
+            <a:endParaRPr lang="en-US" sz="4400" dirty="0"/>
+          </a:p>
+        </p:txBody>
+      </p:sp>
+      <p:sp>
+        <p:nvSpPr>
+          <p:cNvPr id="18" name="Shape 16">
+            <a:extLst>
+              <a:ext uri="{FF2B5EF4-FFF2-40B4-BE49-F238E27FC236}">
+                <a16:creationId xmlns:a16="http://schemas.microsoft.com/office/drawing/2014/main" id="{A6D98ADD-1364-67A0-44CA-4C1DB7245B1E}"/>
+              </a:ext>
+            </a:extLst>
+          </p:cNvPr>
+          <p:cNvSpPr/>
+          <p:nvPr/>
+        </p:nvSpPr>
+        <p:spPr>
+          <a:xfrm>
+            <a:off x="6675120" y="2286000"/>
+            <a:ext cx="1280160" cy="1280160"/>
+          </a:xfrm>
+          <a:prstGeom prst="ellipse">
+            <a:avLst/>
+          </a:prstGeom>
+          <a:solidFill>
+            <a:srgbClr val="1A5276"/>
+          </a:solidFill>
+          <a:ln w="12700">
+            <a:solidFill>
+              <a:srgbClr val="0891B2"/>
+            </a:solidFill>
+            <a:prstDash val="solid"/>
+          </a:ln>
+        </p:spPr>
+        <p:txBody>
+          <a:bodyPr/>
+          <a:lstStyle/>
+          <a:p>
+            <a:endParaRPr lang="en-US"/>
+          </a:p>
+        </p:txBody>
+      </p:sp>
+      <p:sp>
+        <p:nvSpPr>
+          <p:cNvPr id="19" name="Text 17">
+            <a:extLst>
+              <a:ext uri="{FF2B5EF4-FFF2-40B4-BE49-F238E27FC236}">
+                <a16:creationId xmlns:a16="http://schemas.microsoft.com/office/drawing/2014/main" id="{E54BC2A5-B593-8A4D-A9A7-F357E44BF693}"/>
+              </a:ext>
+            </a:extLst>
+          </p:cNvPr>
+          <p:cNvSpPr/>
+          <p:nvPr/>
+        </p:nvSpPr>
+        <p:spPr>
+          <a:xfrm>
+            <a:off x="6675120" y="2377440"/>
+            <a:ext cx="1280160" cy="1005840"/>
+          </a:xfrm>
+          <a:prstGeom prst="rect">
+            <a:avLst/>
+          </a:prstGeom>
+          <a:noFill/>
+          <a:ln/>
+        </p:spPr>
+        <p:txBody>
+          <a:bodyPr wrap="square" lIns="0" tIns="0" rIns="0" bIns="0" rtlCol="0" anchor="ctr"/>
+          <a:lstStyle/>
+          <a:p>
+            <a:pPr marL="0" indent="0" algn="ctr">
+              <a:buNone/>
+            </a:pPr>
+            <a:r>
+              <a:rPr lang="en-US" sz="3200" dirty="0">
+                <a:solidFill>
+                  <a:srgbClr val="000000"/>
+                </a:solidFill>
+              </a:rPr>
+              <a:t>🗄</a:t>
+            </a:r>
+            <a:endParaRPr lang="en-US" sz="3200" dirty="0"/>
+          </a:p>
+        </p:txBody>
+      </p:sp>
+      <p:sp>
+        <p:nvSpPr>
+          <p:cNvPr id="20" name="Shape 18">
+            <a:extLst>
+              <a:ext uri="{FF2B5EF4-FFF2-40B4-BE49-F238E27FC236}">
+                <a16:creationId xmlns:a16="http://schemas.microsoft.com/office/drawing/2014/main" id="{5AA43997-9DD0-0CC3-C335-42B7A8750FC4}"/>
+              </a:ext>
+            </a:extLst>
+          </p:cNvPr>
+          <p:cNvSpPr/>
+          <p:nvPr/>
+        </p:nvSpPr>
+        <p:spPr>
+          <a:xfrm>
+            <a:off x="8046720" y="2194560"/>
+            <a:ext cx="1005840" cy="1005840"/>
+          </a:xfrm>
+          <a:prstGeom prst="ellipse">
+            <a:avLst/>
+          </a:prstGeom>
+          <a:solidFill>
+            <a:srgbClr val="4A1D96"/>
+          </a:solidFill>
+          <a:ln w="12700">
+            <a:solidFill>
+              <a:srgbClr val="A78BFA"/>
+            </a:solidFill>
+            <a:prstDash val="solid"/>
+          </a:ln>
+        </p:spPr>
+        <p:txBody>
+          <a:bodyPr/>
+          <a:lstStyle/>
+          <a:p>
+            <a:endParaRPr lang="en-US"/>
+          </a:p>
+        </p:txBody>
+      </p:sp>
+      <p:sp>
+        <p:nvSpPr>
+          <p:cNvPr id="21" name="Text 19">
+            <a:extLst>
+              <a:ext uri="{FF2B5EF4-FFF2-40B4-BE49-F238E27FC236}">
+                <a16:creationId xmlns:a16="http://schemas.microsoft.com/office/drawing/2014/main" id="{52B51C6C-C49D-314C-5D4E-9A444FDE9555}"/>
+              </a:ext>
+            </a:extLst>
+          </p:cNvPr>
+          <p:cNvSpPr/>
+          <p:nvPr/>
+        </p:nvSpPr>
+        <p:spPr>
+          <a:xfrm>
+            <a:off x="8046720" y="2240280"/>
+            <a:ext cx="1005840" cy="822960"/>
+          </a:xfrm>
+          <a:prstGeom prst="rect">
+            <a:avLst/>
+          </a:prstGeom>
+          <a:noFill/>
+          <a:ln/>
+        </p:spPr>
+        <p:txBody>
+          <a:bodyPr wrap="square" lIns="0" tIns="0" rIns="0" bIns="0" rtlCol="0" anchor="ctr"/>
+          <a:lstStyle/>
+          <a:p>
+            <a:pPr marL="0" indent="0" algn="ctr">
+              <a:buNone/>
+            </a:pPr>
+            <a:r>
+              <a:rPr lang="en-US" sz="2400" dirty="0">
+                <a:solidFill>
+                  <a:srgbClr val="000000"/>
+                </a:solidFill>
+              </a:rPr>
+              <a:t>🤖</a:t>
+            </a:r>
+            <a:endParaRPr lang="en-US" sz="2400" dirty="0"/>
+          </a:p>
+        </p:txBody>
+      </p:sp>
+      <p:pic>
+        <p:nvPicPr>
+          <p:cNvPr id="22" name="Graphic 21" descr="QR preview">
+            <a:extLst>
+              <a:ext uri="{FF2B5EF4-FFF2-40B4-BE49-F238E27FC236}">
+                <a16:creationId xmlns:a16="http://schemas.microsoft.com/office/drawing/2014/main" id="{5CEFFCD7-37A0-0472-73E0-F5A9F769D4E5}"/>
+              </a:ext>
+            </a:extLst>
+          </p:cNvPr>
+          <p:cNvPicPr>
+            <a:picLocks noChangeAspect="1"/>
+          </p:cNvPicPr>
+          <p:nvPr/>
+        </p:nvPicPr>
+        <p:blipFill>
+          <a:blip>
+            <a:extLst>
+              <a:ext uri="{96DAC541-7B7A-43D3-8B79-37D633B846F1}">
+                <asvg:svgBlip xmlns:asvg="http://schemas.microsoft.com/office/drawing/2016/SVG/main" r:embed="rId3"/>
+              </a:ext>
+            </a:extLst>
+          </a:blip>
+          <a:stretch>
+            <a:fillRect/>
+          </a:stretch>
+        </p:blipFill>
+        <p:spPr>
+          <a:xfrm>
+            <a:off x="326693" y="2495550"/>
+            <a:ext cx="1775062" cy="1775062"/>
+          </a:xfrm>
+          <a:prstGeom prst="rect">
+            <a:avLst/>
+          </a:prstGeom>
+        </p:spPr>
+      </p:pic>
+    </p:spTree>
+    <p:extLst>
+      <p:ext uri="{BB962C8B-B14F-4D97-AF65-F5344CB8AC3E}">
+        <p14:creationId xmlns:p14="http://schemas.microsoft.com/office/powerpoint/2010/main" val="658019367"/>
+      </p:ext>
+    </p:extLst>
+  </p:cSld>
+  <p:clrMapOvr>
+    <a:masterClrMapping/>
+  </p:clrMapOvr>
+</p:sld>
+</file>
+
+<file path=ppt/slides/slide3.xml><?xml version="1.0" encoding="utf-8"?>
 <p:sld xmlns:a="http://schemas.openxmlformats.org/drawingml/2006/main" xmlns:r="http://schemas.openxmlformats.org/officeDocument/2006/relationships" xmlns:p="http://schemas.openxmlformats.org/presentationml/2006/main">
   <p:cSld name="Slide 2">
     <p:bg>
@@ -3963,7 +5689,7 @@
 </p:sld>
 </file>
 
-<file path=ppt/slides/slide3.xml><?xml version="1.0" encoding="utf-8"?>
+<file path=ppt/slides/slide4.xml><?xml version="1.0" encoding="utf-8"?>
 <p:sld xmlns:a="http://schemas.openxmlformats.org/drawingml/2006/main" xmlns:r="http://schemas.openxmlformats.org/officeDocument/2006/relationships" xmlns:p="http://schemas.openxmlformats.org/presentationml/2006/main">
   <p:cSld name="Slide 3">
     <p:bg>
@@ -4773,7 +6499,7 @@
                   <a:srgbClr val="94A3B8"/>
                 </a:solidFill>
               </a:rPr>
-              <a:t>Memory, Observability (X-Ray), RAG Evaluation &amp; Gateway MCP tool</a:t>
+              <a:t>Memory, Observability, RAG Evaluation &amp; Gateway MCP tool</a:t>
             </a:r>
             <a:endParaRPr lang="en-US" sz="1000" dirty="0"/>
           </a:p>
@@ -4787,7 +6513,7 @@
 </p:sld>
 </file>
 
-<file path=ppt/slides/slide4.xml><?xml version="1.0" encoding="utf-8"?>
+<file path=ppt/slides/slide5.xml><?xml version="1.0" encoding="utf-8"?>
 <p:sld xmlns:a="http://schemas.openxmlformats.org/drawingml/2006/main" xmlns:r="http://schemas.openxmlformats.org/officeDocument/2006/relationships" xmlns:p="http://schemas.openxmlformats.org/presentationml/2006/main">
   <p:cSld name="Slide 4">
     <p:bg>
@@ -6063,7 +7789,7 @@
 </p:sld>
 </file>
 
-<file path=ppt/slides/slide5.xml><?xml version="1.0" encoding="utf-8"?>
+<file path=ppt/slides/slide6.xml><?xml version="1.0" encoding="utf-8"?>
 <p:sld xmlns:a="http://schemas.openxmlformats.org/drawingml/2006/main" xmlns:r="http://schemas.openxmlformats.org/officeDocument/2006/relationships" xmlns:p="http://schemas.openxmlformats.org/presentationml/2006/main">
   <p:cSld name="Slide 5">
     <p:bg>
@@ -6351,7 +8077,7 @@
 </p:sld>
 </file>
 
-<file path=ppt/slides/slide6.xml><?xml version="1.0" encoding="utf-8"?>
+<file path=ppt/slides/slide7.xml><?xml version="1.0" encoding="utf-8"?>
 <p:sld xmlns:a="http://schemas.openxmlformats.org/drawingml/2006/main" xmlns:r="http://schemas.openxmlformats.org/officeDocument/2006/relationships" xmlns:p="http://schemas.openxmlformats.org/presentationml/2006/main">
   <p:cSld name="Slide 6">
     <p:bg>
@@ -7209,7 +8935,7 @@
 </p:sld>
 </file>
 
-<file path=ppt/slides/slide7.xml><?xml version="1.0" encoding="utf-8"?>
+<file path=ppt/slides/slide8.xml><?xml version="1.0" encoding="utf-8"?>
 <p:sld xmlns:a="http://schemas.openxmlformats.org/drawingml/2006/main" xmlns:r="http://schemas.openxmlformats.org/officeDocument/2006/relationships" xmlns:p="http://schemas.openxmlformats.org/presentationml/2006/main">
   <p:cSld name="Slide 7">
     <p:bg>
@@ -7993,7 +9719,7 @@
 </p:sld>
 </file>
 
-<file path=ppt/slides/slide8.xml><?xml version="1.0" encoding="utf-8"?>
+<file path=ppt/slides/slide9.xml><?xml version="1.0" encoding="utf-8"?>
 <p:sld xmlns:a="http://schemas.openxmlformats.org/drawingml/2006/main" xmlns:r="http://schemas.openxmlformats.org/officeDocument/2006/relationships" xmlns:p="http://schemas.openxmlformats.org/presentationml/2006/main">
   <p:cSld name="Slide 8">
     <p:bg>
@@ -8768,942 +10494,6 @@
                 </a:solidFill>
               </a:rPr>
               <a:t>Expose the KB as an MCP tool via AgentCore Gateway. Any agent, any framework can discover and call it with Cedar policy controls.</a:t>
-            </a:r>
-            <a:endParaRPr lang="en-US" sz="1100" dirty="0"/>
-          </a:p>
-        </p:txBody>
-      </p:sp>
-    </p:spTree>
-  </p:cSld>
-  <p:clrMapOvr>
-    <a:masterClrMapping/>
-  </p:clrMapOvr>
-</p:sld>
-</file>
-
-<file path=ppt/slides/slide9.xml><?xml version="1.0" encoding="utf-8"?>
-<p:sld xmlns:a="http://schemas.openxmlformats.org/drawingml/2006/main" xmlns:r="http://schemas.openxmlformats.org/officeDocument/2006/relationships" xmlns:p="http://schemas.openxmlformats.org/presentationml/2006/main">
-  <p:cSld name="Slide 9">
-    <p:bg>
-      <p:bgPr>
-        <a:solidFill>
-          <a:srgbClr val="0A1628"/>
-        </a:solidFill>
-        <a:effectLst/>
-      </p:bgPr>
-    </p:bg>
-    <p:spTree>
-      <p:nvGrpSpPr>
-        <p:cNvPr id="1" name=""/>
-        <p:cNvGrpSpPr/>
-        <p:nvPr/>
-      </p:nvGrpSpPr>
-      <p:grpSpPr>
-        <a:xfrm>
-          <a:off x="0" y="0"/>
-          <a:ext cx="0" cy="0"/>
-          <a:chOff x="0" y="0"/>
-          <a:chExt cx="0" cy="0"/>
-        </a:xfrm>
-      </p:grpSpPr>
-      <p:sp>
-        <p:nvSpPr>
-          <p:cNvPr id="2" name="Shape 0"/>
-          <p:cNvSpPr/>
-          <p:nvPr/>
-        </p:nvSpPr>
-        <p:spPr>
-          <a:xfrm>
-            <a:off x="0" y="0"/>
-            <a:ext cx="9144000" cy="640080"/>
-          </a:xfrm>
-          <a:prstGeom prst="rect">
-            <a:avLst/>
-          </a:prstGeom>
-          <a:solidFill>
-            <a:srgbClr val="0E3A5C"/>
-          </a:solidFill>
-          <a:ln/>
-        </p:spPr>
-        <p:txBody>
-          <a:bodyPr/>
-          <a:lstStyle/>
-          <a:p>
-            <a:endParaRPr lang="en-US"/>
-          </a:p>
-        </p:txBody>
-      </p:sp>
-      <p:sp>
-        <p:nvSpPr>
-          <p:cNvPr id="3" name="Text 1"/>
-          <p:cNvSpPr/>
-          <p:nvPr/>
-        </p:nvSpPr>
-        <p:spPr>
-          <a:xfrm>
-            <a:off x="274320" y="137160"/>
-            <a:ext cx="8595360" cy="402336"/>
-          </a:xfrm>
-          <a:prstGeom prst="rect">
-            <a:avLst/>
-          </a:prstGeom>
-          <a:noFill/>
-          <a:ln/>
-        </p:spPr>
-        <p:txBody>
-          <a:bodyPr wrap="square" lIns="0" tIns="0" rIns="0" bIns="0" rtlCol="0" anchor="ctr"/>
-          <a:lstStyle/>
-          <a:p>
-            <a:pPr marL="0" indent="0">
-              <a:buNone/>
-            </a:pPr>
-            <a:r>
-              <a:rPr lang="en-US" sz="1400" b="1" kern="0" spc="300" dirty="0">
-                <a:solidFill>
-                  <a:srgbClr val="38BDF8"/>
-                </a:solidFill>
-              </a:rPr>
-              <a:t>AWS SERVICES USED IN THIS WORKSHOP</a:t>
-            </a:r>
-            <a:endParaRPr lang="en-US" sz="1400" dirty="0"/>
-          </a:p>
-        </p:txBody>
-      </p:sp>
-      <p:sp>
-        <p:nvSpPr>
-          <p:cNvPr id="4" name="Shape 2"/>
-          <p:cNvSpPr/>
-          <p:nvPr/>
-        </p:nvSpPr>
-        <p:spPr>
-          <a:xfrm>
-            <a:off x="228600" y="822960"/>
-            <a:ext cx="4251960" cy="1261872"/>
-          </a:xfrm>
-          <a:prstGeom prst="rect">
-            <a:avLst/>
-          </a:prstGeom>
-          <a:solidFill>
-            <a:srgbClr val="1A5276"/>
-          </a:solidFill>
-          <a:ln w="9525">
-            <a:solidFill>
-              <a:srgbClr val="0891B2"/>
-            </a:solidFill>
-            <a:prstDash val="solid"/>
-          </a:ln>
-        </p:spPr>
-        <p:txBody>
-          <a:bodyPr/>
-          <a:lstStyle/>
-          <a:p>
-            <a:endParaRPr lang="en-US"/>
-          </a:p>
-        </p:txBody>
-      </p:sp>
-      <p:sp>
-        <p:nvSpPr>
-          <p:cNvPr id="5" name="Text 3"/>
-          <p:cNvSpPr/>
-          <p:nvPr/>
-        </p:nvSpPr>
-        <p:spPr>
-          <a:xfrm>
-            <a:off x="320040" y="960120"/>
-            <a:ext cx="777240" cy="777240"/>
-          </a:xfrm>
-          <a:prstGeom prst="rect">
-            <a:avLst/>
-          </a:prstGeom>
-          <a:noFill/>
-          <a:ln/>
-        </p:spPr>
-        <p:txBody>
-          <a:bodyPr wrap="square" lIns="0" tIns="0" rIns="0" bIns="0" rtlCol="0" anchor="ctr"/>
-          <a:lstStyle/>
-          <a:p>
-            <a:pPr marL="0" indent="0">
-              <a:buNone/>
-            </a:pPr>
-            <a:r>
-              <a:rPr lang="en-US" sz="3000" dirty="0">
-                <a:solidFill>
-                  <a:srgbClr val="000000"/>
-                </a:solidFill>
-              </a:rPr>
-              <a:t>🧠</a:t>
-            </a:r>
-            <a:endParaRPr lang="en-US" sz="3000" dirty="0"/>
-          </a:p>
-        </p:txBody>
-      </p:sp>
-      <p:sp>
-        <p:nvSpPr>
-          <p:cNvPr id="6" name="Text 4"/>
-          <p:cNvSpPr/>
-          <p:nvPr/>
-        </p:nvSpPr>
-        <p:spPr>
-          <a:xfrm>
-            <a:off x="1143000" y="932688"/>
-            <a:ext cx="3246120" cy="347472"/>
-          </a:xfrm>
-          <a:prstGeom prst="rect">
-            <a:avLst/>
-          </a:prstGeom>
-          <a:noFill/>
-          <a:ln/>
-        </p:spPr>
-        <p:txBody>
-          <a:bodyPr wrap="square" lIns="0" tIns="0" rIns="0" bIns="0" rtlCol="0" anchor="ctr"/>
-          <a:lstStyle/>
-          <a:p>
-            <a:pPr marL="0" indent="0">
-              <a:buNone/>
-            </a:pPr>
-            <a:r>
-              <a:rPr lang="en-US" sz="1400" b="1" dirty="0">
-                <a:solidFill>
-                  <a:srgbClr val="FFFFFF"/>
-                </a:solidFill>
-              </a:rPr>
-              <a:t>Amazon Bedrock</a:t>
-            </a:r>
-            <a:endParaRPr lang="en-US" sz="1400" dirty="0"/>
-          </a:p>
-        </p:txBody>
-      </p:sp>
-      <p:sp>
-        <p:nvSpPr>
-          <p:cNvPr id="7" name="Text 5"/>
-          <p:cNvSpPr/>
-          <p:nvPr/>
-        </p:nvSpPr>
-        <p:spPr>
-          <a:xfrm>
-            <a:off x="1143000" y="1280160"/>
-            <a:ext cx="3246120" cy="685800"/>
-          </a:xfrm>
-          <a:prstGeom prst="rect">
-            <a:avLst/>
-          </a:prstGeom>
-          <a:noFill/>
-          <a:ln/>
-        </p:spPr>
-        <p:txBody>
-          <a:bodyPr wrap="square" lIns="0" tIns="0" rIns="0" bIns="0" rtlCol="0" anchor="ctr"/>
-          <a:lstStyle/>
-          <a:p>
-            <a:pPr marL="0" indent="0">
-              <a:buNone/>
-            </a:pPr>
-            <a:r>
-              <a:rPr lang="en-US" sz="1100" dirty="0">
-                <a:solidFill>
-                  <a:srgbClr val="E2E8F0"/>
-                </a:solidFill>
-              </a:rPr>
-              <a:t>Foundation models, Knowledge Bases, AgentCore Runtime &amp; Memory, Gateway</a:t>
-            </a:r>
-            <a:endParaRPr lang="en-US" sz="1100" dirty="0"/>
-          </a:p>
-        </p:txBody>
-      </p:sp>
-      <p:sp>
-        <p:nvSpPr>
-          <p:cNvPr id="8" name="Shape 6"/>
-          <p:cNvSpPr/>
-          <p:nvPr/>
-        </p:nvSpPr>
-        <p:spPr>
-          <a:xfrm>
-            <a:off x="4709160" y="822960"/>
-            <a:ext cx="4251960" cy="1261872"/>
-          </a:xfrm>
-          <a:prstGeom prst="rect">
-            <a:avLst/>
-          </a:prstGeom>
-          <a:solidFill>
-            <a:srgbClr val="0E7490"/>
-          </a:solidFill>
-          <a:ln w="9525">
-            <a:solidFill>
-              <a:srgbClr val="0891B2"/>
-            </a:solidFill>
-            <a:prstDash val="solid"/>
-          </a:ln>
-        </p:spPr>
-        <p:txBody>
-          <a:bodyPr/>
-          <a:lstStyle/>
-          <a:p>
-            <a:endParaRPr lang="en-US"/>
-          </a:p>
-        </p:txBody>
-      </p:sp>
-      <p:sp>
-        <p:nvSpPr>
-          <p:cNvPr id="9" name="Text 7"/>
-          <p:cNvSpPr/>
-          <p:nvPr/>
-        </p:nvSpPr>
-        <p:spPr>
-          <a:xfrm>
-            <a:off x="4800600" y="960120"/>
-            <a:ext cx="777240" cy="777240"/>
-          </a:xfrm>
-          <a:prstGeom prst="rect">
-            <a:avLst/>
-          </a:prstGeom>
-          <a:noFill/>
-          <a:ln/>
-        </p:spPr>
-        <p:txBody>
-          <a:bodyPr wrap="square" lIns="0" tIns="0" rIns="0" bIns="0" rtlCol="0" anchor="ctr"/>
-          <a:lstStyle/>
-          <a:p>
-            <a:pPr marL="0" indent="0">
-              <a:buNone/>
-            </a:pPr>
-            <a:r>
-              <a:rPr lang="en-US" sz="3000" dirty="0">
-                <a:solidFill>
-                  <a:srgbClr val="000000"/>
-                </a:solidFill>
-              </a:rPr>
-              <a:t>🔍</a:t>
-            </a:r>
-            <a:endParaRPr lang="en-US" sz="3000" dirty="0"/>
-          </a:p>
-        </p:txBody>
-      </p:sp>
-      <p:sp>
-        <p:nvSpPr>
-          <p:cNvPr id="10" name="Text 8"/>
-          <p:cNvSpPr/>
-          <p:nvPr/>
-        </p:nvSpPr>
-        <p:spPr>
-          <a:xfrm>
-            <a:off x="5623560" y="932688"/>
-            <a:ext cx="3246120" cy="347472"/>
-          </a:xfrm>
-          <a:prstGeom prst="rect">
-            <a:avLst/>
-          </a:prstGeom>
-          <a:noFill/>
-          <a:ln/>
-        </p:spPr>
-        <p:txBody>
-          <a:bodyPr wrap="square" lIns="0" tIns="0" rIns="0" bIns="0" rtlCol="0" anchor="ctr"/>
-          <a:lstStyle/>
-          <a:p>
-            <a:pPr marL="0" indent="0">
-              <a:buNone/>
-            </a:pPr>
-            <a:r>
-              <a:rPr lang="en-US" sz="1400" b="1" dirty="0">
-                <a:solidFill>
-                  <a:srgbClr val="FFFFFF"/>
-                </a:solidFill>
-              </a:rPr>
-              <a:t>OpenSearch Serverless</a:t>
-            </a:r>
-            <a:endParaRPr lang="en-US" sz="1400" dirty="0"/>
-          </a:p>
-        </p:txBody>
-      </p:sp>
-      <p:sp>
-        <p:nvSpPr>
-          <p:cNvPr id="11" name="Text 9"/>
-          <p:cNvSpPr/>
-          <p:nvPr/>
-        </p:nvSpPr>
-        <p:spPr>
-          <a:xfrm>
-            <a:off x="5623560" y="1280160"/>
-            <a:ext cx="3246120" cy="685800"/>
-          </a:xfrm>
-          <a:prstGeom prst="rect">
-            <a:avLst/>
-          </a:prstGeom>
-          <a:noFill/>
-          <a:ln/>
-        </p:spPr>
-        <p:txBody>
-          <a:bodyPr wrap="square" lIns="0" tIns="0" rIns="0" bIns="0" rtlCol="0" anchor="ctr"/>
-          <a:lstStyle/>
-          <a:p>
-            <a:pPr marL="0" indent="0">
-              <a:buNone/>
-            </a:pPr>
-            <a:r>
-              <a:rPr lang="en-US" sz="1100" dirty="0">
-                <a:solidFill>
-                  <a:srgbClr val="E2E8F0"/>
-                </a:solidFill>
-              </a:rPr>
-              <a:t>Managed vector index with HNSW — powers hybrid search in Stage 2</a:t>
-            </a:r>
-            <a:endParaRPr lang="en-US" sz="1100" dirty="0"/>
-          </a:p>
-        </p:txBody>
-      </p:sp>
-      <p:sp>
-        <p:nvSpPr>
-          <p:cNvPr id="12" name="Shape 10"/>
-          <p:cNvSpPr/>
-          <p:nvPr/>
-        </p:nvSpPr>
-        <p:spPr>
-          <a:xfrm>
-            <a:off x="228600" y="2240280"/>
-            <a:ext cx="4251960" cy="1261872"/>
-          </a:xfrm>
-          <a:prstGeom prst="rect">
-            <a:avLst/>
-          </a:prstGeom>
-          <a:solidFill>
-            <a:srgbClr val="1E4D78"/>
-          </a:solidFill>
-          <a:ln w="9525">
-            <a:solidFill>
-              <a:srgbClr val="0891B2"/>
-            </a:solidFill>
-            <a:prstDash val="solid"/>
-          </a:ln>
-        </p:spPr>
-        <p:txBody>
-          <a:bodyPr/>
-          <a:lstStyle/>
-          <a:p>
-            <a:endParaRPr lang="en-US"/>
-          </a:p>
-        </p:txBody>
-      </p:sp>
-      <p:sp>
-        <p:nvSpPr>
-          <p:cNvPr id="13" name="Text 11"/>
-          <p:cNvSpPr/>
-          <p:nvPr/>
-        </p:nvSpPr>
-        <p:spPr>
-          <a:xfrm>
-            <a:off x="320040" y="2377440"/>
-            <a:ext cx="777240" cy="777240"/>
-          </a:xfrm>
-          <a:prstGeom prst="rect">
-            <a:avLst/>
-          </a:prstGeom>
-          <a:noFill/>
-          <a:ln/>
-        </p:spPr>
-        <p:txBody>
-          <a:bodyPr wrap="square" lIns="0" tIns="0" rIns="0" bIns="0" rtlCol="0" anchor="ctr"/>
-          <a:lstStyle/>
-          <a:p>
-            <a:pPr marL="0" indent="0">
-              <a:buNone/>
-            </a:pPr>
-            <a:r>
-              <a:rPr lang="en-US" sz="3000" dirty="0">
-                <a:solidFill>
-                  <a:srgbClr val="000000"/>
-                </a:solidFill>
-              </a:rPr>
-              <a:t>🪣</a:t>
-            </a:r>
-            <a:endParaRPr lang="en-US" sz="3000" dirty="0"/>
-          </a:p>
-        </p:txBody>
-      </p:sp>
-      <p:sp>
-        <p:nvSpPr>
-          <p:cNvPr id="14" name="Text 12"/>
-          <p:cNvSpPr/>
-          <p:nvPr/>
-        </p:nvSpPr>
-        <p:spPr>
-          <a:xfrm>
-            <a:off x="1143000" y="2350008"/>
-            <a:ext cx="3246120" cy="347472"/>
-          </a:xfrm>
-          <a:prstGeom prst="rect">
-            <a:avLst/>
-          </a:prstGeom>
-          <a:noFill/>
-          <a:ln/>
-        </p:spPr>
-        <p:txBody>
-          <a:bodyPr wrap="square" lIns="0" tIns="0" rIns="0" bIns="0" rtlCol="0" anchor="ctr"/>
-          <a:lstStyle/>
-          <a:p>
-            <a:pPr marL="0" indent="0">
-              <a:buNone/>
-            </a:pPr>
-            <a:r>
-              <a:rPr lang="en-US" sz="1400" b="1" dirty="0">
-                <a:solidFill>
-                  <a:srgbClr val="FFFFFF"/>
-                </a:solidFill>
-              </a:rPr>
-              <a:t>Amazon S3</a:t>
-            </a:r>
-            <a:endParaRPr lang="en-US" sz="1400" dirty="0"/>
-          </a:p>
-        </p:txBody>
-      </p:sp>
-      <p:sp>
-        <p:nvSpPr>
-          <p:cNvPr id="15" name="Text 13"/>
-          <p:cNvSpPr/>
-          <p:nvPr/>
-        </p:nvSpPr>
-        <p:spPr>
-          <a:xfrm>
-            <a:off x="1143000" y="2697480"/>
-            <a:ext cx="3246120" cy="685800"/>
-          </a:xfrm>
-          <a:prstGeom prst="rect">
-            <a:avLst/>
-          </a:prstGeom>
-          <a:noFill/>
-          <a:ln/>
-        </p:spPr>
-        <p:txBody>
-          <a:bodyPr wrap="square" lIns="0" tIns="0" rIns="0" bIns="0" rtlCol="0" anchor="ctr"/>
-          <a:lstStyle/>
-          <a:p>
-            <a:pPr marL="0" indent="0">
-              <a:buNone/>
-            </a:pPr>
-            <a:r>
-              <a:rPr lang="en-US" sz="1100" dirty="0">
-                <a:solidFill>
-                  <a:srgbClr val="E2E8F0"/>
-                </a:solidFill>
-              </a:rPr>
-              <a:t>Document data source for Bedrock Knowledge Base ingestion pipeline</a:t>
-            </a:r>
-            <a:endParaRPr lang="en-US" sz="1100" dirty="0"/>
-          </a:p>
-        </p:txBody>
-      </p:sp>
-      <p:sp>
-        <p:nvSpPr>
-          <p:cNvPr id="16" name="Shape 14"/>
-          <p:cNvSpPr/>
-          <p:nvPr/>
-        </p:nvSpPr>
-        <p:spPr>
-          <a:xfrm>
-            <a:off x="4709160" y="2240280"/>
-            <a:ext cx="4251960" cy="1261872"/>
-          </a:xfrm>
-          <a:prstGeom prst="rect">
-            <a:avLst/>
-          </a:prstGeom>
-          <a:solidFill>
-            <a:srgbClr val="166534"/>
-          </a:solidFill>
-          <a:ln w="9525">
-            <a:solidFill>
-              <a:srgbClr val="0891B2"/>
-            </a:solidFill>
-            <a:prstDash val="solid"/>
-          </a:ln>
-        </p:spPr>
-        <p:txBody>
-          <a:bodyPr/>
-          <a:lstStyle/>
-          <a:p>
-            <a:endParaRPr lang="en-US"/>
-          </a:p>
-        </p:txBody>
-      </p:sp>
-      <p:sp>
-        <p:nvSpPr>
-          <p:cNvPr id="17" name="Text 15"/>
-          <p:cNvSpPr/>
-          <p:nvPr/>
-        </p:nvSpPr>
-        <p:spPr>
-          <a:xfrm>
-            <a:off x="4800600" y="2377440"/>
-            <a:ext cx="777240" cy="777240"/>
-          </a:xfrm>
-          <a:prstGeom prst="rect">
-            <a:avLst/>
-          </a:prstGeom>
-          <a:noFill/>
-          <a:ln/>
-        </p:spPr>
-        <p:txBody>
-          <a:bodyPr wrap="square" lIns="0" tIns="0" rIns="0" bIns="0" rtlCol="0" anchor="ctr"/>
-          <a:lstStyle/>
-          <a:p>
-            <a:pPr marL="0" indent="0">
-              <a:buNone/>
-            </a:pPr>
-            <a:r>
-              <a:rPr lang="en-US" sz="3000" dirty="0">
-                <a:solidFill>
-                  <a:srgbClr val="000000"/>
-                </a:solidFill>
-              </a:rPr>
-              <a:t>📦</a:t>
-            </a:r>
-            <a:endParaRPr lang="en-US" sz="3000" dirty="0"/>
-          </a:p>
-        </p:txBody>
-      </p:sp>
-      <p:sp>
-        <p:nvSpPr>
-          <p:cNvPr id="18" name="Text 16"/>
-          <p:cNvSpPr/>
-          <p:nvPr/>
-        </p:nvSpPr>
-        <p:spPr>
-          <a:xfrm>
-            <a:off x="5623560" y="2350008"/>
-            <a:ext cx="3246120" cy="347472"/>
-          </a:xfrm>
-          <a:prstGeom prst="rect">
-            <a:avLst/>
-          </a:prstGeom>
-          <a:noFill/>
-          <a:ln/>
-        </p:spPr>
-        <p:txBody>
-          <a:bodyPr wrap="square" lIns="0" tIns="0" rIns="0" bIns="0" rtlCol="0" anchor="ctr"/>
-          <a:lstStyle/>
-          <a:p>
-            <a:pPr marL="0" indent="0">
-              <a:buNone/>
-            </a:pPr>
-            <a:r>
-              <a:rPr lang="en-US" sz="1400" b="1" dirty="0">
-                <a:solidFill>
-                  <a:srgbClr val="FFFFFF"/>
-                </a:solidFill>
-              </a:rPr>
-              <a:t>Amazon ECR</a:t>
-            </a:r>
-            <a:endParaRPr lang="en-US" sz="1400" dirty="0"/>
-          </a:p>
-        </p:txBody>
-      </p:sp>
-      <p:sp>
-        <p:nvSpPr>
-          <p:cNvPr id="19" name="Text 17"/>
-          <p:cNvSpPr/>
-          <p:nvPr/>
-        </p:nvSpPr>
-        <p:spPr>
-          <a:xfrm>
-            <a:off x="5623560" y="2697480"/>
-            <a:ext cx="3246120" cy="685800"/>
-          </a:xfrm>
-          <a:prstGeom prst="rect">
-            <a:avLst/>
-          </a:prstGeom>
-          <a:noFill/>
-          <a:ln/>
-        </p:spPr>
-        <p:txBody>
-          <a:bodyPr wrap="square" lIns="0" tIns="0" rIns="0" bIns="0" rtlCol="0" anchor="ctr"/>
-          <a:lstStyle/>
-          <a:p>
-            <a:pPr marL="0" indent="0">
-              <a:buNone/>
-            </a:pPr>
-            <a:r>
-              <a:rPr lang="en-US" sz="1100" dirty="0">
-                <a:solidFill>
-                  <a:srgbClr val="E2E8F0"/>
-                </a:solidFill>
-              </a:rPr>
-              <a:t>Container registry for Strands agent Docker images in Stage 3</a:t>
-            </a:r>
-            <a:endParaRPr lang="en-US" sz="1100" dirty="0"/>
-          </a:p>
-        </p:txBody>
-      </p:sp>
-      <p:sp>
-        <p:nvSpPr>
-          <p:cNvPr id="20" name="Shape 18"/>
-          <p:cNvSpPr/>
-          <p:nvPr/>
-        </p:nvSpPr>
-        <p:spPr>
-          <a:xfrm>
-            <a:off x="228600" y="3657600"/>
-            <a:ext cx="4251960" cy="1261872"/>
-          </a:xfrm>
-          <a:prstGeom prst="rect">
-            <a:avLst/>
-          </a:prstGeom>
-          <a:solidFill>
-            <a:srgbClr val="5B21B6"/>
-          </a:solidFill>
-          <a:ln w="9525">
-            <a:solidFill>
-              <a:srgbClr val="0891B2"/>
-            </a:solidFill>
-            <a:prstDash val="solid"/>
-          </a:ln>
-        </p:spPr>
-        <p:txBody>
-          <a:bodyPr/>
-          <a:lstStyle/>
-          <a:p>
-            <a:endParaRPr lang="en-US"/>
-          </a:p>
-        </p:txBody>
-      </p:sp>
-      <p:sp>
-        <p:nvSpPr>
-          <p:cNvPr id="21" name="Text 19"/>
-          <p:cNvSpPr/>
-          <p:nvPr/>
-        </p:nvSpPr>
-        <p:spPr>
-          <a:xfrm>
-            <a:off x="320040" y="3794760"/>
-            <a:ext cx="777240" cy="777240"/>
-          </a:xfrm>
-          <a:prstGeom prst="rect">
-            <a:avLst/>
-          </a:prstGeom>
-          <a:noFill/>
-          <a:ln/>
-        </p:spPr>
-        <p:txBody>
-          <a:bodyPr wrap="square" lIns="0" tIns="0" rIns="0" bIns="0" rtlCol="0" anchor="ctr"/>
-          <a:lstStyle/>
-          <a:p>
-            <a:pPr marL="0" indent="0">
-              <a:buNone/>
-            </a:pPr>
-            <a:r>
-              <a:rPr lang="en-US" sz="3000" dirty="0">
-                <a:solidFill>
-                  <a:srgbClr val="000000"/>
-                </a:solidFill>
-              </a:rPr>
-              <a:t>🔐</a:t>
-            </a:r>
-            <a:endParaRPr lang="en-US" sz="3000" dirty="0"/>
-          </a:p>
-        </p:txBody>
-      </p:sp>
-      <p:sp>
-        <p:nvSpPr>
-          <p:cNvPr id="22" name="Text 20"/>
-          <p:cNvSpPr/>
-          <p:nvPr/>
-        </p:nvSpPr>
-        <p:spPr>
-          <a:xfrm>
-            <a:off x="1143000" y="3767328"/>
-            <a:ext cx="3246120" cy="347472"/>
-          </a:xfrm>
-          <a:prstGeom prst="rect">
-            <a:avLst/>
-          </a:prstGeom>
-          <a:noFill/>
-          <a:ln/>
-        </p:spPr>
-        <p:txBody>
-          <a:bodyPr wrap="square" lIns="0" tIns="0" rIns="0" bIns="0" rtlCol="0" anchor="ctr"/>
-          <a:lstStyle/>
-          <a:p>
-            <a:pPr marL="0" indent="0">
-              <a:buNone/>
-            </a:pPr>
-            <a:r>
-              <a:rPr lang="en-US" sz="1400" b="1" dirty="0">
-                <a:solidFill>
-                  <a:srgbClr val="FFFFFF"/>
-                </a:solidFill>
-              </a:rPr>
-              <a:t>AWS IAM</a:t>
-            </a:r>
-            <a:endParaRPr lang="en-US" sz="1400" dirty="0"/>
-          </a:p>
-        </p:txBody>
-      </p:sp>
-      <p:sp>
-        <p:nvSpPr>
-          <p:cNvPr id="23" name="Text 21"/>
-          <p:cNvSpPr/>
-          <p:nvPr/>
-        </p:nvSpPr>
-        <p:spPr>
-          <a:xfrm>
-            <a:off x="1143000" y="4114800"/>
-            <a:ext cx="3246120" cy="685800"/>
-          </a:xfrm>
-          <a:prstGeom prst="rect">
-            <a:avLst/>
-          </a:prstGeom>
-          <a:noFill/>
-          <a:ln/>
-        </p:spPr>
-        <p:txBody>
-          <a:bodyPr wrap="square" lIns="0" tIns="0" rIns="0" bIns="0" rtlCol="0" anchor="ctr"/>
-          <a:lstStyle/>
-          <a:p>
-            <a:pPr marL="0" indent="0">
-              <a:buNone/>
-            </a:pPr>
-            <a:r>
-              <a:rPr lang="en-US" sz="1100" dirty="0">
-                <a:solidFill>
-                  <a:srgbClr val="E2E8F0"/>
-                </a:solidFill>
-              </a:rPr>
-              <a:t>Least-privilege execution roles for Bedrock, ECR, CloudWatch access</a:t>
-            </a:r>
-            <a:endParaRPr lang="en-US" sz="1100" dirty="0"/>
-          </a:p>
-        </p:txBody>
-      </p:sp>
-      <p:sp>
-        <p:nvSpPr>
-          <p:cNvPr id="24" name="Shape 22"/>
-          <p:cNvSpPr/>
-          <p:nvPr/>
-        </p:nvSpPr>
-        <p:spPr>
-          <a:xfrm>
-            <a:off x="4709160" y="3657600"/>
-            <a:ext cx="4251960" cy="1261872"/>
-          </a:xfrm>
-          <a:prstGeom prst="rect">
-            <a:avLst/>
-          </a:prstGeom>
-          <a:solidFill>
-            <a:srgbClr val="7C3AED"/>
-          </a:solidFill>
-          <a:ln w="9525">
-            <a:solidFill>
-              <a:srgbClr val="0891B2"/>
-            </a:solidFill>
-            <a:prstDash val="solid"/>
-          </a:ln>
-        </p:spPr>
-        <p:txBody>
-          <a:bodyPr/>
-          <a:lstStyle/>
-          <a:p>
-            <a:endParaRPr lang="en-US"/>
-          </a:p>
-        </p:txBody>
-      </p:sp>
-      <p:sp>
-        <p:nvSpPr>
-          <p:cNvPr id="25" name="Text 23"/>
-          <p:cNvSpPr/>
-          <p:nvPr/>
-        </p:nvSpPr>
-        <p:spPr>
-          <a:xfrm>
-            <a:off x="4800600" y="3794760"/>
-            <a:ext cx="777240" cy="777240"/>
-          </a:xfrm>
-          <a:prstGeom prst="rect">
-            <a:avLst/>
-          </a:prstGeom>
-          <a:noFill/>
-          <a:ln/>
-        </p:spPr>
-        <p:txBody>
-          <a:bodyPr wrap="square" lIns="0" tIns="0" rIns="0" bIns="0" rtlCol="0" anchor="ctr"/>
-          <a:lstStyle/>
-          <a:p>
-            <a:pPr marL="0" indent="0">
-              <a:buNone/>
-            </a:pPr>
-            <a:r>
-              <a:rPr lang="en-US" sz="3000" dirty="0">
-                <a:solidFill>
-                  <a:srgbClr val="000000"/>
-                </a:solidFill>
-              </a:rPr>
-              <a:t>📊</a:t>
-            </a:r>
-            <a:endParaRPr lang="en-US" sz="3000" dirty="0"/>
-          </a:p>
-        </p:txBody>
-      </p:sp>
-      <p:sp>
-        <p:nvSpPr>
-          <p:cNvPr id="26" name="Text 24"/>
-          <p:cNvSpPr/>
-          <p:nvPr/>
-        </p:nvSpPr>
-        <p:spPr>
-          <a:xfrm>
-            <a:off x="5623560" y="3767328"/>
-            <a:ext cx="3246120" cy="347472"/>
-          </a:xfrm>
-          <a:prstGeom prst="rect">
-            <a:avLst/>
-          </a:prstGeom>
-          <a:noFill/>
-          <a:ln/>
-        </p:spPr>
-        <p:txBody>
-          <a:bodyPr wrap="square" lIns="0" tIns="0" rIns="0" bIns="0" rtlCol="0" anchor="ctr"/>
-          <a:lstStyle/>
-          <a:p>
-            <a:pPr marL="0" indent="0">
-              <a:buNone/>
-            </a:pPr>
-            <a:r>
-              <a:rPr lang="en-US" sz="1400" b="1" dirty="0">
-                <a:solidFill>
-                  <a:srgbClr val="FFFFFF"/>
-                </a:solidFill>
-              </a:rPr>
-              <a:t>CloudWatch + X-Ray</a:t>
-            </a:r>
-            <a:endParaRPr lang="en-US" sz="1400" dirty="0"/>
-          </a:p>
-        </p:txBody>
-      </p:sp>
-      <p:sp>
-        <p:nvSpPr>
-          <p:cNvPr id="27" name="Text 25"/>
-          <p:cNvSpPr/>
-          <p:nvPr/>
-        </p:nvSpPr>
-        <p:spPr>
-          <a:xfrm>
-            <a:off x="5623560" y="4114800"/>
-            <a:ext cx="3246120" cy="685800"/>
-          </a:xfrm>
-          <a:prstGeom prst="rect">
-            <a:avLst/>
-          </a:prstGeom>
-          <a:noFill/>
-          <a:ln/>
-        </p:spPr>
-        <p:txBody>
-          <a:bodyPr wrap="square" lIns="0" tIns="0" rIns="0" bIns="0" rtlCol="0" anchor="ctr"/>
-          <a:lstStyle/>
-          <a:p>
-            <a:pPr marL="0" indent="0">
-              <a:buNone/>
-            </a:pPr>
-            <a:r>
-              <a:rPr lang="en-US" sz="1100" dirty="0">
-                <a:solidFill>
-                  <a:srgbClr val="E2E8F0"/>
-                </a:solidFill>
-              </a:rPr>
-              <a:t>Logs, metrics, and distributed traces for the production pipeline</a:t>
             </a:r>
             <a:endParaRPr lang="en-US" sz="1100" dirty="0"/>
           </a:p>
